--- a/HI2459_finalproject-option1-presentation_jeb382.pptx
+++ b/HI2459_finalproject-option1-presentation_jeb382.pptx
@@ -2,19 +2,17 @@
 <file path=ppt/presentation.xml><?xml version="1.0" encoding="utf-8"?>
 <p:presentation xmlns:a="http://schemas.openxmlformats.org/drawingml/2006/main" xmlns:r="http://schemas.openxmlformats.org/officeDocument/2006/relationships" xmlns:p="http://schemas.openxmlformats.org/presentationml/2006/main" saveSubsetFonts="1">
   <p:sldMasterIdLst>
-    <p:sldMasterId id="2147483648" r:id="rId1"/>
+    <p:sldMasterId id="2147483689" r:id="rId1"/>
   </p:sldMasterIdLst>
   <p:sldIdLst>
     <p:sldId id="256" r:id="rId2"/>
     <p:sldId id="257" r:id="rId3"/>
     <p:sldId id="258" r:id="rId4"/>
     <p:sldId id="259" r:id="rId5"/>
-    <p:sldId id="260" r:id="rId6"/>
-    <p:sldId id="261" r:id="rId7"/>
-    <p:sldId id="262" r:id="rId8"/>
-    <p:sldId id="263" r:id="rId9"/>
-    <p:sldId id="264" r:id="rId10"/>
-    <p:sldId id="265" r:id="rId11"/>
+    <p:sldId id="261" r:id="rId6"/>
+    <p:sldId id="266" r:id="rId7"/>
+    <p:sldId id="264" r:id="rId8"/>
+    <p:sldId id="265" r:id="rId9"/>
   </p:sldIdLst>
   <p:sldSz cx="12192000" cy="6858000"/>
   <p:notesSz cx="6858000" cy="9144000"/>
@@ -138,7 +136,7 @@
           <p:cNvPr id="2" name="Title 1">
             <a:extLst>
               <a:ext uri="{FF2B5EF4-FFF2-40B4-BE49-F238E27FC236}">
-                <a16:creationId xmlns:a16="http://schemas.microsoft.com/office/drawing/2014/main" id="{61AC1C0E-04A5-571D-46BE-D796F8421EFD}"/>
+                <a16:creationId xmlns:a16="http://schemas.microsoft.com/office/drawing/2014/main" id="{40F21D90-DCCC-BAA8-2D91-1E27B9A35AC7}"/>
               </a:ext>
             </a:extLst>
           </p:cNvPr>
@@ -175,7 +173,7 @@
           <p:cNvPr id="3" name="Subtitle 2">
             <a:extLst>
               <a:ext uri="{FF2B5EF4-FFF2-40B4-BE49-F238E27FC236}">
-                <a16:creationId xmlns:a16="http://schemas.microsoft.com/office/drawing/2014/main" id="{F3DB978E-829E-D2A8-8C34-D3A0EA5190B3}"/>
+                <a16:creationId xmlns:a16="http://schemas.microsoft.com/office/drawing/2014/main" id="{679D33CE-A028-0EC9-49B3-E92D8EC7A459}"/>
               </a:ext>
             </a:extLst>
           </p:cNvPr>
@@ -245,7 +243,7 @@
           <p:cNvPr id="4" name="Date Placeholder 3">
             <a:extLst>
               <a:ext uri="{FF2B5EF4-FFF2-40B4-BE49-F238E27FC236}">
-                <a16:creationId xmlns:a16="http://schemas.microsoft.com/office/drawing/2014/main" id="{5AF8B8CC-C468-D4CE-2BD1-6526715CFF86}"/>
+                <a16:creationId xmlns:a16="http://schemas.microsoft.com/office/drawing/2014/main" id="{9D40D6F6-0A1B-45D5-F2B1-4652FDEB2171}"/>
               </a:ext>
             </a:extLst>
           </p:cNvPr>
@@ -274,7 +272,7 @@
           <p:cNvPr id="5" name="Footer Placeholder 4">
             <a:extLst>
               <a:ext uri="{FF2B5EF4-FFF2-40B4-BE49-F238E27FC236}">
-                <a16:creationId xmlns:a16="http://schemas.microsoft.com/office/drawing/2014/main" id="{5FD490FE-FCE0-9F22-A8D7-A784A95C88C7}"/>
+                <a16:creationId xmlns:a16="http://schemas.microsoft.com/office/drawing/2014/main" id="{DE2EBE07-4B45-8EF6-4C09-72E667F27A26}"/>
               </a:ext>
             </a:extLst>
           </p:cNvPr>
@@ -299,7 +297,7 @@
           <p:cNvPr id="6" name="Slide Number Placeholder 5">
             <a:extLst>
               <a:ext uri="{FF2B5EF4-FFF2-40B4-BE49-F238E27FC236}">
-                <a16:creationId xmlns:a16="http://schemas.microsoft.com/office/drawing/2014/main" id="{C7A05FF6-51F4-1742-04B2-66CE8955CAA6}"/>
+                <a16:creationId xmlns:a16="http://schemas.microsoft.com/office/drawing/2014/main" id="{DF849B99-A1CC-5EFF-6614-D3D4799A4FCA}"/>
               </a:ext>
             </a:extLst>
           </p:cNvPr>
@@ -326,7 +324,7 @@
     </p:spTree>
     <p:extLst>
       <p:ext uri="{BB962C8B-B14F-4D97-AF65-F5344CB8AC3E}">
-        <p14:creationId xmlns:p14="http://schemas.microsoft.com/office/powerpoint/2010/main" val="219352218"/>
+        <p14:creationId xmlns:p14="http://schemas.microsoft.com/office/powerpoint/2010/main" val="2988694020"/>
       </p:ext>
     </p:extLst>
   </p:cSld>
@@ -358,7 +356,7 @@
           <p:cNvPr id="2" name="Title 1">
             <a:extLst>
               <a:ext uri="{FF2B5EF4-FFF2-40B4-BE49-F238E27FC236}">
-                <a16:creationId xmlns:a16="http://schemas.microsoft.com/office/drawing/2014/main" id="{49996A57-AEDD-8E6D-EBB0-82CF43D70BAF}"/>
+                <a16:creationId xmlns:a16="http://schemas.microsoft.com/office/drawing/2014/main" id="{D0AF75BF-800D-75C6-4676-5F80B3DAB227}"/>
               </a:ext>
             </a:extLst>
           </p:cNvPr>
@@ -386,7 +384,7 @@
           <p:cNvPr id="3" name="Vertical Text Placeholder 2">
             <a:extLst>
               <a:ext uri="{FF2B5EF4-FFF2-40B4-BE49-F238E27FC236}">
-                <a16:creationId xmlns:a16="http://schemas.microsoft.com/office/drawing/2014/main" id="{ABFDDA95-3F7E-9147-0236-44800618A175}"/>
+                <a16:creationId xmlns:a16="http://schemas.microsoft.com/office/drawing/2014/main" id="{39867432-4E28-FC3B-938F-B5C2B1FEEF39}"/>
               </a:ext>
             </a:extLst>
           </p:cNvPr>
@@ -443,7 +441,7 @@
           <p:cNvPr id="4" name="Date Placeholder 3">
             <a:extLst>
               <a:ext uri="{FF2B5EF4-FFF2-40B4-BE49-F238E27FC236}">
-                <a16:creationId xmlns:a16="http://schemas.microsoft.com/office/drawing/2014/main" id="{C20E62DA-9627-3CE4-CD64-ECF39FF57EB3}"/>
+                <a16:creationId xmlns:a16="http://schemas.microsoft.com/office/drawing/2014/main" id="{4D67AE03-A513-67FA-205D-E5736371EDC7}"/>
               </a:ext>
             </a:extLst>
           </p:cNvPr>
@@ -472,7 +470,7 @@
           <p:cNvPr id="5" name="Footer Placeholder 4">
             <a:extLst>
               <a:ext uri="{FF2B5EF4-FFF2-40B4-BE49-F238E27FC236}">
-                <a16:creationId xmlns:a16="http://schemas.microsoft.com/office/drawing/2014/main" id="{E61140A9-A203-F965-C501-EED034B67581}"/>
+                <a16:creationId xmlns:a16="http://schemas.microsoft.com/office/drawing/2014/main" id="{6B879708-C1A9-39D6-8B56-7E28061E4CA6}"/>
               </a:ext>
             </a:extLst>
           </p:cNvPr>
@@ -497,7 +495,7 @@
           <p:cNvPr id="6" name="Slide Number Placeholder 5">
             <a:extLst>
               <a:ext uri="{FF2B5EF4-FFF2-40B4-BE49-F238E27FC236}">
-                <a16:creationId xmlns:a16="http://schemas.microsoft.com/office/drawing/2014/main" id="{9E8469FF-C137-AD53-8DDB-811BDB6C972D}"/>
+                <a16:creationId xmlns:a16="http://schemas.microsoft.com/office/drawing/2014/main" id="{7AB76839-D343-FF8E-5FEC-4AFAA05A21CB}"/>
               </a:ext>
             </a:extLst>
           </p:cNvPr>
@@ -524,7 +522,7 @@
     </p:spTree>
     <p:extLst>
       <p:ext uri="{BB962C8B-B14F-4D97-AF65-F5344CB8AC3E}">
-        <p14:creationId xmlns:p14="http://schemas.microsoft.com/office/powerpoint/2010/main" val="2708505336"/>
+        <p14:creationId xmlns:p14="http://schemas.microsoft.com/office/powerpoint/2010/main" val="2884022136"/>
       </p:ext>
     </p:extLst>
   </p:cSld>
@@ -556,7 +554,7 @@
           <p:cNvPr id="2" name="Vertical Title 1">
             <a:extLst>
               <a:ext uri="{FF2B5EF4-FFF2-40B4-BE49-F238E27FC236}">
-                <a16:creationId xmlns:a16="http://schemas.microsoft.com/office/drawing/2014/main" id="{953804D7-F4BD-8D93-6886-9BBDB4CB1610}"/>
+                <a16:creationId xmlns:a16="http://schemas.microsoft.com/office/drawing/2014/main" id="{BECAE7A8-1FED-5C29-453D-912ED042B98A}"/>
               </a:ext>
             </a:extLst>
           </p:cNvPr>
@@ -589,7 +587,7 @@
           <p:cNvPr id="3" name="Vertical Text Placeholder 2">
             <a:extLst>
               <a:ext uri="{FF2B5EF4-FFF2-40B4-BE49-F238E27FC236}">
-                <a16:creationId xmlns:a16="http://schemas.microsoft.com/office/drawing/2014/main" id="{E0E0D756-F960-47D4-B481-77EBD575DC31}"/>
+                <a16:creationId xmlns:a16="http://schemas.microsoft.com/office/drawing/2014/main" id="{448FE1DF-8070-CA89-5812-87A89B0D4103}"/>
               </a:ext>
             </a:extLst>
           </p:cNvPr>
@@ -651,7 +649,7 @@
           <p:cNvPr id="4" name="Date Placeholder 3">
             <a:extLst>
               <a:ext uri="{FF2B5EF4-FFF2-40B4-BE49-F238E27FC236}">
-                <a16:creationId xmlns:a16="http://schemas.microsoft.com/office/drawing/2014/main" id="{62751D16-554E-DD8C-D63B-7A7C12CBB250}"/>
+                <a16:creationId xmlns:a16="http://schemas.microsoft.com/office/drawing/2014/main" id="{CE0282FF-5F96-0ECD-E73F-433BDE4A8718}"/>
               </a:ext>
             </a:extLst>
           </p:cNvPr>
@@ -680,7 +678,7 @@
           <p:cNvPr id="5" name="Footer Placeholder 4">
             <a:extLst>
               <a:ext uri="{FF2B5EF4-FFF2-40B4-BE49-F238E27FC236}">
-                <a16:creationId xmlns:a16="http://schemas.microsoft.com/office/drawing/2014/main" id="{05E6AE53-FC06-081D-5096-BC577082EF5E}"/>
+                <a16:creationId xmlns:a16="http://schemas.microsoft.com/office/drawing/2014/main" id="{2D975990-8A28-2ED1-F880-DF86B348DDC6}"/>
               </a:ext>
             </a:extLst>
           </p:cNvPr>
@@ -705,7 +703,7 @@
           <p:cNvPr id="6" name="Slide Number Placeholder 5">
             <a:extLst>
               <a:ext uri="{FF2B5EF4-FFF2-40B4-BE49-F238E27FC236}">
-                <a16:creationId xmlns:a16="http://schemas.microsoft.com/office/drawing/2014/main" id="{4D532E8B-C64B-493D-0D81-BD487B93341F}"/>
+                <a16:creationId xmlns:a16="http://schemas.microsoft.com/office/drawing/2014/main" id="{B9E02802-55C7-28B5-3FF7-9450C79DBCB1}"/>
               </a:ext>
             </a:extLst>
           </p:cNvPr>
@@ -732,7 +730,7 @@
     </p:spTree>
     <p:extLst>
       <p:ext uri="{BB962C8B-B14F-4D97-AF65-F5344CB8AC3E}">
-        <p14:creationId xmlns:p14="http://schemas.microsoft.com/office/powerpoint/2010/main" val="2665192629"/>
+        <p14:creationId xmlns:p14="http://schemas.microsoft.com/office/powerpoint/2010/main" val="2754779964"/>
       </p:ext>
     </p:extLst>
   </p:cSld>
@@ -764,7 +762,7 @@
           <p:cNvPr id="2" name="Title 1">
             <a:extLst>
               <a:ext uri="{FF2B5EF4-FFF2-40B4-BE49-F238E27FC236}">
-                <a16:creationId xmlns:a16="http://schemas.microsoft.com/office/drawing/2014/main" id="{862E004E-C8AF-0777-330B-2FEB5AFE2AB9}"/>
+                <a16:creationId xmlns:a16="http://schemas.microsoft.com/office/drawing/2014/main" id="{5E7B5D26-C11A-B934-7673-A779E28F7F3A}"/>
               </a:ext>
             </a:extLst>
           </p:cNvPr>
@@ -792,7 +790,7 @@
           <p:cNvPr id="3" name="Content Placeholder 2">
             <a:extLst>
               <a:ext uri="{FF2B5EF4-FFF2-40B4-BE49-F238E27FC236}">
-                <a16:creationId xmlns:a16="http://schemas.microsoft.com/office/drawing/2014/main" id="{9612CC89-77C0-921A-34A4-9F35C70A7E42}"/>
+                <a16:creationId xmlns:a16="http://schemas.microsoft.com/office/drawing/2014/main" id="{B55B9A35-9A7C-3233-CA23-EF53F827265E}"/>
               </a:ext>
             </a:extLst>
           </p:cNvPr>
@@ -849,7 +847,7 @@
           <p:cNvPr id="4" name="Date Placeholder 3">
             <a:extLst>
               <a:ext uri="{FF2B5EF4-FFF2-40B4-BE49-F238E27FC236}">
-                <a16:creationId xmlns:a16="http://schemas.microsoft.com/office/drawing/2014/main" id="{A3715CE1-88A3-D3A2-7C64-669174824242}"/>
+                <a16:creationId xmlns:a16="http://schemas.microsoft.com/office/drawing/2014/main" id="{0F77B2A1-5485-E611-6EFD-F51791135384}"/>
               </a:ext>
             </a:extLst>
           </p:cNvPr>
@@ -878,7 +876,7 @@
           <p:cNvPr id="5" name="Footer Placeholder 4">
             <a:extLst>
               <a:ext uri="{FF2B5EF4-FFF2-40B4-BE49-F238E27FC236}">
-                <a16:creationId xmlns:a16="http://schemas.microsoft.com/office/drawing/2014/main" id="{D0B737A5-6802-9C23-7676-9D84223840F5}"/>
+                <a16:creationId xmlns:a16="http://schemas.microsoft.com/office/drawing/2014/main" id="{3DC5D52B-5BF2-82AF-D313-7DD1D11D9122}"/>
               </a:ext>
             </a:extLst>
           </p:cNvPr>
@@ -903,7 +901,7 @@
           <p:cNvPr id="6" name="Slide Number Placeholder 5">
             <a:extLst>
               <a:ext uri="{FF2B5EF4-FFF2-40B4-BE49-F238E27FC236}">
-                <a16:creationId xmlns:a16="http://schemas.microsoft.com/office/drawing/2014/main" id="{B252C30D-3473-2B58-6BA2-2BAD1A05EC7B}"/>
+                <a16:creationId xmlns:a16="http://schemas.microsoft.com/office/drawing/2014/main" id="{0DCCE068-7171-412D-57BF-44AAF307BBE0}"/>
               </a:ext>
             </a:extLst>
           </p:cNvPr>
@@ -930,7 +928,7 @@
     </p:spTree>
     <p:extLst>
       <p:ext uri="{BB962C8B-B14F-4D97-AF65-F5344CB8AC3E}">
-        <p14:creationId xmlns:p14="http://schemas.microsoft.com/office/powerpoint/2010/main" val="41498427"/>
+        <p14:creationId xmlns:p14="http://schemas.microsoft.com/office/powerpoint/2010/main" val="869023287"/>
       </p:ext>
     </p:extLst>
   </p:cSld>
@@ -962,7 +960,7 @@
           <p:cNvPr id="2" name="Title 1">
             <a:extLst>
               <a:ext uri="{FF2B5EF4-FFF2-40B4-BE49-F238E27FC236}">
-                <a16:creationId xmlns:a16="http://schemas.microsoft.com/office/drawing/2014/main" id="{2CCB88AE-4108-CF99-D886-F0EEC24CF915}"/>
+                <a16:creationId xmlns:a16="http://schemas.microsoft.com/office/drawing/2014/main" id="{4FCC2542-9FDA-6D6B-D47E-0DDA3485131A}"/>
               </a:ext>
             </a:extLst>
           </p:cNvPr>
@@ -999,7 +997,7 @@
           <p:cNvPr id="3" name="Text Placeholder 2">
             <a:extLst>
               <a:ext uri="{FF2B5EF4-FFF2-40B4-BE49-F238E27FC236}">
-                <a16:creationId xmlns:a16="http://schemas.microsoft.com/office/drawing/2014/main" id="{20BEC784-08C8-2B16-536D-466A6510DE0F}"/>
+                <a16:creationId xmlns:a16="http://schemas.microsoft.com/office/drawing/2014/main" id="{9A6F4D72-5EFD-B43A-9932-9B8F90FB1D50}"/>
               </a:ext>
             </a:extLst>
           </p:cNvPr>
@@ -1124,7 +1122,7 @@
           <p:cNvPr id="4" name="Date Placeholder 3">
             <a:extLst>
               <a:ext uri="{FF2B5EF4-FFF2-40B4-BE49-F238E27FC236}">
-                <a16:creationId xmlns:a16="http://schemas.microsoft.com/office/drawing/2014/main" id="{246640BF-BBF5-2B8C-1843-B35974063510}"/>
+                <a16:creationId xmlns:a16="http://schemas.microsoft.com/office/drawing/2014/main" id="{56D762BC-FD82-FF7E-E165-BEC1C698281F}"/>
               </a:ext>
             </a:extLst>
           </p:cNvPr>
@@ -1153,7 +1151,7 @@
           <p:cNvPr id="5" name="Footer Placeholder 4">
             <a:extLst>
               <a:ext uri="{FF2B5EF4-FFF2-40B4-BE49-F238E27FC236}">
-                <a16:creationId xmlns:a16="http://schemas.microsoft.com/office/drawing/2014/main" id="{C020B855-0CE1-F089-3C42-FA0555800F95}"/>
+                <a16:creationId xmlns:a16="http://schemas.microsoft.com/office/drawing/2014/main" id="{086F4B9A-F770-4F73-2BF7-C6F8A584CD98}"/>
               </a:ext>
             </a:extLst>
           </p:cNvPr>
@@ -1178,7 +1176,7 @@
           <p:cNvPr id="6" name="Slide Number Placeholder 5">
             <a:extLst>
               <a:ext uri="{FF2B5EF4-FFF2-40B4-BE49-F238E27FC236}">
-                <a16:creationId xmlns:a16="http://schemas.microsoft.com/office/drawing/2014/main" id="{8F6F17FE-438A-609B-319F-7C52C2D6FFDE}"/>
+                <a16:creationId xmlns:a16="http://schemas.microsoft.com/office/drawing/2014/main" id="{CDE8B207-BCFD-1FF6-CFF0-F5B4F81E4E65}"/>
               </a:ext>
             </a:extLst>
           </p:cNvPr>
@@ -1205,7 +1203,7 @@
     </p:spTree>
     <p:extLst>
       <p:ext uri="{BB962C8B-B14F-4D97-AF65-F5344CB8AC3E}">
-        <p14:creationId xmlns:p14="http://schemas.microsoft.com/office/powerpoint/2010/main" val="333472875"/>
+        <p14:creationId xmlns:p14="http://schemas.microsoft.com/office/powerpoint/2010/main" val="3390412553"/>
       </p:ext>
     </p:extLst>
   </p:cSld>
@@ -1237,7 +1235,7 @@
           <p:cNvPr id="2" name="Title 1">
             <a:extLst>
               <a:ext uri="{FF2B5EF4-FFF2-40B4-BE49-F238E27FC236}">
-                <a16:creationId xmlns:a16="http://schemas.microsoft.com/office/drawing/2014/main" id="{31BB2ACF-A609-CF85-A7C6-619AB3907DB3}"/>
+                <a16:creationId xmlns:a16="http://schemas.microsoft.com/office/drawing/2014/main" id="{2A60866C-5E71-68AE-0A43-6E78B0A7ECFA}"/>
               </a:ext>
             </a:extLst>
           </p:cNvPr>
@@ -1265,7 +1263,7 @@
           <p:cNvPr id="3" name="Content Placeholder 2">
             <a:extLst>
               <a:ext uri="{FF2B5EF4-FFF2-40B4-BE49-F238E27FC236}">
-                <a16:creationId xmlns:a16="http://schemas.microsoft.com/office/drawing/2014/main" id="{0E3B9F3B-6AED-9AF3-E8FB-9E03A6A066B8}"/>
+                <a16:creationId xmlns:a16="http://schemas.microsoft.com/office/drawing/2014/main" id="{2875663F-E2BE-F42C-0769-0819950C419B}"/>
               </a:ext>
             </a:extLst>
           </p:cNvPr>
@@ -1327,7 +1325,7 @@
           <p:cNvPr id="4" name="Content Placeholder 3">
             <a:extLst>
               <a:ext uri="{FF2B5EF4-FFF2-40B4-BE49-F238E27FC236}">
-                <a16:creationId xmlns:a16="http://schemas.microsoft.com/office/drawing/2014/main" id="{DF47ADED-13C5-0F5F-8F9C-0489461E720D}"/>
+                <a16:creationId xmlns:a16="http://schemas.microsoft.com/office/drawing/2014/main" id="{3FEBE451-BAC3-77D4-E9D6-D506D3518D98}"/>
               </a:ext>
             </a:extLst>
           </p:cNvPr>
@@ -1389,7 +1387,7 @@
           <p:cNvPr id="5" name="Date Placeholder 4">
             <a:extLst>
               <a:ext uri="{FF2B5EF4-FFF2-40B4-BE49-F238E27FC236}">
-                <a16:creationId xmlns:a16="http://schemas.microsoft.com/office/drawing/2014/main" id="{6354A97F-3924-D870-8B79-2EAA1F9DC8B3}"/>
+                <a16:creationId xmlns:a16="http://schemas.microsoft.com/office/drawing/2014/main" id="{2B02DE28-4638-DAE1-017B-ABAE8522771B}"/>
               </a:ext>
             </a:extLst>
           </p:cNvPr>
@@ -1418,7 +1416,7 @@
           <p:cNvPr id="6" name="Footer Placeholder 5">
             <a:extLst>
               <a:ext uri="{FF2B5EF4-FFF2-40B4-BE49-F238E27FC236}">
-                <a16:creationId xmlns:a16="http://schemas.microsoft.com/office/drawing/2014/main" id="{D1606977-FCC3-5E22-498B-66025517815A}"/>
+                <a16:creationId xmlns:a16="http://schemas.microsoft.com/office/drawing/2014/main" id="{7D0E380C-FCAF-E006-A680-318BB3830D65}"/>
               </a:ext>
             </a:extLst>
           </p:cNvPr>
@@ -1443,7 +1441,7 @@
           <p:cNvPr id="7" name="Slide Number Placeholder 6">
             <a:extLst>
               <a:ext uri="{FF2B5EF4-FFF2-40B4-BE49-F238E27FC236}">
-                <a16:creationId xmlns:a16="http://schemas.microsoft.com/office/drawing/2014/main" id="{0A105749-221A-062A-FB2B-4D16B9D461B6}"/>
+                <a16:creationId xmlns:a16="http://schemas.microsoft.com/office/drawing/2014/main" id="{877C5411-F9F0-5570-8D2F-90CF63219F72}"/>
               </a:ext>
             </a:extLst>
           </p:cNvPr>
@@ -1470,7 +1468,7 @@
     </p:spTree>
     <p:extLst>
       <p:ext uri="{BB962C8B-B14F-4D97-AF65-F5344CB8AC3E}">
-        <p14:creationId xmlns:p14="http://schemas.microsoft.com/office/powerpoint/2010/main" val="2224877369"/>
+        <p14:creationId xmlns:p14="http://schemas.microsoft.com/office/powerpoint/2010/main" val="2134898290"/>
       </p:ext>
     </p:extLst>
   </p:cSld>
@@ -1502,7 +1500,7 @@
           <p:cNvPr id="2" name="Title 1">
             <a:extLst>
               <a:ext uri="{FF2B5EF4-FFF2-40B4-BE49-F238E27FC236}">
-                <a16:creationId xmlns:a16="http://schemas.microsoft.com/office/drawing/2014/main" id="{8A562DAA-85A4-E958-7BCC-2E4AB92C30BF}"/>
+                <a16:creationId xmlns:a16="http://schemas.microsoft.com/office/drawing/2014/main" id="{8DBC7982-5B1A-8EF0-ABC9-1E8ADE6571EF}"/>
               </a:ext>
             </a:extLst>
           </p:cNvPr>
@@ -1535,7 +1533,7 @@
           <p:cNvPr id="3" name="Text Placeholder 2">
             <a:extLst>
               <a:ext uri="{FF2B5EF4-FFF2-40B4-BE49-F238E27FC236}">
-                <a16:creationId xmlns:a16="http://schemas.microsoft.com/office/drawing/2014/main" id="{1E9B87EB-A277-1C34-0C38-85AA58D83339}"/>
+                <a16:creationId xmlns:a16="http://schemas.microsoft.com/office/drawing/2014/main" id="{EC795EAA-5F5D-785B-2935-EF3D4458E571}"/>
               </a:ext>
             </a:extLst>
           </p:cNvPr>
@@ -1606,7 +1604,7 @@
           <p:cNvPr id="4" name="Content Placeholder 3">
             <a:extLst>
               <a:ext uri="{FF2B5EF4-FFF2-40B4-BE49-F238E27FC236}">
-                <a16:creationId xmlns:a16="http://schemas.microsoft.com/office/drawing/2014/main" id="{1F677859-A5E8-4B5E-BB04-EFF222DADD9F}"/>
+                <a16:creationId xmlns:a16="http://schemas.microsoft.com/office/drawing/2014/main" id="{B3A2F789-BC2B-8E5F-DDC0-E4E40E877B2A}"/>
               </a:ext>
             </a:extLst>
           </p:cNvPr>
@@ -1668,7 +1666,7 @@
           <p:cNvPr id="5" name="Text Placeholder 4">
             <a:extLst>
               <a:ext uri="{FF2B5EF4-FFF2-40B4-BE49-F238E27FC236}">
-                <a16:creationId xmlns:a16="http://schemas.microsoft.com/office/drawing/2014/main" id="{7789F8DF-D853-30EB-6485-BA44DC29439C}"/>
+                <a16:creationId xmlns:a16="http://schemas.microsoft.com/office/drawing/2014/main" id="{A6016B06-B1DB-344B-0830-2DABDE9AF820}"/>
               </a:ext>
             </a:extLst>
           </p:cNvPr>
@@ -1739,7 +1737,7 @@
           <p:cNvPr id="6" name="Content Placeholder 5">
             <a:extLst>
               <a:ext uri="{FF2B5EF4-FFF2-40B4-BE49-F238E27FC236}">
-                <a16:creationId xmlns:a16="http://schemas.microsoft.com/office/drawing/2014/main" id="{2AA2BE02-CC4D-2DF3-EA98-34872C43D5E5}"/>
+                <a16:creationId xmlns:a16="http://schemas.microsoft.com/office/drawing/2014/main" id="{A7834CF9-F280-B478-0FCC-DF58F6BFE9C9}"/>
               </a:ext>
             </a:extLst>
           </p:cNvPr>
@@ -1801,7 +1799,7 @@
           <p:cNvPr id="7" name="Date Placeholder 6">
             <a:extLst>
               <a:ext uri="{FF2B5EF4-FFF2-40B4-BE49-F238E27FC236}">
-                <a16:creationId xmlns:a16="http://schemas.microsoft.com/office/drawing/2014/main" id="{432D0C07-57EB-8710-6EE2-1603BAD5E458}"/>
+                <a16:creationId xmlns:a16="http://schemas.microsoft.com/office/drawing/2014/main" id="{185F00D9-415B-C829-14C4-92690D764523}"/>
               </a:ext>
             </a:extLst>
           </p:cNvPr>
@@ -1830,7 +1828,7 @@
           <p:cNvPr id="8" name="Footer Placeholder 7">
             <a:extLst>
               <a:ext uri="{FF2B5EF4-FFF2-40B4-BE49-F238E27FC236}">
-                <a16:creationId xmlns:a16="http://schemas.microsoft.com/office/drawing/2014/main" id="{FBB3D5EF-D538-4C09-AE39-83CB9A77D5F4}"/>
+                <a16:creationId xmlns:a16="http://schemas.microsoft.com/office/drawing/2014/main" id="{DB9ADECF-A892-6A88-809F-BD00879F00E9}"/>
               </a:ext>
             </a:extLst>
           </p:cNvPr>
@@ -1855,7 +1853,7 @@
           <p:cNvPr id="9" name="Slide Number Placeholder 8">
             <a:extLst>
               <a:ext uri="{FF2B5EF4-FFF2-40B4-BE49-F238E27FC236}">
-                <a16:creationId xmlns:a16="http://schemas.microsoft.com/office/drawing/2014/main" id="{09B288F4-B13C-0FB7-DB52-8CE4708E58C6}"/>
+                <a16:creationId xmlns:a16="http://schemas.microsoft.com/office/drawing/2014/main" id="{C9397252-5042-0773-051C-CA0D78D20738}"/>
               </a:ext>
             </a:extLst>
           </p:cNvPr>
@@ -1882,7 +1880,7 @@
     </p:spTree>
     <p:extLst>
       <p:ext uri="{BB962C8B-B14F-4D97-AF65-F5344CB8AC3E}">
-        <p14:creationId xmlns:p14="http://schemas.microsoft.com/office/powerpoint/2010/main" val="2320362217"/>
+        <p14:creationId xmlns:p14="http://schemas.microsoft.com/office/powerpoint/2010/main" val="896236985"/>
       </p:ext>
     </p:extLst>
   </p:cSld>
@@ -1914,7 +1912,7 @@
           <p:cNvPr id="2" name="Title 1">
             <a:extLst>
               <a:ext uri="{FF2B5EF4-FFF2-40B4-BE49-F238E27FC236}">
-                <a16:creationId xmlns:a16="http://schemas.microsoft.com/office/drawing/2014/main" id="{6DD4FDA8-9799-F3D7-17F4-1E238481E465}"/>
+                <a16:creationId xmlns:a16="http://schemas.microsoft.com/office/drawing/2014/main" id="{5DB2DB60-B4D2-9512-AD46-59D875C4FCD5}"/>
               </a:ext>
             </a:extLst>
           </p:cNvPr>
@@ -1942,7 +1940,7 @@
           <p:cNvPr id="3" name="Date Placeholder 2">
             <a:extLst>
               <a:ext uri="{FF2B5EF4-FFF2-40B4-BE49-F238E27FC236}">
-                <a16:creationId xmlns:a16="http://schemas.microsoft.com/office/drawing/2014/main" id="{89CBB4FD-BD87-1E05-8B11-694061C90C4D}"/>
+                <a16:creationId xmlns:a16="http://schemas.microsoft.com/office/drawing/2014/main" id="{CC1444C9-29DD-00E9-7BEB-E639680CB311}"/>
               </a:ext>
             </a:extLst>
           </p:cNvPr>
@@ -1971,7 +1969,7 @@
           <p:cNvPr id="4" name="Footer Placeholder 3">
             <a:extLst>
               <a:ext uri="{FF2B5EF4-FFF2-40B4-BE49-F238E27FC236}">
-                <a16:creationId xmlns:a16="http://schemas.microsoft.com/office/drawing/2014/main" id="{09D1EEAD-24CB-A7B9-C9F8-10D25F05B692}"/>
+                <a16:creationId xmlns:a16="http://schemas.microsoft.com/office/drawing/2014/main" id="{5033F175-AC94-3424-865D-7D4B8905A38C}"/>
               </a:ext>
             </a:extLst>
           </p:cNvPr>
@@ -1996,7 +1994,7 @@
           <p:cNvPr id="5" name="Slide Number Placeholder 4">
             <a:extLst>
               <a:ext uri="{FF2B5EF4-FFF2-40B4-BE49-F238E27FC236}">
-                <a16:creationId xmlns:a16="http://schemas.microsoft.com/office/drawing/2014/main" id="{A98AFAC5-7257-2C41-3DC6-C18B944CFB5A}"/>
+                <a16:creationId xmlns:a16="http://schemas.microsoft.com/office/drawing/2014/main" id="{8AF2A379-A350-C853-C2C9-92BB9DCDA84A}"/>
               </a:ext>
             </a:extLst>
           </p:cNvPr>
@@ -2023,7 +2021,7 @@
     </p:spTree>
     <p:extLst>
       <p:ext uri="{BB962C8B-B14F-4D97-AF65-F5344CB8AC3E}">
-        <p14:creationId xmlns:p14="http://schemas.microsoft.com/office/powerpoint/2010/main" val="4275927964"/>
+        <p14:creationId xmlns:p14="http://schemas.microsoft.com/office/powerpoint/2010/main" val="1693249179"/>
       </p:ext>
     </p:extLst>
   </p:cSld>
@@ -2055,7 +2053,7 @@
           <p:cNvPr id="2" name="Date Placeholder 1">
             <a:extLst>
               <a:ext uri="{FF2B5EF4-FFF2-40B4-BE49-F238E27FC236}">
-                <a16:creationId xmlns:a16="http://schemas.microsoft.com/office/drawing/2014/main" id="{6C85114D-1C87-E3C8-188B-0DF869A06D8F}"/>
+                <a16:creationId xmlns:a16="http://schemas.microsoft.com/office/drawing/2014/main" id="{01744C9D-2CEF-BA88-C1EB-EE53B6309CAC}"/>
               </a:ext>
             </a:extLst>
           </p:cNvPr>
@@ -2084,7 +2082,7 @@
           <p:cNvPr id="3" name="Footer Placeholder 2">
             <a:extLst>
               <a:ext uri="{FF2B5EF4-FFF2-40B4-BE49-F238E27FC236}">
-                <a16:creationId xmlns:a16="http://schemas.microsoft.com/office/drawing/2014/main" id="{04CA3821-E836-A68E-D0BE-E6193935E0AF}"/>
+                <a16:creationId xmlns:a16="http://schemas.microsoft.com/office/drawing/2014/main" id="{057AF285-ED87-C118-CF5F-7ACD2A5696DF}"/>
               </a:ext>
             </a:extLst>
           </p:cNvPr>
@@ -2109,7 +2107,7 @@
           <p:cNvPr id="4" name="Slide Number Placeholder 3">
             <a:extLst>
               <a:ext uri="{FF2B5EF4-FFF2-40B4-BE49-F238E27FC236}">
-                <a16:creationId xmlns:a16="http://schemas.microsoft.com/office/drawing/2014/main" id="{88967C21-F9CD-AF09-F6F3-9BF3E7C5B940}"/>
+                <a16:creationId xmlns:a16="http://schemas.microsoft.com/office/drawing/2014/main" id="{F2107CA8-2E7D-3CBA-0D46-4A61BFA61C61}"/>
               </a:ext>
             </a:extLst>
           </p:cNvPr>
@@ -2136,7 +2134,7 @@
     </p:spTree>
     <p:extLst>
       <p:ext uri="{BB962C8B-B14F-4D97-AF65-F5344CB8AC3E}">
-        <p14:creationId xmlns:p14="http://schemas.microsoft.com/office/powerpoint/2010/main" val="1190275884"/>
+        <p14:creationId xmlns:p14="http://schemas.microsoft.com/office/powerpoint/2010/main" val="3954871541"/>
       </p:ext>
     </p:extLst>
   </p:cSld>
@@ -2168,7 +2166,7 @@
           <p:cNvPr id="2" name="Title 1">
             <a:extLst>
               <a:ext uri="{FF2B5EF4-FFF2-40B4-BE49-F238E27FC236}">
-                <a16:creationId xmlns:a16="http://schemas.microsoft.com/office/drawing/2014/main" id="{0D19D1E4-252D-C10D-7C59-FFB7CABD7795}"/>
+                <a16:creationId xmlns:a16="http://schemas.microsoft.com/office/drawing/2014/main" id="{0F6F86BA-1CDC-4807-50F5-71AEEB60AAAE}"/>
               </a:ext>
             </a:extLst>
           </p:cNvPr>
@@ -2205,7 +2203,7 @@
           <p:cNvPr id="3" name="Content Placeholder 2">
             <a:extLst>
               <a:ext uri="{FF2B5EF4-FFF2-40B4-BE49-F238E27FC236}">
-                <a16:creationId xmlns:a16="http://schemas.microsoft.com/office/drawing/2014/main" id="{72E8FA94-86D5-499E-E186-AA5CF15853FD}"/>
+                <a16:creationId xmlns:a16="http://schemas.microsoft.com/office/drawing/2014/main" id="{739E806E-50E0-3447-9865-3EFF7197C597}"/>
               </a:ext>
             </a:extLst>
           </p:cNvPr>
@@ -2295,7 +2293,7 @@
           <p:cNvPr id="4" name="Text Placeholder 3">
             <a:extLst>
               <a:ext uri="{FF2B5EF4-FFF2-40B4-BE49-F238E27FC236}">
-                <a16:creationId xmlns:a16="http://schemas.microsoft.com/office/drawing/2014/main" id="{993AFF8E-08BC-1508-79FD-AD9C8C8E6967}"/>
+                <a16:creationId xmlns:a16="http://schemas.microsoft.com/office/drawing/2014/main" id="{CE54EA0E-51D9-3DC2-FE14-546B00C6576B}"/>
               </a:ext>
             </a:extLst>
           </p:cNvPr>
@@ -2366,7 +2364,7 @@
           <p:cNvPr id="5" name="Date Placeholder 4">
             <a:extLst>
               <a:ext uri="{FF2B5EF4-FFF2-40B4-BE49-F238E27FC236}">
-                <a16:creationId xmlns:a16="http://schemas.microsoft.com/office/drawing/2014/main" id="{BB3178AE-7633-3C36-F543-2566B5797148}"/>
+                <a16:creationId xmlns:a16="http://schemas.microsoft.com/office/drawing/2014/main" id="{6A01FAD8-5EF4-0E02-E4C2-DC976E0C6C31}"/>
               </a:ext>
             </a:extLst>
           </p:cNvPr>
@@ -2395,7 +2393,7 @@
           <p:cNvPr id="6" name="Footer Placeholder 5">
             <a:extLst>
               <a:ext uri="{FF2B5EF4-FFF2-40B4-BE49-F238E27FC236}">
-                <a16:creationId xmlns:a16="http://schemas.microsoft.com/office/drawing/2014/main" id="{AB1D674D-0ECD-A91F-E902-BB58A0D4C5B8}"/>
+                <a16:creationId xmlns:a16="http://schemas.microsoft.com/office/drawing/2014/main" id="{78A317B6-EC40-87EF-1685-F6C665E54C07}"/>
               </a:ext>
             </a:extLst>
           </p:cNvPr>
@@ -2420,7 +2418,7 @@
           <p:cNvPr id="7" name="Slide Number Placeholder 6">
             <a:extLst>
               <a:ext uri="{FF2B5EF4-FFF2-40B4-BE49-F238E27FC236}">
-                <a16:creationId xmlns:a16="http://schemas.microsoft.com/office/drawing/2014/main" id="{BCDABABA-874D-B381-9462-0AB8154144A3}"/>
+                <a16:creationId xmlns:a16="http://schemas.microsoft.com/office/drawing/2014/main" id="{F66709BA-C660-C4B7-4B69-9E42CBFB6535}"/>
               </a:ext>
             </a:extLst>
           </p:cNvPr>
@@ -2447,7 +2445,7 @@
     </p:spTree>
     <p:extLst>
       <p:ext uri="{BB962C8B-B14F-4D97-AF65-F5344CB8AC3E}">
-        <p14:creationId xmlns:p14="http://schemas.microsoft.com/office/powerpoint/2010/main" val="3404472830"/>
+        <p14:creationId xmlns:p14="http://schemas.microsoft.com/office/powerpoint/2010/main" val="799628581"/>
       </p:ext>
     </p:extLst>
   </p:cSld>
@@ -2479,7 +2477,7 @@
           <p:cNvPr id="2" name="Title 1">
             <a:extLst>
               <a:ext uri="{FF2B5EF4-FFF2-40B4-BE49-F238E27FC236}">
-                <a16:creationId xmlns:a16="http://schemas.microsoft.com/office/drawing/2014/main" id="{1E06EA82-10A3-349B-EBED-DD9901DCC294}"/>
+                <a16:creationId xmlns:a16="http://schemas.microsoft.com/office/drawing/2014/main" id="{065AF38A-5DDE-1ED9-041A-DF90B9537667}"/>
               </a:ext>
             </a:extLst>
           </p:cNvPr>
@@ -2516,7 +2514,7 @@
           <p:cNvPr id="3" name="Picture Placeholder 2">
             <a:extLst>
               <a:ext uri="{FF2B5EF4-FFF2-40B4-BE49-F238E27FC236}">
-                <a16:creationId xmlns:a16="http://schemas.microsoft.com/office/drawing/2014/main" id="{0E3FCBD2-E118-EA76-2277-324B77D22978}"/>
+                <a16:creationId xmlns:a16="http://schemas.microsoft.com/office/drawing/2014/main" id="{3821A51B-FD00-A922-9332-D7F2DFFF4ABD}"/>
               </a:ext>
             </a:extLst>
           </p:cNvPr>
@@ -2583,7 +2581,7 @@
           <p:cNvPr id="4" name="Text Placeholder 3">
             <a:extLst>
               <a:ext uri="{FF2B5EF4-FFF2-40B4-BE49-F238E27FC236}">
-                <a16:creationId xmlns:a16="http://schemas.microsoft.com/office/drawing/2014/main" id="{05D57096-CAE5-5B9E-19B3-90D8C07E77C5}"/>
+                <a16:creationId xmlns:a16="http://schemas.microsoft.com/office/drawing/2014/main" id="{75A4C8E1-45CE-2C73-B4E3-2441F952151B}"/>
               </a:ext>
             </a:extLst>
           </p:cNvPr>
@@ -2654,7 +2652,7 @@
           <p:cNvPr id="5" name="Date Placeholder 4">
             <a:extLst>
               <a:ext uri="{FF2B5EF4-FFF2-40B4-BE49-F238E27FC236}">
-                <a16:creationId xmlns:a16="http://schemas.microsoft.com/office/drawing/2014/main" id="{AD87CFAF-DFED-9FD7-2DF4-7B40E68A3B4A}"/>
+                <a16:creationId xmlns:a16="http://schemas.microsoft.com/office/drawing/2014/main" id="{2A877784-C85A-99E7-91EE-34B249B3B273}"/>
               </a:ext>
             </a:extLst>
           </p:cNvPr>
@@ -2683,7 +2681,7 @@
           <p:cNvPr id="6" name="Footer Placeholder 5">
             <a:extLst>
               <a:ext uri="{FF2B5EF4-FFF2-40B4-BE49-F238E27FC236}">
-                <a16:creationId xmlns:a16="http://schemas.microsoft.com/office/drawing/2014/main" id="{1C904A62-B86E-95BA-B05A-8456F543C39B}"/>
+                <a16:creationId xmlns:a16="http://schemas.microsoft.com/office/drawing/2014/main" id="{EF463E5B-7447-7387-3B54-D57786C6BFBB}"/>
               </a:ext>
             </a:extLst>
           </p:cNvPr>
@@ -2708,7 +2706,7 @@
           <p:cNvPr id="7" name="Slide Number Placeholder 6">
             <a:extLst>
               <a:ext uri="{FF2B5EF4-FFF2-40B4-BE49-F238E27FC236}">
-                <a16:creationId xmlns:a16="http://schemas.microsoft.com/office/drawing/2014/main" id="{A83F8564-6C62-FC79-0111-E1D005F9937F}"/>
+                <a16:creationId xmlns:a16="http://schemas.microsoft.com/office/drawing/2014/main" id="{EB19B437-DCB9-3A57-1E22-84EE1D3C1F48}"/>
               </a:ext>
             </a:extLst>
           </p:cNvPr>
@@ -2735,7 +2733,7 @@
     </p:spTree>
     <p:extLst>
       <p:ext uri="{BB962C8B-B14F-4D97-AF65-F5344CB8AC3E}">
-        <p14:creationId xmlns:p14="http://schemas.microsoft.com/office/powerpoint/2010/main" val="4148086408"/>
+        <p14:creationId xmlns:p14="http://schemas.microsoft.com/office/powerpoint/2010/main" val="1575784484"/>
       </p:ext>
     </p:extLst>
   </p:cSld>
@@ -2772,7 +2770,7 @@
           <p:cNvPr id="2" name="Title Placeholder 1">
             <a:extLst>
               <a:ext uri="{FF2B5EF4-FFF2-40B4-BE49-F238E27FC236}">
-                <a16:creationId xmlns:a16="http://schemas.microsoft.com/office/drawing/2014/main" id="{1C5D8088-8CC3-79C0-A956-4BD7418EEAE5}"/>
+                <a16:creationId xmlns:a16="http://schemas.microsoft.com/office/drawing/2014/main" id="{F646B66B-8D7F-C18D-9D2E-2275314D6C6B}"/>
               </a:ext>
             </a:extLst>
           </p:cNvPr>
@@ -2810,7 +2808,7 @@
           <p:cNvPr id="3" name="Text Placeholder 2">
             <a:extLst>
               <a:ext uri="{FF2B5EF4-FFF2-40B4-BE49-F238E27FC236}">
-                <a16:creationId xmlns:a16="http://schemas.microsoft.com/office/drawing/2014/main" id="{93603C9A-318F-302F-52C4-3CA917864E78}"/>
+                <a16:creationId xmlns:a16="http://schemas.microsoft.com/office/drawing/2014/main" id="{9CCB5840-EE07-D558-CD72-5619ADAF3117}"/>
               </a:ext>
             </a:extLst>
           </p:cNvPr>
@@ -2877,7 +2875,7 @@
           <p:cNvPr id="4" name="Date Placeholder 3">
             <a:extLst>
               <a:ext uri="{FF2B5EF4-FFF2-40B4-BE49-F238E27FC236}">
-                <a16:creationId xmlns:a16="http://schemas.microsoft.com/office/drawing/2014/main" id="{DCCC23E4-6224-BDBD-3FBF-633E8FC49116}"/>
+                <a16:creationId xmlns:a16="http://schemas.microsoft.com/office/drawing/2014/main" id="{73848462-3DF5-B642-D002-A2F4A089CD83}"/>
               </a:ext>
             </a:extLst>
           </p:cNvPr>
@@ -2924,7 +2922,7 @@
           <p:cNvPr id="5" name="Footer Placeholder 4">
             <a:extLst>
               <a:ext uri="{FF2B5EF4-FFF2-40B4-BE49-F238E27FC236}">
-                <a16:creationId xmlns:a16="http://schemas.microsoft.com/office/drawing/2014/main" id="{F4DC4C1A-C4FD-17DF-0D0F-A58C786ED636}"/>
+                <a16:creationId xmlns:a16="http://schemas.microsoft.com/office/drawing/2014/main" id="{0B2A783C-1B50-F884-1F29-9A7F6C9EBCAB}"/>
               </a:ext>
             </a:extLst>
           </p:cNvPr>
@@ -2967,7 +2965,7 @@
           <p:cNvPr id="6" name="Slide Number Placeholder 5">
             <a:extLst>
               <a:ext uri="{FF2B5EF4-FFF2-40B4-BE49-F238E27FC236}">
-                <a16:creationId xmlns:a16="http://schemas.microsoft.com/office/drawing/2014/main" id="{30D7B9A6-C9CC-124B-5370-A0FB97C3DA33}"/>
+                <a16:creationId xmlns:a16="http://schemas.microsoft.com/office/drawing/2014/main" id="{8E8DA988-1717-E388-53D9-61AC1BAEFA11}"/>
               </a:ext>
             </a:extLst>
           </p:cNvPr>
@@ -3012,23 +3010,23 @@
     </p:spTree>
     <p:extLst>
       <p:ext uri="{BB962C8B-B14F-4D97-AF65-F5344CB8AC3E}">
-        <p14:creationId xmlns:p14="http://schemas.microsoft.com/office/powerpoint/2010/main" val="3916788838"/>
+        <p14:creationId xmlns:p14="http://schemas.microsoft.com/office/powerpoint/2010/main" val="3049262780"/>
       </p:ext>
     </p:extLst>
   </p:cSld>
   <p:clrMap bg1="lt1" tx1="dk1" bg2="lt2" tx2="dk2" accent1="accent1" accent2="accent2" accent3="accent3" accent4="accent4" accent5="accent5" accent6="accent6" hlink="hlink" folHlink="folHlink"/>
   <p:sldLayoutIdLst>
-    <p:sldLayoutId id="2147483649" r:id="rId1"/>
-    <p:sldLayoutId id="2147483650" r:id="rId2"/>
-    <p:sldLayoutId id="2147483651" r:id="rId3"/>
-    <p:sldLayoutId id="2147483652" r:id="rId4"/>
-    <p:sldLayoutId id="2147483653" r:id="rId5"/>
-    <p:sldLayoutId id="2147483654" r:id="rId6"/>
-    <p:sldLayoutId id="2147483655" r:id="rId7"/>
-    <p:sldLayoutId id="2147483656" r:id="rId8"/>
-    <p:sldLayoutId id="2147483657" r:id="rId9"/>
-    <p:sldLayoutId id="2147483658" r:id="rId10"/>
-    <p:sldLayoutId id="2147483659" r:id="rId11"/>
+    <p:sldLayoutId id="2147483690" r:id="rId1"/>
+    <p:sldLayoutId id="2147483691" r:id="rId2"/>
+    <p:sldLayoutId id="2147483692" r:id="rId3"/>
+    <p:sldLayoutId id="2147483693" r:id="rId4"/>
+    <p:sldLayoutId id="2147483694" r:id="rId5"/>
+    <p:sldLayoutId id="2147483695" r:id="rId6"/>
+    <p:sldLayoutId id="2147483696" r:id="rId7"/>
+    <p:sldLayoutId id="2147483697" r:id="rId8"/>
+    <p:sldLayoutId id="2147483698" r:id="rId9"/>
+    <p:sldLayoutId id="2147483699" r:id="rId10"/>
+    <p:sldLayoutId id="2147483700" r:id="rId11"/>
   </p:sldLayoutIdLst>
   <p:txStyles>
     <p:titleStyle>
@@ -3401,90 +3399,6 @@
 </p:sld>
 </file>
 
-<file path=ppt/slides/slide10.xml><?xml version="1.0" encoding="utf-8"?>
-<p:sld xmlns:a="http://schemas.openxmlformats.org/drawingml/2006/main" xmlns:r="http://schemas.openxmlformats.org/officeDocument/2006/relationships" xmlns:p="http://schemas.openxmlformats.org/presentationml/2006/main">
-  <p:cSld>
-    <p:spTree>
-      <p:nvGrpSpPr>
-        <p:cNvPr id="1" name=""/>
-        <p:cNvGrpSpPr/>
-        <p:nvPr/>
-      </p:nvGrpSpPr>
-      <p:grpSpPr>
-        <a:xfrm>
-          <a:off x="0" y="0"/>
-          <a:ext cx="0" cy="0"/>
-          <a:chOff x="0" y="0"/>
-          <a:chExt cx="0" cy="0"/>
-        </a:xfrm>
-      </p:grpSpPr>
-      <p:sp>
-        <p:nvSpPr>
-          <p:cNvPr id="2" name="Title 1">
-            <a:extLst>
-              <a:ext uri="{FF2B5EF4-FFF2-40B4-BE49-F238E27FC236}">
-                <a16:creationId xmlns:a16="http://schemas.microsoft.com/office/drawing/2014/main" id="{4BCC6D43-864B-597A-06E7-F4CB27DEB6B9}"/>
-              </a:ext>
-            </a:extLst>
-          </p:cNvPr>
-          <p:cNvSpPr>
-            <a:spLocks noGrp="1"/>
-          </p:cNvSpPr>
-          <p:nvPr>
-            <p:ph type="title"/>
-          </p:nvPr>
-        </p:nvSpPr>
-        <p:spPr/>
-        <p:txBody>
-          <a:bodyPr/>
-          <a:lstStyle/>
-          <a:p>
-            <a:r>
-              <a:rPr lang="en-US"/>
-              <a:t>References</a:t>
-            </a:r>
-            <a:endParaRPr lang="en-US" dirty="0"/>
-          </a:p>
-        </p:txBody>
-      </p:sp>
-      <p:sp>
-        <p:nvSpPr>
-          <p:cNvPr id="3" name="Content Placeholder 2">
-            <a:extLst>
-              <a:ext uri="{FF2B5EF4-FFF2-40B4-BE49-F238E27FC236}">
-                <a16:creationId xmlns:a16="http://schemas.microsoft.com/office/drawing/2014/main" id="{FD2F129D-B2DA-EA8B-0C9F-41CB9EA9FB72}"/>
-              </a:ext>
-            </a:extLst>
-          </p:cNvPr>
-          <p:cNvSpPr>
-            <a:spLocks noGrp="1"/>
-          </p:cNvSpPr>
-          <p:nvPr>
-            <p:ph idx="1"/>
-          </p:nvPr>
-        </p:nvSpPr>
-        <p:spPr/>
-        <p:txBody>
-          <a:bodyPr/>
-          <a:lstStyle/>
-          <a:p>
-            <a:endParaRPr lang="en-US"/>
-          </a:p>
-        </p:txBody>
-      </p:sp>
-    </p:spTree>
-    <p:extLst>
-      <p:ext uri="{BB962C8B-B14F-4D97-AF65-F5344CB8AC3E}">
-        <p14:creationId xmlns:p14="http://schemas.microsoft.com/office/powerpoint/2010/main" val="867442417"/>
-      </p:ext>
-    </p:extLst>
-  </p:cSld>
-  <p:clrMapOvr>
-    <a:masterClrMapping/>
-  </p:clrMapOvr>
-</p:sld>
-</file>
-
 <file path=ppt/slides/slide2.xml><?xml version="1.0" encoding="utf-8"?>
 <p:sld xmlns:a="http://schemas.openxmlformats.org/drawingml/2006/main" xmlns:r="http://schemas.openxmlformats.org/officeDocument/2006/relationships" xmlns:p="http://schemas.openxmlformats.org/presentationml/2006/main">
   <p:cSld>
@@ -3551,7 +3465,57 @@
           <a:bodyPr/>
           <a:lstStyle/>
           <a:p>
-            <a:endParaRPr lang="en-US"/>
+            <a:r>
+              <a:rPr lang="en-US" dirty="0"/>
+              <a:t>Knee osteoarthritis is a very common degenerative joint disease</a:t>
+            </a:r>
+          </a:p>
+          <a:p>
+            <a:pPr lvl="1"/>
+            <a:r>
+              <a:rPr lang="en-US" dirty="0"/>
+              <a:t>Pain, swelling, stiffness</a:t>
+            </a:r>
+          </a:p>
+          <a:p>
+            <a:r>
+              <a:rPr lang="en-US" dirty="0"/>
+              <a:t>Affects roughly 23% of adults over 40 worldwide</a:t>
+            </a:r>
+          </a:p>
+          <a:p>
+            <a:pPr lvl="1"/>
+            <a:r>
+              <a:rPr lang="en-US" dirty="0"/>
+              <a:t>365 million people</a:t>
+            </a:r>
+          </a:p>
+          <a:p>
+            <a:r>
+              <a:rPr lang="en-US" dirty="0"/>
+              <a:t>Medical Professionals are busy!!!</a:t>
+            </a:r>
+          </a:p>
+          <a:p>
+            <a:pPr lvl="1"/>
+            <a:r>
+              <a:rPr lang="en-US" dirty="0"/>
+              <a:t>Too many patients, not enough doctors</a:t>
+            </a:r>
+          </a:p>
+          <a:p>
+            <a:pPr lvl="1"/>
+            <a:r>
+              <a:rPr lang="en-US" dirty="0"/>
+              <a:t>Diagnostics done with imaging (radiographs) can be aided easily by AI tools</a:t>
+            </a:r>
+          </a:p>
+          <a:p>
+            <a:pPr lvl="2"/>
+            <a:r>
+              <a:rPr lang="en-US" dirty="0"/>
+              <a:t>Save medical professional’s time</a:t>
+            </a:r>
           </a:p>
         </p:txBody>
       </p:sp>
@@ -3613,31 +3577,42 @@
           </a:p>
         </p:txBody>
       </p:sp>
-      <p:sp>
-        <p:nvSpPr>
-          <p:cNvPr id="3" name="Content Placeholder 2">
-            <a:extLst>
-              <a:ext uri="{FF2B5EF4-FFF2-40B4-BE49-F238E27FC236}">
-                <a16:creationId xmlns:a16="http://schemas.microsoft.com/office/drawing/2014/main" id="{D1FCBE35-CACC-4E42-0434-9D592CE9DC2C}"/>
-              </a:ext>
-            </a:extLst>
-          </p:cNvPr>
-          <p:cNvSpPr>
-            <a:spLocks noGrp="1"/>
-          </p:cNvSpPr>
-          <p:nvPr>
-            <p:ph idx="1"/>
-          </p:nvPr>
-        </p:nvSpPr>
-        <p:spPr/>
-        <p:txBody>
-          <a:bodyPr/>
-          <a:lstStyle/>
-          <a:p>
-            <a:endParaRPr lang="en-US"/>
-          </a:p>
-        </p:txBody>
-      </p:sp>
+      <p:pic>
+        <p:nvPicPr>
+          <p:cNvPr id="4" name="Picture 3">
+            <a:extLst>
+              <a:ext uri="{FF2B5EF4-FFF2-40B4-BE49-F238E27FC236}">
+                <a16:creationId xmlns:a16="http://schemas.microsoft.com/office/drawing/2014/main" id="{A3957F1D-CBF3-2862-FD0E-833262530C78}"/>
+              </a:ext>
+            </a:extLst>
+          </p:cNvPr>
+          <p:cNvPicPr>
+            <a:picLocks noChangeAspect="1"/>
+          </p:cNvPicPr>
+          <p:nvPr/>
+        </p:nvPicPr>
+        <p:blipFill>
+          <a:blip r:embed="rId2" cstate="print">
+            <a:extLst>
+              <a:ext uri="{28A0092B-C50C-407E-A947-70E740481C1C}">
+                <a14:useLocalDpi xmlns:a14="http://schemas.microsoft.com/office/drawing/2010/main" val="0"/>
+              </a:ext>
+            </a:extLst>
+          </a:blip>
+          <a:stretch>
+            <a:fillRect/>
+          </a:stretch>
+        </p:blipFill>
+        <p:spPr>
+          <a:xfrm>
+            <a:off x="274734" y="1690688"/>
+            <a:ext cx="11642532" cy="3571123"/>
+          </a:xfrm>
+          <a:prstGeom prst="rect">
+            <a:avLst/>
+          </a:prstGeom>
+        </p:spPr>
+      </p:pic>
     </p:spTree>
     <p:extLst>
       <p:ext uri="{BB962C8B-B14F-4D97-AF65-F5344CB8AC3E}">
@@ -3691,7 +3666,7 @@
           <a:p>
             <a:r>
               <a:rPr lang="en-US" dirty="0"/>
-              <a:t>Evaluation setup</a:t>
+              <a:t>Experimental Setup</a:t>
             </a:r>
           </a:p>
         </p:txBody>
@@ -3712,12 +3687,68 @@
             <p:ph idx="1"/>
           </p:nvPr>
         </p:nvSpPr>
-        <p:spPr/>
-        <p:txBody>
-          <a:bodyPr/>
-          <a:lstStyle/>
-          <a:p>
-            <a:endParaRPr lang="en-US"/>
+        <p:spPr>
+          <a:xfrm>
+            <a:off x="838200" y="1363579"/>
+            <a:ext cx="10515600" cy="5129296"/>
+          </a:xfrm>
+        </p:spPr>
+        <p:txBody>
+          <a:bodyPr>
+            <a:normAutofit/>
+          </a:bodyPr>
+          <a:lstStyle/>
+          <a:p>
+            <a:r>
+              <a:rPr lang="en-US" dirty="0"/>
+              <a:t>Ran on CUDA on personal PC</a:t>
+            </a:r>
+          </a:p>
+          <a:p>
+            <a:r>
+              <a:rPr lang="en-US" dirty="0"/>
+              <a:t>Cross Entropy Loss Function</a:t>
+            </a:r>
+          </a:p>
+          <a:p>
+            <a:r>
+              <a:rPr lang="en-US" dirty="0"/>
+              <a:t>Optimized with Adam</a:t>
+            </a:r>
+          </a:p>
+          <a:p>
+            <a:r>
+              <a:rPr lang="en-US" dirty="0"/>
+              <a:t>For both frozen, and finetuning: found best learning rate</a:t>
+            </a:r>
+          </a:p>
+          <a:p>
+            <a:pPr lvl="1"/>
+            <a:r>
+              <a:rPr lang="en-US" dirty="0"/>
+              <a:t>15 epochs, from 1e-1 to 1e-7 by steps of 0.1</a:t>
+            </a:r>
+          </a:p>
+          <a:p>
+            <a:pPr lvl="1"/>
+            <a:r>
+              <a:rPr lang="en-US" dirty="0"/>
+              <a:t>Used 70% training, 15% validation, 15% evaluation</a:t>
+            </a:r>
+          </a:p>
+          <a:p>
+            <a:pPr lvl="1"/>
+            <a:r>
+              <a:rPr lang="en-US" dirty="0"/>
+              <a:t>Found 1e-6 was best for frozen, 1e-5 best for finetuning</a:t>
+            </a:r>
+          </a:p>
+          <a:p>
+            <a:pPr lvl="2"/>
+            <a:r>
+              <a:rPr lang="en-US" dirty="0"/>
+              <a:t>Full table on paper, not super important to showcase</a:t>
+            </a:r>
           </a:p>
         </p:txBody>
       </p:sp>
@@ -3756,7 +3787,7 @@
           <p:cNvPr id="2" name="Title 1">
             <a:extLst>
               <a:ext uri="{FF2B5EF4-FFF2-40B4-BE49-F238E27FC236}">
-                <a16:creationId xmlns:a16="http://schemas.microsoft.com/office/drawing/2014/main" id="{ECCBE784-DC41-CA0A-0EB0-F8D38A701EFD}"/>
+                <a16:creationId xmlns:a16="http://schemas.microsoft.com/office/drawing/2014/main" id="{274E8752-98CF-FE63-BC8D-36F16B29DA93}"/>
               </a:ext>
             </a:extLst>
           </p:cNvPr>
@@ -3774,40 +3805,64 @@
           <a:p>
             <a:r>
               <a:rPr lang="en-US" dirty="0"/>
-              <a:t>Finding best learning rate</a:t>
-            </a:r>
-          </a:p>
-        </p:txBody>
-      </p:sp>
-      <p:sp>
-        <p:nvSpPr>
-          <p:cNvPr id="3" name="Content Placeholder 2">
-            <a:extLst>
-              <a:ext uri="{FF2B5EF4-FFF2-40B4-BE49-F238E27FC236}">
-                <a16:creationId xmlns:a16="http://schemas.microsoft.com/office/drawing/2014/main" id="{C7520FA5-11B5-2D1B-E4B2-5B9E6D2BA992}"/>
-              </a:ext>
-            </a:extLst>
-          </p:cNvPr>
-          <p:cNvSpPr>
-            <a:spLocks noGrp="1"/>
-          </p:cNvSpPr>
-          <p:nvPr>
-            <p:ph idx="1"/>
-          </p:nvPr>
-        </p:nvSpPr>
-        <p:spPr/>
-        <p:txBody>
-          <a:bodyPr/>
-          <a:lstStyle/>
-          <a:p>
-            <a:endParaRPr lang="en-US"/>
+              <a:t>Results – Changes on amount of training data</a:t>
+            </a:r>
+          </a:p>
+        </p:txBody>
+      </p:sp>
+      <p:sp>
+        <p:nvSpPr>
+          <p:cNvPr id="4" name="Rectangle 3">
+            <a:extLst>
+              <a:ext uri="{FF2B5EF4-FFF2-40B4-BE49-F238E27FC236}">
+                <a16:creationId xmlns:a16="http://schemas.microsoft.com/office/drawing/2014/main" id="{88F2F122-2BFD-59B7-72C4-A93164BEC4EF}"/>
+              </a:ext>
+            </a:extLst>
+          </p:cNvPr>
+          <p:cNvSpPr/>
+          <p:nvPr/>
+        </p:nvSpPr>
+        <p:spPr>
+          <a:xfrm>
+            <a:off x="838200" y="1690688"/>
+            <a:ext cx="10311063" cy="4437396"/>
+          </a:xfrm>
+          <a:prstGeom prst="rect">
+            <a:avLst/>
+          </a:prstGeom>
+        </p:spPr>
+        <p:style>
+          <a:lnRef idx="2">
+            <a:schemeClr val="accent1">
+              <a:shade val="15000"/>
+            </a:schemeClr>
+          </a:lnRef>
+          <a:fillRef idx="1">
+            <a:schemeClr val="accent1"/>
+          </a:fillRef>
+          <a:effectRef idx="0">
+            <a:schemeClr val="accent1"/>
+          </a:effectRef>
+          <a:fontRef idx="minor">
+            <a:schemeClr val="lt1"/>
+          </a:fontRef>
+        </p:style>
+        <p:txBody>
+          <a:bodyPr rtlCol="0" anchor="ctr"/>
+          <a:lstStyle/>
+          <a:p>
+            <a:pPr algn="ctr"/>
+            <a:r>
+              <a:rPr lang="en-US" dirty="0"/>
+              <a:t>&lt;table2&gt;</a:t>
+            </a:r>
           </a:p>
         </p:txBody>
       </p:sp>
     </p:spTree>
     <p:extLst>
       <p:ext uri="{BB962C8B-B14F-4D97-AF65-F5344CB8AC3E}">
-        <p14:creationId xmlns:p14="http://schemas.microsoft.com/office/powerpoint/2010/main" val="2486078367"/>
+        <p14:creationId xmlns:p14="http://schemas.microsoft.com/office/powerpoint/2010/main" val="4292682272"/>
       </p:ext>
     </p:extLst>
   </p:cSld>
@@ -3822,7 +3877,13 @@
   <p:cSld>
     <p:spTree>
       <p:nvGrpSpPr>
-        <p:cNvPr id="1" name=""/>
+        <p:cNvPr id="1" name="">
+          <a:extLst>
+            <a:ext uri="{FF2B5EF4-FFF2-40B4-BE49-F238E27FC236}">
+              <a16:creationId xmlns:a16="http://schemas.microsoft.com/office/drawing/2014/main" id="{50123067-D7DA-4869-F4A5-607CE8A9C521}"/>
+            </a:ext>
+          </a:extLst>
+        </p:cNvPr>
         <p:cNvGrpSpPr/>
         <p:nvPr/>
       </p:nvGrpSpPr>
@@ -3839,7 +3900,7 @@
           <p:cNvPr id="2" name="Title 1">
             <a:extLst>
               <a:ext uri="{FF2B5EF4-FFF2-40B4-BE49-F238E27FC236}">
-                <a16:creationId xmlns:a16="http://schemas.microsoft.com/office/drawing/2014/main" id="{274E8752-98CF-FE63-BC8D-36F16B29DA93}"/>
+                <a16:creationId xmlns:a16="http://schemas.microsoft.com/office/drawing/2014/main" id="{289342E6-B797-DE94-4962-E2AEA991EC01}"/>
               </a:ext>
             </a:extLst>
           </p:cNvPr>
@@ -3857,40 +3918,302 @@
           <a:p>
             <a:r>
               <a:rPr lang="en-US" dirty="0"/>
-              <a:t>Results – Frozen DinoV2</a:t>
-            </a:r>
-          </a:p>
-        </p:txBody>
-      </p:sp>
-      <p:sp>
-        <p:nvSpPr>
-          <p:cNvPr id="3" name="Content Placeholder 2">
-            <a:extLst>
-              <a:ext uri="{FF2B5EF4-FFF2-40B4-BE49-F238E27FC236}">
-                <a16:creationId xmlns:a16="http://schemas.microsoft.com/office/drawing/2014/main" id="{078ACEA1-EFB5-2499-8816-3A9FA5F68626}"/>
-              </a:ext>
-            </a:extLst>
-          </p:cNvPr>
-          <p:cNvSpPr>
-            <a:spLocks noGrp="1"/>
-          </p:cNvSpPr>
-          <p:nvPr>
-            <p:ph idx="1"/>
-          </p:nvPr>
-        </p:nvSpPr>
-        <p:spPr/>
-        <p:txBody>
-          <a:bodyPr/>
-          <a:lstStyle/>
-          <a:p>
-            <a:endParaRPr lang="en-US"/>
+              <a:t>Results – Frozen DinoV2 vs Finetuning</a:t>
+            </a:r>
+          </a:p>
+        </p:txBody>
+      </p:sp>
+      <p:sp>
+        <p:nvSpPr>
+          <p:cNvPr id="4" name="Rectangle 3">
+            <a:extLst>
+              <a:ext uri="{FF2B5EF4-FFF2-40B4-BE49-F238E27FC236}">
+                <a16:creationId xmlns:a16="http://schemas.microsoft.com/office/drawing/2014/main" id="{6B897169-BAC4-4207-00CD-61A102AA5EAF}"/>
+              </a:ext>
+            </a:extLst>
+          </p:cNvPr>
+          <p:cNvSpPr/>
+          <p:nvPr/>
+        </p:nvSpPr>
+        <p:spPr>
+          <a:xfrm>
+            <a:off x="838200" y="1690688"/>
+            <a:ext cx="6878053" cy="1738312"/>
+          </a:xfrm>
+          <a:prstGeom prst="rect">
+            <a:avLst/>
+          </a:prstGeom>
+        </p:spPr>
+        <p:style>
+          <a:lnRef idx="2">
+            <a:schemeClr val="accent1">
+              <a:shade val="15000"/>
+            </a:schemeClr>
+          </a:lnRef>
+          <a:fillRef idx="1">
+            <a:schemeClr val="accent1"/>
+          </a:fillRef>
+          <a:effectRef idx="0">
+            <a:schemeClr val="accent1"/>
+          </a:effectRef>
+          <a:fontRef idx="minor">
+            <a:schemeClr val="lt1"/>
+          </a:fontRef>
+        </p:style>
+        <p:txBody>
+          <a:bodyPr rtlCol="0" anchor="ctr"/>
+          <a:lstStyle/>
+          <a:p>
+            <a:pPr algn="ctr"/>
+            <a:r>
+              <a:rPr lang="en-US" dirty="0"/>
+              <a:t>Small table</a:t>
+            </a:r>
+          </a:p>
+          <a:p>
+            <a:pPr algn="ctr"/>
+            <a:r>
+              <a:rPr lang="en-US" dirty="0"/>
+              <a:t>&lt;best of Frozen&gt;</a:t>
+            </a:r>
+          </a:p>
+          <a:p>
+            <a:pPr algn="ctr"/>
+            <a:r>
+              <a:rPr lang="en-US" dirty="0"/>
+              <a:t>&lt;best of finetuning&gt;</a:t>
+            </a:r>
+          </a:p>
+        </p:txBody>
+      </p:sp>
+      <p:sp>
+        <p:nvSpPr>
+          <p:cNvPr id="3" name="Rectangle 2">
+            <a:extLst>
+              <a:ext uri="{FF2B5EF4-FFF2-40B4-BE49-F238E27FC236}">
+                <a16:creationId xmlns:a16="http://schemas.microsoft.com/office/drawing/2014/main" id="{4962C47D-079E-5A3D-E64B-347C273C0246}"/>
+              </a:ext>
+            </a:extLst>
+          </p:cNvPr>
+          <p:cNvSpPr/>
+          <p:nvPr/>
+        </p:nvSpPr>
+        <p:spPr>
+          <a:xfrm>
+            <a:off x="838200" y="4298156"/>
+            <a:ext cx="2346158" cy="1738312"/>
+          </a:xfrm>
+          <a:prstGeom prst="rect">
+            <a:avLst/>
+          </a:prstGeom>
+        </p:spPr>
+        <p:style>
+          <a:lnRef idx="2">
+            <a:schemeClr val="accent1">
+              <a:shade val="15000"/>
+            </a:schemeClr>
+          </a:lnRef>
+          <a:fillRef idx="1">
+            <a:schemeClr val="accent1"/>
+          </a:fillRef>
+          <a:effectRef idx="0">
+            <a:schemeClr val="accent1"/>
+          </a:effectRef>
+          <a:fontRef idx="minor">
+            <a:schemeClr val="lt1"/>
+          </a:fontRef>
+        </p:style>
+        <p:txBody>
+          <a:bodyPr rtlCol="0" anchor="ctr"/>
+          <a:lstStyle/>
+          <a:p>
+            <a:pPr algn="ctr"/>
+            <a:r>
+              <a:rPr lang="en-US" dirty="0"/>
+              <a:t>Confusion Matrix</a:t>
+            </a:r>
+          </a:p>
+          <a:p>
+            <a:pPr algn="ctr"/>
+            <a:r>
+              <a:rPr lang="en-US" dirty="0"/>
+              <a:t>&lt;best of frozen&gt;</a:t>
+            </a:r>
+          </a:p>
+        </p:txBody>
+      </p:sp>
+      <p:sp>
+        <p:nvSpPr>
+          <p:cNvPr id="5" name="Rectangle 4">
+            <a:extLst>
+              <a:ext uri="{FF2B5EF4-FFF2-40B4-BE49-F238E27FC236}">
+                <a16:creationId xmlns:a16="http://schemas.microsoft.com/office/drawing/2014/main" id="{68DCBE69-1410-AE82-63D2-54725C72575E}"/>
+              </a:ext>
+            </a:extLst>
+          </p:cNvPr>
+          <p:cNvSpPr/>
+          <p:nvPr/>
+        </p:nvSpPr>
+        <p:spPr>
+          <a:xfrm>
+            <a:off x="3402930" y="4298156"/>
+            <a:ext cx="2346158" cy="1738312"/>
+          </a:xfrm>
+          <a:prstGeom prst="rect">
+            <a:avLst/>
+          </a:prstGeom>
+        </p:spPr>
+        <p:style>
+          <a:lnRef idx="2">
+            <a:schemeClr val="accent1">
+              <a:shade val="15000"/>
+            </a:schemeClr>
+          </a:lnRef>
+          <a:fillRef idx="1">
+            <a:schemeClr val="accent1"/>
+          </a:fillRef>
+          <a:effectRef idx="0">
+            <a:schemeClr val="accent1"/>
+          </a:effectRef>
+          <a:fontRef idx="minor">
+            <a:schemeClr val="lt1"/>
+          </a:fontRef>
+        </p:style>
+        <p:txBody>
+          <a:bodyPr rtlCol="0" anchor="ctr"/>
+          <a:lstStyle/>
+          <a:p>
+            <a:pPr algn="ctr"/>
+            <a:r>
+              <a:rPr lang="en-US" dirty="0"/>
+              <a:t>ROC Curve</a:t>
+            </a:r>
+          </a:p>
+          <a:p>
+            <a:pPr algn="ctr"/>
+            <a:r>
+              <a:rPr lang="en-US" dirty="0"/>
+              <a:t>&lt;best of frozen&gt;</a:t>
+            </a:r>
+          </a:p>
+        </p:txBody>
+      </p:sp>
+      <p:sp>
+        <p:nvSpPr>
+          <p:cNvPr id="6" name="Rectangle 5">
+            <a:extLst>
+              <a:ext uri="{FF2B5EF4-FFF2-40B4-BE49-F238E27FC236}">
+                <a16:creationId xmlns:a16="http://schemas.microsoft.com/office/drawing/2014/main" id="{733B41EB-EF63-9BEB-6175-4B8631388830}"/>
+              </a:ext>
+            </a:extLst>
+          </p:cNvPr>
+          <p:cNvSpPr/>
+          <p:nvPr/>
+        </p:nvSpPr>
+        <p:spPr>
+          <a:xfrm>
+            <a:off x="6821903" y="4298156"/>
+            <a:ext cx="2346158" cy="1738312"/>
+          </a:xfrm>
+          <a:prstGeom prst="rect">
+            <a:avLst/>
+          </a:prstGeom>
+        </p:spPr>
+        <p:style>
+          <a:lnRef idx="2">
+            <a:schemeClr val="accent1">
+              <a:shade val="15000"/>
+            </a:schemeClr>
+          </a:lnRef>
+          <a:fillRef idx="1">
+            <a:schemeClr val="accent1"/>
+          </a:fillRef>
+          <a:effectRef idx="0">
+            <a:schemeClr val="accent1"/>
+          </a:effectRef>
+          <a:fontRef idx="minor">
+            <a:schemeClr val="lt1"/>
+          </a:fontRef>
+        </p:style>
+        <p:txBody>
+          <a:bodyPr rtlCol="0" anchor="ctr"/>
+          <a:lstStyle/>
+          <a:p>
+            <a:pPr algn="ctr"/>
+            <a:r>
+              <a:rPr lang="en-US" dirty="0"/>
+              <a:t>Confusion Matrix</a:t>
+            </a:r>
+          </a:p>
+          <a:p>
+            <a:pPr algn="ctr"/>
+            <a:r>
+              <a:rPr lang="en-US" dirty="0"/>
+              <a:t>&lt;best of finetuning&gt;</a:t>
+            </a:r>
+          </a:p>
+        </p:txBody>
+      </p:sp>
+      <p:sp>
+        <p:nvSpPr>
+          <p:cNvPr id="7" name="Rectangle 6">
+            <a:extLst>
+              <a:ext uri="{FF2B5EF4-FFF2-40B4-BE49-F238E27FC236}">
+                <a16:creationId xmlns:a16="http://schemas.microsoft.com/office/drawing/2014/main" id="{D58A6A66-DD34-2493-A522-545389E3E5A8}"/>
+              </a:ext>
+            </a:extLst>
+          </p:cNvPr>
+          <p:cNvSpPr/>
+          <p:nvPr/>
+        </p:nvSpPr>
+        <p:spPr>
+          <a:xfrm>
+            <a:off x="9386633" y="4298156"/>
+            <a:ext cx="2346158" cy="1738312"/>
+          </a:xfrm>
+          <a:prstGeom prst="rect">
+            <a:avLst/>
+          </a:prstGeom>
+        </p:spPr>
+        <p:style>
+          <a:lnRef idx="2">
+            <a:schemeClr val="accent1">
+              <a:shade val="15000"/>
+            </a:schemeClr>
+          </a:lnRef>
+          <a:fillRef idx="1">
+            <a:schemeClr val="accent1"/>
+          </a:fillRef>
+          <a:effectRef idx="0">
+            <a:schemeClr val="accent1"/>
+          </a:effectRef>
+          <a:fontRef idx="minor">
+            <a:schemeClr val="lt1"/>
+          </a:fontRef>
+        </p:style>
+        <p:txBody>
+          <a:bodyPr rtlCol="0" anchor="ctr"/>
+          <a:lstStyle/>
+          <a:p>
+            <a:pPr algn="ctr"/>
+            <a:r>
+              <a:rPr lang="en-US" dirty="0"/>
+              <a:t>ROC Curve</a:t>
+            </a:r>
+          </a:p>
+          <a:p>
+            <a:pPr algn="ctr"/>
+            <a:r>
+              <a:rPr lang="en-US" dirty="0"/>
+              <a:t>&lt;best of finetuning&gt;</a:t>
+            </a:r>
           </a:p>
         </p:txBody>
       </p:sp>
     </p:spTree>
     <p:extLst>
       <p:ext uri="{BB962C8B-B14F-4D97-AF65-F5344CB8AC3E}">
-        <p14:creationId xmlns:p14="http://schemas.microsoft.com/office/powerpoint/2010/main" val="4292682272"/>
+        <p14:creationId xmlns:p14="http://schemas.microsoft.com/office/powerpoint/2010/main" val="2351910854"/>
       </p:ext>
     </p:extLst>
   </p:cSld>
@@ -3922,7 +4245,7 @@
           <p:cNvPr id="2" name="Title 1">
             <a:extLst>
               <a:ext uri="{FF2B5EF4-FFF2-40B4-BE49-F238E27FC236}">
-                <a16:creationId xmlns:a16="http://schemas.microsoft.com/office/drawing/2014/main" id="{3C455030-3BAB-6A93-6BE1-156A21694101}"/>
+                <a16:creationId xmlns:a16="http://schemas.microsoft.com/office/drawing/2014/main" id="{6372AEE6-241C-71A9-02E0-9F442F1F9841}"/>
               </a:ext>
             </a:extLst>
           </p:cNvPr>
@@ -3940,7 +4263,7 @@
           <a:p>
             <a:r>
               <a:rPr lang="en-US" dirty="0"/>
-              <a:t>Results - Finetuning</a:t>
+              <a:t>Discussion</a:t>
             </a:r>
           </a:p>
         </p:txBody>
@@ -3950,7 +4273,7 @@
           <p:cNvPr id="3" name="Content Placeholder 2">
             <a:extLst>
               <a:ext uri="{FF2B5EF4-FFF2-40B4-BE49-F238E27FC236}">
-                <a16:creationId xmlns:a16="http://schemas.microsoft.com/office/drawing/2014/main" id="{0DCCD1BC-99F1-F8FA-75E9-6927C6585810}"/>
+                <a16:creationId xmlns:a16="http://schemas.microsoft.com/office/drawing/2014/main" id="{1B05D83F-F5EE-C965-1C13-97A22F2866AB}"/>
               </a:ext>
             </a:extLst>
           </p:cNvPr>
@@ -3966,14 +4289,38 @@
           <a:bodyPr/>
           <a:lstStyle/>
           <a:p>
-            <a:endParaRPr lang="en-US"/>
+            <a:r>
+              <a:rPr lang="en-US" dirty="0"/>
+              <a:t>Evaluated likelihood of knee osteoarthritis in radiographs using DinoV2</a:t>
+            </a:r>
+          </a:p>
+          <a:p>
+            <a:pPr lvl="1"/>
+            <a:r>
+              <a:rPr lang="en-US" dirty="0"/>
+              <a:t>Captured changes in frozen vs finetuning backbone</a:t>
+            </a:r>
+          </a:p>
+          <a:p>
+            <a:pPr lvl="1"/>
+            <a:r>
+              <a:rPr lang="en-US" dirty="0"/>
+              <a:t>Captured how model performance increases with amount of data</a:t>
+            </a:r>
+          </a:p>
+          <a:p>
+            <a:pPr lvl="1"/>
+            <a:r>
+              <a:rPr lang="en-US" dirty="0"/>
+              <a:t>Obtained a model with a very high level of performance</a:t>
+            </a:r>
           </a:p>
         </p:txBody>
       </p:sp>
     </p:spTree>
     <p:extLst>
       <p:ext uri="{BB962C8B-B14F-4D97-AF65-F5344CB8AC3E}">
-        <p14:creationId xmlns:p14="http://schemas.microsoft.com/office/powerpoint/2010/main" val="2176867175"/>
+        <p14:creationId xmlns:p14="http://schemas.microsoft.com/office/powerpoint/2010/main" val="2542129820"/>
       </p:ext>
     </p:extLst>
   </p:cSld>
@@ -4005,7 +4352,7 @@
           <p:cNvPr id="2" name="Title 1">
             <a:extLst>
               <a:ext uri="{FF2B5EF4-FFF2-40B4-BE49-F238E27FC236}">
-                <a16:creationId xmlns:a16="http://schemas.microsoft.com/office/drawing/2014/main" id="{E034873D-B9F1-088B-1AA5-DC8A476BCFC9}"/>
+                <a16:creationId xmlns:a16="http://schemas.microsoft.com/office/drawing/2014/main" id="{4BCC6D43-864B-597A-06E7-F4CB27DEB6B9}"/>
               </a:ext>
             </a:extLst>
           </p:cNvPr>
@@ -4023,7 +4370,7 @@
           <a:p>
             <a:r>
               <a:rPr lang="en-US" dirty="0"/>
-              <a:t>Results - Conclusions</a:t>
+              <a:t>References</a:t>
             </a:r>
           </a:p>
         </p:txBody>
@@ -4033,7 +4380,7 @@
           <p:cNvPr id="3" name="Content Placeholder 2">
             <a:extLst>
               <a:ext uri="{FF2B5EF4-FFF2-40B4-BE49-F238E27FC236}">
-                <a16:creationId xmlns:a16="http://schemas.microsoft.com/office/drawing/2014/main" id="{E4C43437-6EFE-3DBD-34CE-FF4B85FCB255}"/>
+                <a16:creationId xmlns:a16="http://schemas.microsoft.com/office/drawing/2014/main" id="{FD2F129D-B2DA-EA8B-0C9F-41CB9EA9FB72}"/>
               </a:ext>
             </a:extLst>
           </p:cNvPr>
@@ -4049,97 +4396,85 @@
           <a:bodyPr/>
           <a:lstStyle/>
           <a:p>
-            <a:endParaRPr lang="en-US"/>
+            <a:pPr marL="0" indent="0">
+              <a:buNone/>
+            </a:pPr>
+            <a:r>
+              <a:rPr lang="en-US" dirty="0"/>
+              <a:t>[1] </a:t>
+            </a:r>
+            <a:r>
+              <a:rPr lang="en-US" sz="2000" dirty="0" err="1"/>
+              <a:t>Oquab</a:t>
+            </a:r>
+            <a:r>
+              <a:rPr lang="en-US" sz="2000" dirty="0"/>
+              <a:t>, M., </a:t>
+            </a:r>
+            <a:r>
+              <a:rPr lang="en-US" sz="2000" dirty="0" err="1"/>
+              <a:t>Darcet</a:t>
+            </a:r>
+            <a:r>
+              <a:rPr lang="en-US" sz="2000" dirty="0"/>
+              <a:t>, T., </a:t>
+            </a:r>
+            <a:r>
+              <a:rPr lang="en-US" sz="2000" dirty="0" err="1"/>
+              <a:t>Moutakanni</a:t>
+            </a:r>
+            <a:r>
+              <a:rPr lang="en-US" sz="2000" dirty="0"/>
+              <a:t>, T., Vo, H., Szafraniec, M., Khalidov, V., Fernandez, P., Haziza, D., Massa, F., El-</a:t>
+            </a:r>
+            <a:r>
+              <a:rPr lang="en-US" sz="2000" dirty="0" err="1"/>
+              <a:t>Nouby</a:t>
+            </a:r>
+            <a:r>
+              <a:rPr lang="en-US" sz="2000" dirty="0"/>
+              <a:t>, A., </a:t>
+            </a:r>
+            <a:r>
+              <a:rPr lang="en-US" sz="2000" dirty="0" err="1"/>
+              <a:t>Assran</a:t>
+            </a:r>
+            <a:r>
+              <a:rPr lang="en-US" sz="2000" dirty="0"/>
+              <a:t>, M., Ballas, N., </a:t>
+            </a:r>
+            <a:r>
+              <a:rPr lang="en-US" sz="2000" dirty="0" err="1"/>
+              <a:t>Galuba</a:t>
+            </a:r>
+            <a:r>
+              <a:rPr lang="en-US" sz="2000" dirty="0"/>
+              <a:t>, W., Howes, R., Huang, P.-Y., Li, S.-W., Misra, I., Rabbat, M., Sharma, V., &amp; </a:t>
+            </a:r>
+            <a:r>
+              <a:rPr lang="en-US" sz="2000" dirty="0" err="1"/>
+              <a:t>Synnaeve</a:t>
+            </a:r>
+            <a:r>
+              <a:rPr lang="en-US" sz="2000" dirty="0"/>
+              <a:t>, G. (2023, April 14). </a:t>
+            </a:r>
+            <a:r>
+              <a:rPr lang="en-US" sz="2000" i="1" dirty="0"/>
+              <a:t>DINOv2: Learning Robust Visual Features without Supervision</a:t>
+            </a:r>
+            <a:r>
+              <a:rPr lang="en-US" sz="2000" dirty="0"/>
+              <a:t>. ArXiv.org. https://doi.org/10.48550/arXiv.2304.07193</a:t>
+            </a:r>
+            <a:endParaRPr lang="en-US" dirty="0"/>
           </a:p>
         </p:txBody>
       </p:sp>
     </p:spTree>
     <p:extLst>
       <p:ext uri="{BB962C8B-B14F-4D97-AF65-F5344CB8AC3E}">
-        <p14:creationId xmlns:p14="http://schemas.microsoft.com/office/powerpoint/2010/main" val="1850268840"/>
-      </p:ext>
-    </p:extLst>
-  </p:cSld>
-  <p:clrMapOvr>
-    <a:masterClrMapping/>
-  </p:clrMapOvr>
-</p:sld>
-</file>
-
-<file path=ppt/slides/slide9.xml><?xml version="1.0" encoding="utf-8"?>
-<p:sld xmlns:a="http://schemas.openxmlformats.org/drawingml/2006/main" xmlns:r="http://schemas.openxmlformats.org/officeDocument/2006/relationships" xmlns:p="http://schemas.openxmlformats.org/presentationml/2006/main">
-  <p:cSld>
-    <p:spTree>
-      <p:nvGrpSpPr>
-        <p:cNvPr id="1" name=""/>
-        <p:cNvGrpSpPr/>
-        <p:nvPr/>
-      </p:nvGrpSpPr>
-      <p:grpSpPr>
-        <a:xfrm>
-          <a:off x="0" y="0"/>
-          <a:ext cx="0" cy="0"/>
-          <a:chOff x="0" y="0"/>
-          <a:chExt cx="0" cy="0"/>
-        </a:xfrm>
-      </p:grpSpPr>
-      <p:sp>
-        <p:nvSpPr>
-          <p:cNvPr id="2" name="Title 1">
-            <a:extLst>
-              <a:ext uri="{FF2B5EF4-FFF2-40B4-BE49-F238E27FC236}">
-                <a16:creationId xmlns:a16="http://schemas.microsoft.com/office/drawing/2014/main" id="{6372AEE6-241C-71A9-02E0-9F442F1F9841}"/>
-              </a:ext>
-            </a:extLst>
-          </p:cNvPr>
-          <p:cNvSpPr>
-            <a:spLocks noGrp="1"/>
-          </p:cNvSpPr>
-          <p:nvPr>
-            <p:ph type="title"/>
-          </p:nvPr>
-        </p:nvSpPr>
-        <p:spPr/>
-        <p:txBody>
-          <a:bodyPr/>
-          <a:lstStyle/>
-          <a:p>
-            <a:r>
-              <a:rPr lang="en-US" dirty="0"/>
-              <a:t>Discussion</a:t>
-            </a:r>
-          </a:p>
-        </p:txBody>
-      </p:sp>
-      <p:sp>
-        <p:nvSpPr>
-          <p:cNvPr id="3" name="Content Placeholder 2">
-            <a:extLst>
-              <a:ext uri="{FF2B5EF4-FFF2-40B4-BE49-F238E27FC236}">
-                <a16:creationId xmlns:a16="http://schemas.microsoft.com/office/drawing/2014/main" id="{1B05D83F-F5EE-C965-1C13-97A22F2866AB}"/>
-              </a:ext>
-            </a:extLst>
-          </p:cNvPr>
-          <p:cNvSpPr>
-            <a:spLocks noGrp="1"/>
-          </p:cNvSpPr>
-          <p:nvPr>
-            <p:ph idx="1"/>
-          </p:nvPr>
-        </p:nvSpPr>
-        <p:spPr/>
-        <p:txBody>
-          <a:bodyPr/>
-          <a:lstStyle/>
-          <a:p>
-            <a:endParaRPr lang="en-US"/>
-          </a:p>
-        </p:txBody>
-      </p:sp>
-    </p:spTree>
-    <p:extLst>
-      <p:ext uri="{BB962C8B-B14F-4D97-AF65-F5344CB8AC3E}">
-        <p14:creationId xmlns:p14="http://schemas.microsoft.com/office/powerpoint/2010/main" val="2542129820"/>
+        <p14:creationId xmlns:p14="http://schemas.microsoft.com/office/powerpoint/2010/main" val="867442417"/>
       </p:ext>
     </p:extLst>
   </p:cSld>

--- a/HI2459_finalproject-option1-presentation_jeb382.pptx
+++ b/HI2459_finalproject-option1-presentation_jeb382.pptx
@@ -111,6 +111,11 @@
       </a:defRPr>
     </a:lvl9pPr>
   </p:defaultTextStyle>
+  <p:extLst>
+    <p:ext uri="{EFAFB233-063F-42B5-8137-9DF3F51BA10A}">
+      <p15:sldGuideLst xmlns:p15="http://schemas.microsoft.com/office/powerpoint/2012/main"/>
+    </p:ext>
+  </p:extLst>
 </p:presentation>
 </file>
 
@@ -3810,55 +3815,36 @@
           </a:p>
         </p:txBody>
       </p:sp>
-      <p:sp>
-        <p:nvSpPr>
-          <p:cNvPr id="4" name="Rectangle 3">
-            <a:extLst>
-              <a:ext uri="{FF2B5EF4-FFF2-40B4-BE49-F238E27FC236}">
-                <a16:creationId xmlns:a16="http://schemas.microsoft.com/office/drawing/2014/main" id="{88F2F122-2BFD-59B7-72C4-A93164BEC4EF}"/>
-              </a:ext>
-            </a:extLst>
-          </p:cNvPr>
-          <p:cNvSpPr/>
+      <p:pic>
+        <p:nvPicPr>
+          <p:cNvPr id="5" name="Picture 4">
+            <a:extLst>
+              <a:ext uri="{FF2B5EF4-FFF2-40B4-BE49-F238E27FC236}">
+                <a16:creationId xmlns:a16="http://schemas.microsoft.com/office/drawing/2014/main" id="{76695D40-77E6-991D-9022-64F3FEC43F5A}"/>
+              </a:ext>
+            </a:extLst>
+          </p:cNvPr>
+          <p:cNvPicPr>
+            <a:picLocks noChangeAspect="1"/>
+          </p:cNvPicPr>
           <p:nvPr/>
-        </p:nvSpPr>
+        </p:nvPicPr>
+        <p:blipFill>
+          <a:blip r:embed="rId2"/>
+          <a:stretch>
+            <a:fillRect/>
+          </a:stretch>
+        </p:blipFill>
         <p:spPr>
           <a:xfrm>
-            <a:off x="838200" y="1690688"/>
-            <a:ext cx="10311063" cy="4437396"/>
+            <a:off x="1321281" y="1622315"/>
+            <a:ext cx="9549437" cy="4537853"/>
           </a:xfrm>
           <a:prstGeom prst="rect">
             <a:avLst/>
           </a:prstGeom>
         </p:spPr>
-        <p:style>
-          <a:lnRef idx="2">
-            <a:schemeClr val="accent1">
-              <a:shade val="15000"/>
-            </a:schemeClr>
-          </a:lnRef>
-          <a:fillRef idx="1">
-            <a:schemeClr val="accent1"/>
-          </a:fillRef>
-          <a:effectRef idx="0">
-            <a:schemeClr val="accent1"/>
-          </a:effectRef>
-          <a:fontRef idx="minor">
-            <a:schemeClr val="lt1"/>
-          </a:fontRef>
-        </p:style>
-        <p:txBody>
-          <a:bodyPr rtlCol="0" anchor="ctr"/>
-          <a:lstStyle/>
-          <a:p>
-            <a:pPr algn="ctr"/>
-            <a:r>
-              <a:rPr lang="en-US" dirty="0"/>
-              <a:t>&lt;table2&gt;</a:t>
-            </a:r>
-          </a:p>
-        </p:txBody>
-      </p:sp>
+      </p:pic>
     </p:spTree>
     <p:extLst>
       <p:ext uri="{BB962C8B-B14F-4D97-AF65-F5344CB8AC3E}">

--- a/HI2459_finalproject-option1-presentation_jeb382.pptx
+++ b/HI2459_finalproject-option1-presentation_jeb382.pptx
@@ -4,6 +4,9 @@
   <p:sldMasterIdLst>
     <p:sldMasterId id="2147483689" r:id="rId1"/>
   </p:sldMasterIdLst>
+  <p:notesMasterIdLst>
+    <p:notesMasterId r:id="rId10"/>
+  </p:notesMasterIdLst>
   <p:sldIdLst>
     <p:sldId id="256" r:id="rId2"/>
     <p:sldId id="257" r:id="rId3"/>
@@ -117,6 +120,1190 @@
     </p:ext>
   </p:extLst>
 </p:presentation>
+</file>
+
+<file path=ppt/notesMasters/notesMaster1.xml><?xml version="1.0" encoding="utf-8"?>
+<p:notesMaster xmlns:a="http://schemas.openxmlformats.org/drawingml/2006/main" xmlns:r="http://schemas.openxmlformats.org/officeDocument/2006/relationships" xmlns:p="http://schemas.openxmlformats.org/presentationml/2006/main">
+  <p:cSld>
+    <p:bg>
+      <p:bgRef idx="1001">
+        <a:schemeClr val="bg1"/>
+      </p:bgRef>
+    </p:bg>
+    <p:spTree>
+      <p:nvGrpSpPr>
+        <p:cNvPr id="1" name=""/>
+        <p:cNvGrpSpPr/>
+        <p:nvPr/>
+      </p:nvGrpSpPr>
+      <p:grpSpPr>
+        <a:xfrm>
+          <a:off x="0" y="0"/>
+          <a:ext cx="0" cy="0"/>
+          <a:chOff x="0" y="0"/>
+          <a:chExt cx="0" cy="0"/>
+        </a:xfrm>
+      </p:grpSpPr>
+      <p:sp>
+        <p:nvSpPr>
+          <p:cNvPr id="2" name="Header Placeholder 1"/>
+          <p:cNvSpPr>
+            <a:spLocks noGrp="1"/>
+          </p:cNvSpPr>
+          <p:nvPr>
+            <p:ph type="hdr" sz="quarter"/>
+          </p:nvPr>
+        </p:nvSpPr>
+        <p:spPr>
+          <a:xfrm>
+            <a:off x="0" y="0"/>
+            <a:ext cx="2971800" cy="458788"/>
+          </a:xfrm>
+          <a:prstGeom prst="rect">
+            <a:avLst/>
+          </a:prstGeom>
+        </p:spPr>
+        <p:txBody>
+          <a:bodyPr vert="horz" lIns="91440" tIns="45720" rIns="91440" bIns="45720" rtlCol="0"/>
+          <a:lstStyle>
+            <a:lvl1pPr algn="l">
+              <a:defRPr sz="1200"/>
+            </a:lvl1pPr>
+          </a:lstStyle>
+          <a:p>
+            <a:endParaRPr lang="en-US"/>
+          </a:p>
+        </p:txBody>
+      </p:sp>
+      <p:sp>
+        <p:nvSpPr>
+          <p:cNvPr id="3" name="Date Placeholder 2"/>
+          <p:cNvSpPr>
+            <a:spLocks noGrp="1"/>
+          </p:cNvSpPr>
+          <p:nvPr>
+            <p:ph type="dt" idx="1"/>
+          </p:nvPr>
+        </p:nvSpPr>
+        <p:spPr>
+          <a:xfrm>
+            <a:off x="3884613" y="0"/>
+            <a:ext cx="2971800" cy="458788"/>
+          </a:xfrm>
+          <a:prstGeom prst="rect">
+            <a:avLst/>
+          </a:prstGeom>
+        </p:spPr>
+        <p:txBody>
+          <a:bodyPr vert="horz" lIns="91440" tIns="45720" rIns="91440" bIns="45720" rtlCol="0"/>
+          <a:lstStyle>
+            <a:lvl1pPr algn="r">
+              <a:defRPr sz="1200"/>
+            </a:lvl1pPr>
+          </a:lstStyle>
+          <a:p>
+            <a:fld id="{B7747DC1-F0BA-42A8-8500-CB5FF5885371}" type="datetimeFigureOut">
+              <a:rPr lang="en-US" smtClean="0"/>
+              <a:t>5/1/2026</a:t>
+            </a:fld>
+            <a:endParaRPr lang="en-US"/>
+          </a:p>
+        </p:txBody>
+      </p:sp>
+      <p:sp>
+        <p:nvSpPr>
+          <p:cNvPr id="4" name="Slide Image Placeholder 3"/>
+          <p:cNvSpPr>
+            <a:spLocks noGrp="1" noRot="1" noChangeAspect="1"/>
+          </p:cNvSpPr>
+          <p:nvPr>
+            <p:ph type="sldImg" idx="2"/>
+          </p:nvPr>
+        </p:nvSpPr>
+        <p:spPr>
+          <a:xfrm>
+            <a:off x="685800" y="1143000"/>
+            <a:ext cx="5486400" cy="3086100"/>
+          </a:xfrm>
+          <a:prstGeom prst="rect">
+            <a:avLst/>
+          </a:prstGeom>
+          <a:noFill/>
+          <a:ln w="12700">
+            <a:solidFill>
+              <a:prstClr val="black"/>
+            </a:solidFill>
+          </a:ln>
+        </p:spPr>
+        <p:txBody>
+          <a:bodyPr vert="horz" lIns="91440" tIns="45720" rIns="91440" bIns="45720" rtlCol="0" anchor="ctr"/>
+          <a:lstStyle/>
+          <a:p>
+            <a:endParaRPr lang="en-US"/>
+          </a:p>
+        </p:txBody>
+      </p:sp>
+      <p:sp>
+        <p:nvSpPr>
+          <p:cNvPr id="5" name="Notes Placeholder 4"/>
+          <p:cNvSpPr>
+            <a:spLocks noGrp="1"/>
+          </p:cNvSpPr>
+          <p:nvPr>
+            <p:ph type="body" sz="quarter" idx="3"/>
+          </p:nvPr>
+        </p:nvSpPr>
+        <p:spPr>
+          <a:xfrm>
+            <a:off x="685800" y="4400550"/>
+            <a:ext cx="5486400" cy="3600450"/>
+          </a:xfrm>
+          <a:prstGeom prst="rect">
+            <a:avLst/>
+          </a:prstGeom>
+        </p:spPr>
+        <p:txBody>
+          <a:bodyPr vert="horz" lIns="91440" tIns="45720" rIns="91440" bIns="45720" rtlCol="0"/>
+          <a:lstStyle/>
+          <a:p>
+            <a:pPr lvl="0"/>
+            <a:r>
+              <a:rPr lang="en-US"/>
+              <a:t>Click to edit Master text styles</a:t>
+            </a:r>
+          </a:p>
+          <a:p>
+            <a:pPr lvl="1"/>
+            <a:r>
+              <a:rPr lang="en-US"/>
+              <a:t>Second level</a:t>
+            </a:r>
+          </a:p>
+          <a:p>
+            <a:pPr lvl="2"/>
+            <a:r>
+              <a:rPr lang="en-US"/>
+              <a:t>Third level</a:t>
+            </a:r>
+          </a:p>
+          <a:p>
+            <a:pPr lvl="3"/>
+            <a:r>
+              <a:rPr lang="en-US"/>
+              <a:t>Fourth level</a:t>
+            </a:r>
+          </a:p>
+          <a:p>
+            <a:pPr lvl="4"/>
+            <a:r>
+              <a:rPr lang="en-US"/>
+              <a:t>Fifth level</a:t>
+            </a:r>
+          </a:p>
+        </p:txBody>
+      </p:sp>
+      <p:sp>
+        <p:nvSpPr>
+          <p:cNvPr id="6" name="Footer Placeholder 5"/>
+          <p:cNvSpPr>
+            <a:spLocks noGrp="1"/>
+          </p:cNvSpPr>
+          <p:nvPr>
+            <p:ph type="ftr" sz="quarter" idx="4"/>
+          </p:nvPr>
+        </p:nvSpPr>
+        <p:spPr>
+          <a:xfrm>
+            <a:off x="0" y="8685213"/>
+            <a:ext cx="2971800" cy="458787"/>
+          </a:xfrm>
+          <a:prstGeom prst="rect">
+            <a:avLst/>
+          </a:prstGeom>
+        </p:spPr>
+        <p:txBody>
+          <a:bodyPr vert="horz" lIns="91440" tIns="45720" rIns="91440" bIns="45720" rtlCol="0" anchor="b"/>
+          <a:lstStyle>
+            <a:lvl1pPr algn="l">
+              <a:defRPr sz="1200"/>
+            </a:lvl1pPr>
+          </a:lstStyle>
+          <a:p>
+            <a:endParaRPr lang="en-US"/>
+          </a:p>
+        </p:txBody>
+      </p:sp>
+      <p:sp>
+        <p:nvSpPr>
+          <p:cNvPr id="7" name="Slide Number Placeholder 6"/>
+          <p:cNvSpPr>
+            <a:spLocks noGrp="1"/>
+          </p:cNvSpPr>
+          <p:nvPr>
+            <p:ph type="sldNum" sz="quarter" idx="5"/>
+          </p:nvPr>
+        </p:nvSpPr>
+        <p:spPr>
+          <a:xfrm>
+            <a:off x="3884613" y="8685213"/>
+            <a:ext cx="2971800" cy="458787"/>
+          </a:xfrm>
+          <a:prstGeom prst="rect">
+            <a:avLst/>
+          </a:prstGeom>
+        </p:spPr>
+        <p:txBody>
+          <a:bodyPr vert="horz" lIns="91440" tIns="45720" rIns="91440" bIns="45720" rtlCol="0" anchor="b"/>
+          <a:lstStyle>
+            <a:lvl1pPr algn="r">
+              <a:defRPr sz="1200"/>
+            </a:lvl1pPr>
+          </a:lstStyle>
+          <a:p>
+            <a:fld id="{D7C16608-1E71-45CD-90A6-9C0ACA5710DC}" type="slidenum">
+              <a:rPr lang="en-US" smtClean="0"/>
+              <a:t>‹#›</a:t>
+            </a:fld>
+            <a:endParaRPr lang="en-US"/>
+          </a:p>
+        </p:txBody>
+      </p:sp>
+    </p:spTree>
+    <p:extLst>
+      <p:ext uri="{BB962C8B-B14F-4D97-AF65-F5344CB8AC3E}">
+        <p14:creationId xmlns:p14="http://schemas.microsoft.com/office/powerpoint/2010/main" val="513267210"/>
+      </p:ext>
+    </p:extLst>
+  </p:cSld>
+  <p:clrMap bg1="lt1" tx1="dk1" bg2="lt2" tx2="dk2" accent1="accent1" accent2="accent2" accent3="accent3" accent4="accent4" accent5="accent5" accent6="accent6" hlink="hlink" folHlink="folHlink"/>
+  <p:notesStyle>
+    <a:lvl1pPr marL="0" algn="l" defTabSz="914400" rtl="0" eaLnBrk="1" latinLnBrk="0" hangingPunct="1">
+      <a:defRPr sz="1200" kern="1200">
+        <a:solidFill>
+          <a:schemeClr val="tx1"/>
+        </a:solidFill>
+        <a:latin typeface="+mn-lt"/>
+        <a:ea typeface="+mn-ea"/>
+        <a:cs typeface="+mn-cs"/>
+      </a:defRPr>
+    </a:lvl1pPr>
+    <a:lvl2pPr marL="457200" algn="l" defTabSz="914400" rtl="0" eaLnBrk="1" latinLnBrk="0" hangingPunct="1">
+      <a:defRPr sz="1200" kern="1200">
+        <a:solidFill>
+          <a:schemeClr val="tx1"/>
+        </a:solidFill>
+        <a:latin typeface="+mn-lt"/>
+        <a:ea typeface="+mn-ea"/>
+        <a:cs typeface="+mn-cs"/>
+      </a:defRPr>
+    </a:lvl2pPr>
+    <a:lvl3pPr marL="914400" algn="l" defTabSz="914400" rtl="0" eaLnBrk="1" latinLnBrk="0" hangingPunct="1">
+      <a:defRPr sz="1200" kern="1200">
+        <a:solidFill>
+          <a:schemeClr val="tx1"/>
+        </a:solidFill>
+        <a:latin typeface="+mn-lt"/>
+        <a:ea typeface="+mn-ea"/>
+        <a:cs typeface="+mn-cs"/>
+      </a:defRPr>
+    </a:lvl3pPr>
+    <a:lvl4pPr marL="1371600" algn="l" defTabSz="914400" rtl="0" eaLnBrk="1" latinLnBrk="0" hangingPunct="1">
+      <a:defRPr sz="1200" kern="1200">
+        <a:solidFill>
+          <a:schemeClr val="tx1"/>
+        </a:solidFill>
+        <a:latin typeface="+mn-lt"/>
+        <a:ea typeface="+mn-ea"/>
+        <a:cs typeface="+mn-cs"/>
+      </a:defRPr>
+    </a:lvl4pPr>
+    <a:lvl5pPr marL="1828800" algn="l" defTabSz="914400" rtl="0" eaLnBrk="1" latinLnBrk="0" hangingPunct="1">
+      <a:defRPr sz="1200" kern="1200">
+        <a:solidFill>
+          <a:schemeClr val="tx1"/>
+        </a:solidFill>
+        <a:latin typeface="+mn-lt"/>
+        <a:ea typeface="+mn-ea"/>
+        <a:cs typeface="+mn-cs"/>
+      </a:defRPr>
+    </a:lvl5pPr>
+    <a:lvl6pPr marL="2286000" algn="l" defTabSz="914400" rtl="0" eaLnBrk="1" latinLnBrk="0" hangingPunct="1">
+      <a:defRPr sz="1200" kern="1200">
+        <a:solidFill>
+          <a:schemeClr val="tx1"/>
+        </a:solidFill>
+        <a:latin typeface="+mn-lt"/>
+        <a:ea typeface="+mn-ea"/>
+        <a:cs typeface="+mn-cs"/>
+      </a:defRPr>
+    </a:lvl6pPr>
+    <a:lvl7pPr marL="2743200" algn="l" defTabSz="914400" rtl="0" eaLnBrk="1" latinLnBrk="0" hangingPunct="1">
+      <a:defRPr sz="1200" kern="1200">
+        <a:solidFill>
+          <a:schemeClr val="tx1"/>
+        </a:solidFill>
+        <a:latin typeface="+mn-lt"/>
+        <a:ea typeface="+mn-ea"/>
+        <a:cs typeface="+mn-cs"/>
+      </a:defRPr>
+    </a:lvl7pPr>
+    <a:lvl8pPr marL="3200400" algn="l" defTabSz="914400" rtl="0" eaLnBrk="1" latinLnBrk="0" hangingPunct="1">
+      <a:defRPr sz="1200" kern="1200">
+        <a:solidFill>
+          <a:schemeClr val="tx1"/>
+        </a:solidFill>
+        <a:latin typeface="+mn-lt"/>
+        <a:ea typeface="+mn-ea"/>
+        <a:cs typeface="+mn-cs"/>
+      </a:defRPr>
+    </a:lvl8pPr>
+    <a:lvl9pPr marL="3657600" algn="l" defTabSz="914400" rtl="0" eaLnBrk="1" latinLnBrk="0" hangingPunct="1">
+      <a:defRPr sz="1200" kern="1200">
+        <a:solidFill>
+          <a:schemeClr val="tx1"/>
+        </a:solidFill>
+        <a:latin typeface="+mn-lt"/>
+        <a:ea typeface="+mn-ea"/>
+        <a:cs typeface="+mn-cs"/>
+      </a:defRPr>
+    </a:lvl9pPr>
+  </p:notesStyle>
+</p:notesMaster>
+</file>
+
+<file path=ppt/notesSlides/notesSlide1.xml><?xml version="1.0" encoding="utf-8"?>
+<p:notes xmlns:a="http://schemas.openxmlformats.org/drawingml/2006/main" xmlns:r="http://schemas.openxmlformats.org/officeDocument/2006/relationships" xmlns:p="http://schemas.openxmlformats.org/presentationml/2006/main">
+  <p:cSld>
+    <p:spTree>
+      <p:nvGrpSpPr>
+        <p:cNvPr id="1" name=""/>
+        <p:cNvGrpSpPr/>
+        <p:nvPr/>
+      </p:nvGrpSpPr>
+      <p:grpSpPr>
+        <a:xfrm>
+          <a:off x="0" y="0"/>
+          <a:ext cx="0" cy="0"/>
+          <a:chOff x="0" y="0"/>
+          <a:chExt cx="0" cy="0"/>
+        </a:xfrm>
+      </p:grpSpPr>
+      <p:sp>
+        <p:nvSpPr>
+          <p:cNvPr id="2" name="Slide Image Placeholder 1"/>
+          <p:cNvSpPr>
+            <a:spLocks noGrp="1" noRot="1" noChangeAspect="1"/>
+          </p:cNvSpPr>
+          <p:nvPr>
+            <p:ph type="sldImg"/>
+          </p:nvPr>
+        </p:nvSpPr>
+        <p:spPr/>
+      </p:sp>
+      <p:sp>
+        <p:nvSpPr>
+          <p:cNvPr id="3" name="Notes Placeholder 2"/>
+          <p:cNvSpPr>
+            <a:spLocks noGrp="1"/>
+          </p:cNvSpPr>
+          <p:nvPr>
+            <p:ph type="body" idx="1"/>
+          </p:nvPr>
+        </p:nvSpPr>
+        <p:spPr/>
+        <p:txBody>
+          <a:bodyPr/>
+          <a:lstStyle/>
+          <a:p>
+            <a:r>
+              <a:rPr lang="en-US" dirty="0"/>
+              <a:t>So </a:t>
+            </a:r>
+            <a:r>
+              <a:rPr lang="en-US" sz="1200" kern="1200" dirty="0">
+                <a:solidFill>
+                  <a:schemeClr val="tx1"/>
+                </a:solidFill>
+                <a:effectLst/>
+                <a:latin typeface="+mn-lt"/>
+                <a:ea typeface="+mn-ea"/>
+                <a:cs typeface="+mn-cs"/>
+              </a:rPr>
+              <a:t>Knee osteoarthritis is a very common degenerative joint disease, caused by the cartilage in your knee joints breaking down and causing the bones to rub together. </a:t>
+            </a:r>
+            <a:r>
+              <a:rPr lang="en-US" sz="1200" kern="1200" dirty="0" err="1">
+                <a:solidFill>
+                  <a:schemeClr val="tx1"/>
+                </a:solidFill>
+                <a:effectLst/>
+                <a:latin typeface="+mn-lt"/>
+                <a:ea typeface="+mn-ea"/>
+                <a:cs typeface="+mn-cs"/>
+              </a:rPr>
+              <a:t>Causeing</a:t>
+            </a:r>
+            <a:r>
+              <a:rPr lang="en-US" sz="1200" kern="1200" dirty="0">
+                <a:solidFill>
+                  <a:schemeClr val="tx1"/>
+                </a:solidFill>
+                <a:effectLst/>
+                <a:latin typeface="+mn-lt"/>
+                <a:ea typeface="+mn-ea"/>
+                <a:cs typeface="+mn-cs"/>
+              </a:rPr>
+              <a:t> pain, swelling, and stiffness.</a:t>
+            </a:r>
+          </a:p>
+          <a:p>
+            <a:endParaRPr lang="en-US" sz="1200" kern="1200" dirty="0">
+              <a:solidFill>
+                <a:schemeClr val="tx1"/>
+              </a:solidFill>
+              <a:effectLst/>
+              <a:latin typeface="+mn-lt"/>
+              <a:ea typeface="+mn-ea"/>
+              <a:cs typeface="+mn-cs"/>
+            </a:endParaRPr>
+          </a:p>
+          <a:p>
+            <a:r>
+              <a:rPr lang="en-US" sz="1200" kern="1200" dirty="0">
+                <a:solidFill>
+                  <a:schemeClr val="tx1"/>
+                </a:solidFill>
+                <a:effectLst/>
+                <a:latin typeface="+mn-lt"/>
+                <a:ea typeface="+mn-ea"/>
+                <a:cs typeface="+mn-cs"/>
+              </a:rPr>
+              <a:t>It affects roughly 23% of adults over 40 worldwide, impacting 365 million people.</a:t>
+            </a:r>
+          </a:p>
+          <a:p>
+            <a:endParaRPr lang="en-US" sz="1200" kern="1200" dirty="0">
+              <a:solidFill>
+                <a:schemeClr val="tx1"/>
+              </a:solidFill>
+              <a:effectLst/>
+              <a:latin typeface="+mn-lt"/>
+              <a:ea typeface="+mn-ea"/>
+              <a:cs typeface="+mn-cs"/>
+            </a:endParaRPr>
+          </a:p>
+          <a:p>
+            <a:r>
+              <a:rPr lang="en-US" sz="1200" kern="1200" dirty="0">
+                <a:solidFill>
+                  <a:schemeClr val="tx1"/>
+                </a:solidFill>
+                <a:effectLst/>
+                <a:latin typeface="+mn-lt"/>
+                <a:ea typeface="+mn-ea"/>
+                <a:cs typeface="+mn-cs"/>
+              </a:rPr>
+              <a:t>It is diagnosed by a medical professional evaluating a radiograph of the knee. And Medical professionals are very busy and the evaluation of radiographs are a prime target to use with automated AI tools to decrease the amount of time it takes a medical professional to make their diagnosis. And that’s the purpose of this study is to evaluate how we can do that.</a:t>
+            </a:r>
+            <a:endParaRPr lang="en-US" dirty="0"/>
+          </a:p>
+        </p:txBody>
+      </p:sp>
+      <p:sp>
+        <p:nvSpPr>
+          <p:cNvPr id="4" name="Slide Number Placeholder 3"/>
+          <p:cNvSpPr>
+            <a:spLocks noGrp="1"/>
+          </p:cNvSpPr>
+          <p:nvPr>
+            <p:ph type="sldNum" sz="quarter" idx="5"/>
+          </p:nvPr>
+        </p:nvSpPr>
+        <p:spPr/>
+        <p:txBody>
+          <a:bodyPr/>
+          <a:lstStyle/>
+          <a:p>
+            <a:fld id="{D7C16608-1E71-45CD-90A6-9C0ACA5710DC}" type="slidenum">
+              <a:rPr lang="en-US" smtClean="0"/>
+              <a:t>2</a:t>
+            </a:fld>
+            <a:endParaRPr lang="en-US"/>
+          </a:p>
+        </p:txBody>
+      </p:sp>
+    </p:spTree>
+    <p:extLst>
+      <p:ext uri="{BB962C8B-B14F-4D97-AF65-F5344CB8AC3E}">
+        <p14:creationId xmlns:p14="http://schemas.microsoft.com/office/powerpoint/2010/main" val="2979760916"/>
+      </p:ext>
+    </p:extLst>
+  </p:cSld>
+  <p:clrMapOvr>
+    <a:masterClrMapping/>
+  </p:clrMapOvr>
+</p:notes>
+</file>
+
+<file path=ppt/notesSlides/notesSlide2.xml><?xml version="1.0" encoding="utf-8"?>
+<p:notes xmlns:a="http://schemas.openxmlformats.org/drawingml/2006/main" xmlns:r="http://schemas.openxmlformats.org/officeDocument/2006/relationships" xmlns:p="http://schemas.openxmlformats.org/presentationml/2006/main">
+  <p:cSld>
+    <p:spTree>
+      <p:nvGrpSpPr>
+        <p:cNvPr id="1" name=""/>
+        <p:cNvGrpSpPr/>
+        <p:nvPr/>
+      </p:nvGrpSpPr>
+      <p:grpSpPr>
+        <a:xfrm>
+          <a:off x="0" y="0"/>
+          <a:ext cx="0" cy="0"/>
+          <a:chOff x="0" y="0"/>
+          <a:chExt cx="0" cy="0"/>
+        </a:xfrm>
+      </p:grpSpPr>
+      <p:sp>
+        <p:nvSpPr>
+          <p:cNvPr id="2" name="Slide Image Placeholder 1"/>
+          <p:cNvSpPr>
+            <a:spLocks noGrp="1" noRot="1" noChangeAspect="1"/>
+          </p:cNvSpPr>
+          <p:nvPr>
+            <p:ph type="sldImg"/>
+          </p:nvPr>
+        </p:nvSpPr>
+        <p:spPr/>
+      </p:sp>
+      <p:sp>
+        <p:nvSpPr>
+          <p:cNvPr id="3" name="Notes Placeholder 2"/>
+          <p:cNvSpPr>
+            <a:spLocks noGrp="1"/>
+          </p:cNvSpPr>
+          <p:nvPr>
+            <p:ph type="body" idx="1"/>
+          </p:nvPr>
+        </p:nvSpPr>
+        <p:spPr/>
+        <p:txBody>
+          <a:bodyPr/>
+          <a:lstStyle/>
+          <a:p>
+            <a:r>
+              <a:rPr lang="en-US" dirty="0"/>
+              <a:t>So this is my </a:t>
+            </a:r>
+            <a:r>
+              <a:rPr lang="en-US" sz="1200" kern="1200" dirty="0">
+                <a:solidFill>
+                  <a:schemeClr val="tx1"/>
+                </a:solidFill>
+                <a:effectLst/>
+                <a:latin typeface="+mn-lt"/>
+                <a:ea typeface="+mn-ea"/>
+                <a:cs typeface="+mn-cs"/>
+              </a:rPr>
+              <a:t>overall model structure where DinoV2[1], or rather ViT, is used as a backbone to extract features from out input images. These features are then given to an MLP as a classification head for a binary label decided by a threshold of 0.5 on the confidence percentage that the input image shows Knee Osteoarthritis.</a:t>
+            </a:r>
+            <a:endParaRPr lang="en-US" dirty="0"/>
+          </a:p>
+        </p:txBody>
+      </p:sp>
+      <p:sp>
+        <p:nvSpPr>
+          <p:cNvPr id="4" name="Slide Number Placeholder 3"/>
+          <p:cNvSpPr>
+            <a:spLocks noGrp="1"/>
+          </p:cNvSpPr>
+          <p:nvPr>
+            <p:ph type="sldNum" sz="quarter" idx="5"/>
+          </p:nvPr>
+        </p:nvSpPr>
+        <p:spPr/>
+        <p:txBody>
+          <a:bodyPr/>
+          <a:lstStyle/>
+          <a:p>
+            <a:fld id="{D7C16608-1E71-45CD-90A6-9C0ACA5710DC}" type="slidenum">
+              <a:rPr lang="en-US" smtClean="0"/>
+              <a:t>3</a:t>
+            </a:fld>
+            <a:endParaRPr lang="en-US"/>
+          </a:p>
+        </p:txBody>
+      </p:sp>
+    </p:spTree>
+    <p:extLst>
+      <p:ext uri="{BB962C8B-B14F-4D97-AF65-F5344CB8AC3E}">
+        <p14:creationId xmlns:p14="http://schemas.microsoft.com/office/powerpoint/2010/main" val="897585457"/>
+      </p:ext>
+    </p:extLst>
+  </p:cSld>
+  <p:clrMapOvr>
+    <a:masterClrMapping/>
+  </p:clrMapOvr>
+</p:notes>
+</file>
+
+<file path=ppt/notesSlides/notesSlide3.xml><?xml version="1.0" encoding="utf-8"?>
+<p:notes xmlns:a="http://schemas.openxmlformats.org/drawingml/2006/main" xmlns:r="http://schemas.openxmlformats.org/officeDocument/2006/relationships" xmlns:p="http://schemas.openxmlformats.org/presentationml/2006/main">
+  <p:cSld>
+    <p:spTree>
+      <p:nvGrpSpPr>
+        <p:cNvPr id="1" name=""/>
+        <p:cNvGrpSpPr/>
+        <p:nvPr/>
+      </p:nvGrpSpPr>
+      <p:grpSpPr>
+        <a:xfrm>
+          <a:off x="0" y="0"/>
+          <a:ext cx="0" cy="0"/>
+          <a:chOff x="0" y="0"/>
+          <a:chExt cx="0" cy="0"/>
+        </a:xfrm>
+      </p:grpSpPr>
+      <p:sp>
+        <p:nvSpPr>
+          <p:cNvPr id="2" name="Slide Image Placeholder 1"/>
+          <p:cNvSpPr>
+            <a:spLocks noGrp="1" noRot="1" noChangeAspect="1"/>
+          </p:cNvSpPr>
+          <p:nvPr>
+            <p:ph type="sldImg"/>
+          </p:nvPr>
+        </p:nvSpPr>
+        <p:spPr/>
+      </p:sp>
+      <p:sp>
+        <p:nvSpPr>
+          <p:cNvPr id="3" name="Notes Placeholder 2"/>
+          <p:cNvSpPr>
+            <a:spLocks noGrp="1"/>
+          </p:cNvSpPr>
+          <p:nvPr>
+            <p:ph type="body" idx="1"/>
+          </p:nvPr>
+        </p:nvSpPr>
+        <p:spPr/>
+        <p:txBody>
+          <a:bodyPr/>
+          <a:lstStyle/>
+          <a:p>
+            <a:r>
+              <a:rPr lang="en-US" dirty="0"/>
+              <a:t>All the experiments were run on CUDA on my personal Pc for </a:t>
+            </a:r>
+            <a:r>
+              <a:rPr lang="en-US" dirty="0" err="1"/>
+              <a:t>convience</a:t>
+            </a:r>
+            <a:r>
+              <a:rPr lang="en-US" dirty="0"/>
+              <a:t> reasons.</a:t>
+            </a:r>
+          </a:p>
+          <a:p>
+            <a:endParaRPr lang="en-US" dirty="0"/>
+          </a:p>
+          <a:p>
+            <a:r>
+              <a:rPr lang="en-US" sz="1200" kern="1200" dirty="0">
+                <a:solidFill>
+                  <a:schemeClr val="tx1"/>
+                </a:solidFill>
+                <a:effectLst/>
+                <a:latin typeface="+mn-lt"/>
+                <a:ea typeface="+mn-ea"/>
+                <a:cs typeface="+mn-cs"/>
+              </a:rPr>
+              <a:t>It utilized the Cross Entropy Loss function and was optimized with Adam.</a:t>
+            </a:r>
+          </a:p>
+          <a:p>
+            <a:endParaRPr lang="en-US" sz="1200" kern="1200" dirty="0">
+              <a:solidFill>
+                <a:schemeClr val="tx1"/>
+              </a:solidFill>
+              <a:effectLst/>
+              <a:latin typeface="+mn-lt"/>
+              <a:ea typeface="+mn-ea"/>
+              <a:cs typeface="+mn-cs"/>
+            </a:endParaRPr>
+          </a:p>
+          <a:p>
+            <a:r>
+              <a:rPr lang="en-US" sz="1200" kern="1200" dirty="0">
+                <a:solidFill>
+                  <a:schemeClr val="tx1"/>
+                </a:solidFill>
+                <a:effectLst/>
+                <a:latin typeface="+mn-lt"/>
+                <a:ea typeface="+mn-ea"/>
+                <a:cs typeface="+mn-cs"/>
+              </a:rPr>
+              <a:t>Metrics used for evaluation was AUC, accuracy, marco-f1, and for both classes: precision, recall, and f1-score. There was also a generated Confusion Matrix, Loss curve, and ROC-AUC curve.</a:t>
+            </a:r>
+          </a:p>
+          <a:p>
+            <a:endParaRPr lang="en-US" sz="1200" kern="1200" dirty="0">
+              <a:solidFill>
+                <a:schemeClr val="tx1"/>
+              </a:solidFill>
+              <a:effectLst/>
+              <a:latin typeface="+mn-lt"/>
+              <a:ea typeface="+mn-ea"/>
+              <a:cs typeface="+mn-cs"/>
+            </a:endParaRPr>
+          </a:p>
+          <a:p>
+            <a:r>
+              <a:rPr lang="en-US" sz="1200" kern="1200" dirty="0">
+                <a:solidFill>
+                  <a:schemeClr val="tx1"/>
+                </a:solidFill>
+                <a:effectLst/>
+                <a:latin typeface="+mn-lt"/>
+                <a:ea typeface="+mn-ea"/>
+                <a:cs typeface="+mn-cs"/>
+              </a:rPr>
+              <a:t>And fore the learning rate, we separately found for frozen and finetuning the best rate through a stepped approach.</a:t>
+            </a:r>
+            <a:endParaRPr lang="en-US" dirty="0"/>
+          </a:p>
+        </p:txBody>
+      </p:sp>
+      <p:sp>
+        <p:nvSpPr>
+          <p:cNvPr id="4" name="Slide Number Placeholder 3"/>
+          <p:cNvSpPr>
+            <a:spLocks noGrp="1"/>
+          </p:cNvSpPr>
+          <p:nvPr>
+            <p:ph type="sldNum" sz="quarter" idx="5"/>
+          </p:nvPr>
+        </p:nvSpPr>
+        <p:spPr/>
+        <p:txBody>
+          <a:bodyPr/>
+          <a:lstStyle/>
+          <a:p>
+            <a:fld id="{D7C16608-1E71-45CD-90A6-9C0ACA5710DC}" type="slidenum">
+              <a:rPr lang="en-US" smtClean="0"/>
+              <a:t>4</a:t>
+            </a:fld>
+            <a:endParaRPr lang="en-US"/>
+          </a:p>
+        </p:txBody>
+      </p:sp>
+    </p:spTree>
+    <p:extLst>
+      <p:ext uri="{BB962C8B-B14F-4D97-AF65-F5344CB8AC3E}">
+        <p14:creationId xmlns:p14="http://schemas.microsoft.com/office/powerpoint/2010/main" val="3096580751"/>
+      </p:ext>
+    </p:extLst>
+  </p:cSld>
+  <p:clrMapOvr>
+    <a:masterClrMapping/>
+  </p:clrMapOvr>
+</p:notes>
+</file>
+
+<file path=ppt/notesSlides/notesSlide4.xml><?xml version="1.0" encoding="utf-8"?>
+<p:notes xmlns:a="http://schemas.openxmlformats.org/drawingml/2006/main" xmlns:r="http://schemas.openxmlformats.org/officeDocument/2006/relationships" xmlns:p="http://schemas.openxmlformats.org/presentationml/2006/main">
+  <p:cSld>
+    <p:spTree>
+      <p:nvGrpSpPr>
+        <p:cNvPr id="1" name=""/>
+        <p:cNvGrpSpPr/>
+        <p:nvPr/>
+      </p:nvGrpSpPr>
+      <p:grpSpPr>
+        <a:xfrm>
+          <a:off x="0" y="0"/>
+          <a:ext cx="0" cy="0"/>
+          <a:chOff x="0" y="0"/>
+          <a:chExt cx="0" cy="0"/>
+        </a:xfrm>
+      </p:grpSpPr>
+      <p:sp>
+        <p:nvSpPr>
+          <p:cNvPr id="2" name="Slide Image Placeholder 1"/>
+          <p:cNvSpPr>
+            <a:spLocks noGrp="1" noRot="1" noChangeAspect="1"/>
+          </p:cNvSpPr>
+          <p:nvPr>
+            <p:ph type="sldImg"/>
+          </p:nvPr>
+        </p:nvSpPr>
+        <p:spPr/>
+      </p:sp>
+      <p:sp>
+        <p:nvSpPr>
+          <p:cNvPr id="3" name="Notes Placeholder 2"/>
+          <p:cNvSpPr>
+            <a:spLocks noGrp="1"/>
+          </p:cNvSpPr>
+          <p:nvPr>
+            <p:ph type="body" idx="1"/>
+          </p:nvPr>
+        </p:nvSpPr>
+        <p:spPr/>
+        <p:txBody>
+          <a:bodyPr/>
+          <a:lstStyle/>
+          <a:p>
+            <a:r>
+              <a:rPr lang="en-US" sz="1200" kern="1200" dirty="0">
+                <a:solidFill>
+                  <a:schemeClr val="tx1"/>
+                </a:solidFill>
+                <a:effectLst/>
+                <a:latin typeface="+mn-lt"/>
+                <a:ea typeface="+mn-ea"/>
+                <a:cs typeface="+mn-cs"/>
+              </a:rPr>
+              <a:t>So these are our results:</a:t>
+            </a:r>
+          </a:p>
+          <a:p>
+            <a:r>
+              <a:rPr lang="en-US" sz="1200" kern="1200" dirty="0">
+                <a:solidFill>
+                  <a:schemeClr val="tx1"/>
+                </a:solidFill>
+                <a:effectLst/>
+                <a:latin typeface="+mn-lt"/>
+                <a:ea typeface="+mn-ea"/>
+                <a:cs typeface="+mn-cs"/>
+              </a:rPr>
+              <a:t>As the amount of data increases, so does the performance. This is because as the model gets more and more data, it is introduced to new cases it hasn’t seen before and becomes more generalizable to said data. With smaller amounts of data there is also the possibility of overfitting to a bias present in your small sample that will affect your performance to unseen data.</a:t>
+            </a:r>
+            <a:endParaRPr lang="en-US" dirty="0"/>
+          </a:p>
+        </p:txBody>
+      </p:sp>
+      <p:sp>
+        <p:nvSpPr>
+          <p:cNvPr id="4" name="Slide Number Placeholder 3"/>
+          <p:cNvSpPr>
+            <a:spLocks noGrp="1"/>
+          </p:cNvSpPr>
+          <p:nvPr>
+            <p:ph type="sldNum" sz="quarter" idx="5"/>
+          </p:nvPr>
+        </p:nvSpPr>
+        <p:spPr/>
+        <p:txBody>
+          <a:bodyPr/>
+          <a:lstStyle/>
+          <a:p>
+            <a:fld id="{D7C16608-1E71-45CD-90A6-9C0ACA5710DC}" type="slidenum">
+              <a:rPr lang="en-US" smtClean="0"/>
+              <a:t>5</a:t>
+            </a:fld>
+            <a:endParaRPr lang="en-US"/>
+          </a:p>
+        </p:txBody>
+      </p:sp>
+    </p:spTree>
+    <p:extLst>
+      <p:ext uri="{BB962C8B-B14F-4D97-AF65-F5344CB8AC3E}">
+        <p14:creationId xmlns:p14="http://schemas.microsoft.com/office/powerpoint/2010/main" val="4024855765"/>
+      </p:ext>
+    </p:extLst>
+  </p:cSld>
+  <p:clrMapOvr>
+    <a:masterClrMapping/>
+  </p:clrMapOvr>
+</p:notes>
+</file>
+
+<file path=ppt/notesSlides/notesSlide5.xml><?xml version="1.0" encoding="utf-8"?>
+<p:notes xmlns:a="http://schemas.openxmlformats.org/drawingml/2006/main" xmlns:r="http://schemas.openxmlformats.org/officeDocument/2006/relationships" xmlns:p="http://schemas.openxmlformats.org/presentationml/2006/main">
+  <p:cSld>
+    <p:spTree>
+      <p:nvGrpSpPr>
+        <p:cNvPr id="1" name=""/>
+        <p:cNvGrpSpPr/>
+        <p:nvPr/>
+      </p:nvGrpSpPr>
+      <p:grpSpPr>
+        <a:xfrm>
+          <a:off x="0" y="0"/>
+          <a:ext cx="0" cy="0"/>
+          <a:chOff x="0" y="0"/>
+          <a:chExt cx="0" cy="0"/>
+        </a:xfrm>
+      </p:grpSpPr>
+      <p:sp>
+        <p:nvSpPr>
+          <p:cNvPr id="2" name="Slide Image Placeholder 1"/>
+          <p:cNvSpPr>
+            <a:spLocks noGrp="1" noRot="1" noChangeAspect="1"/>
+          </p:cNvSpPr>
+          <p:nvPr>
+            <p:ph type="sldImg"/>
+          </p:nvPr>
+        </p:nvSpPr>
+        <p:spPr/>
+      </p:sp>
+      <p:sp>
+        <p:nvSpPr>
+          <p:cNvPr id="3" name="Notes Placeholder 2"/>
+          <p:cNvSpPr>
+            <a:spLocks noGrp="1"/>
+          </p:cNvSpPr>
+          <p:nvPr>
+            <p:ph type="body" idx="1"/>
+          </p:nvPr>
+        </p:nvSpPr>
+        <p:spPr/>
+        <p:txBody>
+          <a:bodyPr/>
+          <a:lstStyle/>
+          <a:p>
+            <a:r>
+              <a:rPr lang="en-US" dirty="0"/>
+              <a:t>And then comparing specifically frozen vs finetuning DinoV2: here are our best models for each for an easier comparison.</a:t>
+            </a:r>
+          </a:p>
+          <a:p>
+            <a:endParaRPr lang="en-US" dirty="0"/>
+          </a:p>
+          <a:p>
+            <a:r>
+              <a:rPr lang="en-US" sz="1200" kern="1200" dirty="0">
+                <a:solidFill>
+                  <a:schemeClr val="tx1"/>
+                </a:solidFill>
+                <a:effectLst/>
+                <a:latin typeface="+mn-lt"/>
+                <a:ea typeface="+mn-ea"/>
+                <a:cs typeface="+mn-cs"/>
+              </a:rPr>
+              <a:t>Models with a frozen DinoV2 backbone were better compared to models that did finetuning. Although the performance can be considered comparable in many metrics, especially when there isn’t much to improve with such high scores, frozen always lead to a higher AUC. This can also be seen in their ROC graphs, where the curve for frozen is almost a right angle, while the finetuning is not as lucky. Also in the confusion matrixes where frozen has an almost perfect alignment, while finetuning has a very poor false positive rate.</a:t>
+            </a:r>
+            <a:endParaRPr lang="en-US" dirty="0"/>
+          </a:p>
+        </p:txBody>
+      </p:sp>
+      <p:sp>
+        <p:nvSpPr>
+          <p:cNvPr id="4" name="Slide Number Placeholder 3"/>
+          <p:cNvSpPr>
+            <a:spLocks noGrp="1"/>
+          </p:cNvSpPr>
+          <p:nvPr>
+            <p:ph type="sldNum" sz="quarter" idx="5"/>
+          </p:nvPr>
+        </p:nvSpPr>
+        <p:spPr/>
+        <p:txBody>
+          <a:bodyPr/>
+          <a:lstStyle/>
+          <a:p>
+            <a:fld id="{D7C16608-1E71-45CD-90A6-9C0ACA5710DC}" type="slidenum">
+              <a:rPr lang="en-US" smtClean="0"/>
+              <a:t>6</a:t>
+            </a:fld>
+            <a:endParaRPr lang="en-US"/>
+          </a:p>
+        </p:txBody>
+      </p:sp>
+    </p:spTree>
+    <p:extLst>
+      <p:ext uri="{BB962C8B-B14F-4D97-AF65-F5344CB8AC3E}">
+        <p14:creationId xmlns:p14="http://schemas.microsoft.com/office/powerpoint/2010/main" val="1391661547"/>
+      </p:ext>
+    </p:extLst>
+  </p:cSld>
+  <p:clrMapOvr>
+    <a:masterClrMapping/>
+  </p:clrMapOvr>
+</p:notes>
+</file>
+
+<file path=ppt/notesSlides/notesSlide6.xml><?xml version="1.0" encoding="utf-8"?>
+<p:notes xmlns:a="http://schemas.openxmlformats.org/drawingml/2006/main" xmlns:r="http://schemas.openxmlformats.org/officeDocument/2006/relationships" xmlns:p="http://schemas.openxmlformats.org/presentationml/2006/main">
+  <p:cSld>
+    <p:spTree>
+      <p:nvGrpSpPr>
+        <p:cNvPr id="1" name=""/>
+        <p:cNvGrpSpPr/>
+        <p:nvPr/>
+      </p:nvGrpSpPr>
+      <p:grpSpPr>
+        <a:xfrm>
+          <a:off x="0" y="0"/>
+          <a:ext cx="0" cy="0"/>
+          <a:chOff x="0" y="0"/>
+          <a:chExt cx="0" cy="0"/>
+        </a:xfrm>
+      </p:grpSpPr>
+      <p:sp>
+        <p:nvSpPr>
+          <p:cNvPr id="2" name="Slide Image Placeholder 1"/>
+          <p:cNvSpPr>
+            <a:spLocks noGrp="1" noRot="1" noChangeAspect="1"/>
+          </p:cNvSpPr>
+          <p:nvPr>
+            <p:ph type="sldImg"/>
+          </p:nvPr>
+        </p:nvSpPr>
+        <p:spPr/>
+      </p:sp>
+      <p:sp>
+        <p:nvSpPr>
+          <p:cNvPr id="3" name="Notes Placeholder 2"/>
+          <p:cNvSpPr>
+            <a:spLocks noGrp="1"/>
+          </p:cNvSpPr>
+          <p:nvPr>
+            <p:ph type="body" idx="1"/>
+          </p:nvPr>
+        </p:nvSpPr>
+        <p:spPr/>
+        <p:txBody>
+          <a:bodyPr/>
+          <a:lstStyle/>
+          <a:p>
+            <a:r>
+              <a:rPr lang="en-US" sz="1200" kern="1200" dirty="0">
+                <a:solidFill>
+                  <a:schemeClr val="tx1"/>
+                </a:solidFill>
+                <a:effectLst/>
+                <a:latin typeface="+mn-lt"/>
+                <a:ea typeface="+mn-ea"/>
+                <a:cs typeface="+mn-cs"/>
+              </a:rPr>
+              <a:t>In this study we developed a model to evaluate the likelihood of knee osteoarthritis in radiographs using the DinoV2 model. Our results shows that as the amount of data increases, so does the performance and generalizability of our model. We were also able to evaluate the effects of finetuning or freezing the DinoV2 model and were able to achieve an extremely high level of performance.</a:t>
+            </a:r>
+            <a:endParaRPr lang="en-US" dirty="0"/>
+          </a:p>
+        </p:txBody>
+      </p:sp>
+      <p:sp>
+        <p:nvSpPr>
+          <p:cNvPr id="4" name="Slide Number Placeholder 3"/>
+          <p:cNvSpPr>
+            <a:spLocks noGrp="1"/>
+          </p:cNvSpPr>
+          <p:nvPr>
+            <p:ph type="sldNum" sz="quarter" idx="5"/>
+          </p:nvPr>
+        </p:nvSpPr>
+        <p:spPr/>
+        <p:txBody>
+          <a:bodyPr/>
+          <a:lstStyle/>
+          <a:p>
+            <a:fld id="{D7C16608-1E71-45CD-90A6-9C0ACA5710DC}" type="slidenum">
+              <a:rPr lang="en-US" smtClean="0"/>
+              <a:t>7</a:t>
+            </a:fld>
+            <a:endParaRPr lang="en-US"/>
+          </a:p>
+        </p:txBody>
+      </p:sp>
+    </p:spTree>
+    <p:extLst>
+      <p:ext uri="{BB962C8B-B14F-4D97-AF65-F5344CB8AC3E}">
+        <p14:creationId xmlns:p14="http://schemas.microsoft.com/office/powerpoint/2010/main" val="3426462453"/>
+      </p:ext>
+    </p:extLst>
+  </p:cSld>
+  <p:clrMapOvr>
+    <a:masterClrMapping/>
+  </p:clrMapOvr>
+</p:notes>
+</file>
+
+<file path=ppt/notesSlides/notesSlide7.xml><?xml version="1.0" encoding="utf-8"?>
+<p:notes xmlns:a="http://schemas.openxmlformats.org/drawingml/2006/main" xmlns:r="http://schemas.openxmlformats.org/officeDocument/2006/relationships" xmlns:p="http://schemas.openxmlformats.org/presentationml/2006/main">
+  <p:cSld>
+    <p:spTree>
+      <p:nvGrpSpPr>
+        <p:cNvPr id="1" name=""/>
+        <p:cNvGrpSpPr/>
+        <p:nvPr/>
+      </p:nvGrpSpPr>
+      <p:grpSpPr>
+        <a:xfrm>
+          <a:off x="0" y="0"/>
+          <a:ext cx="0" cy="0"/>
+          <a:chOff x="0" y="0"/>
+          <a:chExt cx="0" cy="0"/>
+        </a:xfrm>
+      </p:grpSpPr>
+      <p:sp>
+        <p:nvSpPr>
+          <p:cNvPr id="2" name="Slide Image Placeholder 1"/>
+          <p:cNvSpPr>
+            <a:spLocks noGrp="1" noRot="1" noChangeAspect="1"/>
+          </p:cNvSpPr>
+          <p:nvPr>
+            <p:ph type="sldImg"/>
+          </p:nvPr>
+        </p:nvSpPr>
+        <p:spPr/>
+      </p:sp>
+      <p:sp>
+        <p:nvSpPr>
+          <p:cNvPr id="3" name="Notes Placeholder 2"/>
+          <p:cNvSpPr>
+            <a:spLocks noGrp="1"/>
+          </p:cNvSpPr>
+          <p:nvPr>
+            <p:ph type="body" idx="1"/>
+          </p:nvPr>
+        </p:nvSpPr>
+        <p:spPr/>
+        <p:txBody>
+          <a:bodyPr/>
+          <a:lstStyle/>
+          <a:p>
+            <a:r>
+              <a:rPr lang="en-US" dirty="0"/>
+              <a:t>And that’s the end of my presentation!</a:t>
+            </a:r>
+          </a:p>
+        </p:txBody>
+      </p:sp>
+      <p:sp>
+        <p:nvSpPr>
+          <p:cNvPr id="4" name="Slide Number Placeholder 3"/>
+          <p:cNvSpPr>
+            <a:spLocks noGrp="1"/>
+          </p:cNvSpPr>
+          <p:nvPr>
+            <p:ph type="sldNum" sz="quarter" idx="5"/>
+          </p:nvPr>
+        </p:nvSpPr>
+        <p:spPr/>
+        <p:txBody>
+          <a:bodyPr/>
+          <a:lstStyle/>
+          <a:p>
+            <a:fld id="{D7C16608-1E71-45CD-90A6-9C0ACA5710DC}" type="slidenum">
+              <a:rPr lang="en-US" smtClean="0"/>
+              <a:t>8</a:t>
+            </a:fld>
+            <a:endParaRPr lang="en-US"/>
+          </a:p>
+        </p:txBody>
+      </p:sp>
+    </p:spTree>
+    <p:extLst>
+      <p:ext uri="{BB962C8B-B14F-4D97-AF65-F5344CB8AC3E}">
+        <p14:creationId xmlns:p14="http://schemas.microsoft.com/office/powerpoint/2010/main" val="2973097940"/>
+      </p:ext>
+    </p:extLst>
+  </p:cSld>
+  <p:clrMapOvr>
+    <a:masterClrMapping/>
+  </p:clrMapOvr>
+</p:notes>
 </file>
 
 <file path=ppt/slideLayouts/slideLayout1.xml><?xml version="1.0" encoding="utf-8"?>
@@ -3597,7 +4784,7 @@
           <p:nvPr/>
         </p:nvPicPr>
         <p:blipFill>
-          <a:blip r:embed="rId2" cstate="print">
+          <a:blip r:embed="rId3" cstate="print">
             <a:extLst>
               <a:ext uri="{28A0092B-C50C-407E-A947-70E740481C1C}">
                 <a14:useLocalDpi xmlns:a14="http://schemas.microsoft.com/office/drawing/2010/main" val="0"/>
@@ -3830,7 +5017,7 @@
           <p:nvPr/>
         </p:nvPicPr>
         <p:blipFill>
-          <a:blip r:embed="rId2"/>
+          <a:blip r:embed="rId3"/>
           <a:stretch>
             <a:fillRect/>
           </a:stretch>
@@ -3909,293 +5096,1386 @@
           </a:p>
         </p:txBody>
       </p:sp>
-      <p:sp>
-        <p:nvSpPr>
-          <p:cNvPr id="4" name="Rectangle 3">
-            <a:extLst>
-              <a:ext uri="{FF2B5EF4-FFF2-40B4-BE49-F238E27FC236}">
-                <a16:creationId xmlns:a16="http://schemas.microsoft.com/office/drawing/2014/main" id="{6B897169-BAC4-4207-00CD-61A102AA5EAF}"/>
-              </a:ext>
-            </a:extLst>
-          </p:cNvPr>
-          <p:cNvSpPr/>
+      <p:pic>
+        <p:nvPicPr>
+          <p:cNvPr id="11" name="Picture 10">
+            <a:extLst>
+              <a:ext uri="{FF2B5EF4-FFF2-40B4-BE49-F238E27FC236}">
+                <a16:creationId xmlns:a16="http://schemas.microsoft.com/office/drawing/2014/main" id="{591E6DFE-08B2-2C54-1A9D-4FC7AC88B647}"/>
+              </a:ext>
+            </a:extLst>
+          </p:cNvPr>
+          <p:cNvPicPr>
+            <a:picLocks noChangeAspect="1"/>
+          </p:cNvPicPr>
           <p:nvPr/>
-        </p:nvSpPr>
+        </p:nvPicPr>
+        <p:blipFill>
+          <a:blip r:embed="rId3">
+            <a:extLst>
+              <a:ext uri="{28A0092B-C50C-407E-A947-70E740481C1C}">
+                <a14:useLocalDpi xmlns:a14="http://schemas.microsoft.com/office/drawing/2010/main" val="0"/>
+              </a:ext>
+            </a:extLst>
+          </a:blip>
+          <a:stretch>
+            <a:fillRect/>
+          </a:stretch>
+        </p:blipFill>
         <p:spPr>
           <a:xfrm>
-            <a:off x="838200" y="1690688"/>
-            <a:ext cx="6878053" cy="1738312"/>
+            <a:off x="253261" y="3782629"/>
+            <a:ext cx="5619907" cy="2256020"/>
           </a:xfrm>
           <a:prstGeom prst="rect">
             <a:avLst/>
           </a:prstGeom>
         </p:spPr>
-        <p:style>
-          <a:lnRef idx="2">
-            <a:schemeClr val="accent1">
-              <a:shade val="15000"/>
-            </a:schemeClr>
-          </a:lnRef>
-          <a:fillRef idx="1">
-            <a:schemeClr val="accent1"/>
-          </a:fillRef>
-          <a:effectRef idx="0">
-            <a:schemeClr val="accent1"/>
-          </a:effectRef>
-          <a:fontRef idx="minor">
-            <a:schemeClr val="lt1"/>
-          </a:fontRef>
-        </p:style>
-        <p:txBody>
-          <a:bodyPr rtlCol="0" anchor="ctr"/>
-          <a:lstStyle/>
-          <a:p>
-            <a:pPr algn="ctr"/>
-            <a:r>
-              <a:rPr lang="en-US" dirty="0"/>
-              <a:t>Small table</a:t>
-            </a:r>
-          </a:p>
-          <a:p>
-            <a:pPr algn="ctr"/>
-            <a:r>
-              <a:rPr lang="en-US" dirty="0"/>
-              <a:t>&lt;best of Frozen&gt;</a:t>
-            </a:r>
-          </a:p>
-          <a:p>
-            <a:pPr algn="ctr"/>
-            <a:r>
-              <a:rPr lang="en-US" dirty="0"/>
-              <a:t>&lt;best of finetuning&gt;</a:t>
-            </a:r>
-          </a:p>
-        </p:txBody>
-      </p:sp>
-      <p:sp>
-        <p:nvSpPr>
-          <p:cNvPr id="3" name="Rectangle 2">
-            <a:extLst>
-              <a:ext uri="{FF2B5EF4-FFF2-40B4-BE49-F238E27FC236}">
-                <a16:creationId xmlns:a16="http://schemas.microsoft.com/office/drawing/2014/main" id="{4962C47D-079E-5A3D-E64B-347C273C0246}"/>
-              </a:ext>
-            </a:extLst>
-          </p:cNvPr>
-          <p:cNvSpPr/>
+      </p:pic>
+      <p:pic>
+        <p:nvPicPr>
+          <p:cNvPr id="13" name="Picture 12">
+            <a:extLst>
+              <a:ext uri="{FF2B5EF4-FFF2-40B4-BE49-F238E27FC236}">
+                <a16:creationId xmlns:a16="http://schemas.microsoft.com/office/drawing/2014/main" id="{676DFE42-962A-47A4-5DAE-4D4A36C151A8}"/>
+              </a:ext>
+            </a:extLst>
+          </p:cNvPr>
+          <p:cNvPicPr>
+            <a:picLocks noChangeAspect="1"/>
+          </p:cNvPicPr>
           <p:nvPr/>
-        </p:nvSpPr>
+        </p:nvPicPr>
+        <p:blipFill>
+          <a:blip r:embed="rId4">
+            <a:extLst>
+              <a:ext uri="{28A0092B-C50C-407E-A947-70E740481C1C}">
+                <a14:useLocalDpi xmlns:a14="http://schemas.microsoft.com/office/drawing/2010/main" val="0"/>
+              </a:ext>
+            </a:extLst>
+          </a:blip>
+          <a:stretch>
+            <a:fillRect/>
+          </a:stretch>
+        </p:blipFill>
         <p:spPr>
           <a:xfrm>
-            <a:off x="838200" y="4298156"/>
-            <a:ext cx="2346158" cy="1738312"/>
+            <a:off x="6318833" y="3782629"/>
+            <a:ext cx="5604800" cy="2256020"/>
           </a:xfrm>
           <a:prstGeom prst="rect">
             <a:avLst/>
           </a:prstGeom>
         </p:spPr>
-        <p:style>
-          <a:lnRef idx="2">
-            <a:schemeClr val="accent1">
-              <a:shade val="15000"/>
-            </a:schemeClr>
-          </a:lnRef>
-          <a:fillRef idx="1">
-            <a:schemeClr val="accent1"/>
-          </a:fillRef>
-          <a:effectRef idx="0">
-            <a:schemeClr val="accent1"/>
-          </a:effectRef>
-          <a:fontRef idx="minor">
-            <a:schemeClr val="lt1"/>
-          </a:fontRef>
-        </p:style>
-        <p:txBody>
-          <a:bodyPr rtlCol="0" anchor="ctr"/>
-          <a:lstStyle/>
-          <a:p>
-            <a:pPr algn="ctr"/>
-            <a:r>
-              <a:rPr lang="en-US" dirty="0"/>
-              <a:t>Confusion Matrix</a:t>
-            </a:r>
-          </a:p>
-          <a:p>
-            <a:pPr algn="ctr"/>
-            <a:r>
-              <a:rPr lang="en-US" dirty="0"/>
-              <a:t>&lt;best of frozen&gt;</a:t>
-            </a:r>
-          </a:p>
-        </p:txBody>
-      </p:sp>
-      <p:sp>
-        <p:nvSpPr>
-          <p:cNvPr id="5" name="Rectangle 4">
-            <a:extLst>
-              <a:ext uri="{FF2B5EF4-FFF2-40B4-BE49-F238E27FC236}">
-                <a16:creationId xmlns:a16="http://schemas.microsoft.com/office/drawing/2014/main" id="{68DCBE69-1410-AE82-63D2-54725C72575E}"/>
-              </a:ext>
-            </a:extLst>
-          </p:cNvPr>
-          <p:cNvSpPr/>
+      </p:pic>
+      <p:sp>
+        <p:nvSpPr>
+          <p:cNvPr id="15" name="TextBox 14">
+            <a:extLst>
+              <a:ext uri="{FF2B5EF4-FFF2-40B4-BE49-F238E27FC236}">
+                <a16:creationId xmlns:a16="http://schemas.microsoft.com/office/drawing/2014/main" id="{54EF0626-E097-B61E-C566-B92F8EB479A5}"/>
+              </a:ext>
+            </a:extLst>
+          </p:cNvPr>
+          <p:cNvSpPr txBox="1"/>
           <p:nvPr/>
         </p:nvSpPr>
         <p:spPr>
           <a:xfrm>
-            <a:off x="3402930" y="4298156"/>
-            <a:ext cx="2346158" cy="1738312"/>
+            <a:off x="253261" y="6038649"/>
+            <a:ext cx="5619907" cy="369332"/>
           </a:xfrm>
           <a:prstGeom prst="rect">
             <a:avLst/>
           </a:prstGeom>
+          <a:noFill/>
         </p:spPr>
-        <p:style>
-          <a:lnRef idx="2">
-            <a:schemeClr val="accent1">
-              <a:shade val="15000"/>
-            </a:schemeClr>
-          </a:lnRef>
-          <a:fillRef idx="1">
-            <a:schemeClr val="accent1"/>
-          </a:fillRef>
-          <a:effectRef idx="0">
-            <a:schemeClr val="accent1"/>
-          </a:effectRef>
-          <a:fontRef idx="minor">
-            <a:schemeClr val="lt1"/>
-          </a:fontRef>
-        </p:style>
-        <p:txBody>
-          <a:bodyPr rtlCol="0" anchor="ctr"/>
+        <p:txBody>
+          <a:bodyPr wrap="square">
+            <a:spAutoFit/>
+          </a:bodyPr>
           <a:lstStyle/>
           <a:p>
             <a:pPr algn="ctr"/>
             <a:r>
               <a:rPr lang="en-US" dirty="0"/>
-              <a:t>ROC Curve</a:t>
-            </a:r>
-          </a:p>
-          <a:p>
-            <a:pPr algn="ctr"/>
-            <a:r>
-              <a:rPr lang="en-US" dirty="0"/>
-              <a:t>&lt;best of frozen&gt;</a:t>
-            </a:r>
-          </a:p>
-        </p:txBody>
-      </p:sp>
-      <p:sp>
-        <p:nvSpPr>
-          <p:cNvPr id="6" name="Rectangle 5">
-            <a:extLst>
-              <a:ext uri="{FF2B5EF4-FFF2-40B4-BE49-F238E27FC236}">
-                <a16:creationId xmlns:a16="http://schemas.microsoft.com/office/drawing/2014/main" id="{733B41EB-EF63-9BEB-6175-4B8631388830}"/>
-              </a:ext>
-            </a:extLst>
-          </p:cNvPr>
-          <p:cNvSpPr/>
+              <a:t>Best Frozen Model</a:t>
+            </a:r>
+          </a:p>
+        </p:txBody>
+      </p:sp>
+      <p:sp>
+        <p:nvSpPr>
+          <p:cNvPr id="16" name="TextBox 15">
+            <a:extLst>
+              <a:ext uri="{FF2B5EF4-FFF2-40B4-BE49-F238E27FC236}">
+                <a16:creationId xmlns:a16="http://schemas.microsoft.com/office/drawing/2014/main" id="{C15F8B23-E0EC-43D1-EBD7-22BAB8365BBF}"/>
+              </a:ext>
+            </a:extLst>
+          </p:cNvPr>
+          <p:cNvSpPr txBox="1"/>
           <p:nvPr/>
         </p:nvSpPr>
         <p:spPr>
           <a:xfrm>
-            <a:off x="6821903" y="4298156"/>
-            <a:ext cx="2346158" cy="1738312"/>
+            <a:off x="6318833" y="6051537"/>
+            <a:ext cx="5619906" cy="369332"/>
           </a:xfrm>
           <a:prstGeom prst="rect">
             <a:avLst/>
           </a:prstGeom>
+          <a:noFill/>
         </p:spPr>
-        <p:style>
-          <a:lnRef idx="2">
-            <a:schemeClr val="accent1">
-              <a:shade val="15000"/>
-            </a:schemeClr>
-          </a:lnRef>
-          <a:fillRef idx="1">
-            <a:schemeClr val="accent1"/>
-          </a:fillRef>
-          <a:effectRef idx="0">
-            <a:schemeClr val="accent1"/>
-          </a:effectRef>
-          <a:fontRef idx="minor">
-            <a:schemeClr val="lt1"/>
-          </a:fontRef>
-        </p:style>
-        <p:txBody>
-          <a:bodyPr rtlCol="0" anchor="ctr"/>
+        <p:txBody>
+          <a:bodyPr wrap="square">
+            <a:spAutoFit/>
+          </a:bodyPr>
           <a:lstStyle/>
           <a:p>
             <a:pPr algn="ctr"/>
             <a:r>
               <a:rPr lang="en-US" dirty="0"/>
-              <a:t>Confusion Matrix</a:t>
-            </a:r>
-          </a:p>
-          <a:p>
-            <a:pPr algn="ctr"/>
-            <a:r>
-              <a:rPr lang="en-US" dirty="0"/>
-              <a:t>&lt;best of finetuning&gt;</a:t>
-            </a:r>
-          </a:p>
-        </p:txBody>
-      </p:sp>
-      <p:sp>
-        <p:nvSpPr>
-          <p:cNvPr id="7" name="Rectangle 6">
-            <a:extLst>
-              <a:ext uri="{FF2B5EF4-FFF2-40B4-BE49-F238E27FC236}">
-                <a16:creationId xmlns:a16="http://schemas.microsoft.com/office/drawing/2014/main" id="{D58A6A66-DD34-2493-A522-545389E3E5A8}"/>
-              </a:ext>
-            </a:extLst>
-          </p:cNvPr>
-          <p:cNvSpPr/>
-          <p:nvPr/>
-        </p:nvSpPr>
-        <p:spPr>
-          <a:xfrm>
-            <a:off x="9386633" y="4298156"/>
-            <a:ext cx="2346158" cy="1738312"/>
-          </a:xfrm>
-          <a:prstGeom prst="rect">
-            <a:avLst/>
-          </a:prstGeom>
-        </p:spPr>
-        <p:style>
-          <a:lnRef idx="2">
-            <a:schemeClr val="accent1">
-              <a:shade val="15000"/>
-            </a:schemeClr>
-          </a:lnRef>
-          <a:fillRef idx="1">
-            <a:schemeClr val="accent1"/>
-          </a:fillRef>
-          <a:effectRef idx="0">
-            <a:schemeClr val="accent1"/>
-          </a:effectRef>
-          <a:fontRef idx="minor">
-            <a:schemeClr val="lt1"/>
-          </a:fontRef>
-        </p:style>
-        <p:txBody>
-          <a:bodyPr rtlCol="0" anchor="ctr"/>
-          <a:lstStyle/>
-          <a:p>
-            <a:pPr algn="ctr"/>
-            <a:r>
-              <a:rPr lang="en-US" dirty="0"/>
-              <a:t>ROC Curve</a:t>
-            </a:r>
-          </a:p>
-          <a:p>
-            <a:pPr algn="ctr"/>
-            <a:r>
-              <a:rPr lang="en-US" dirty="0"/>
-              <a:t>&lt;best of finetuning&gt;</a:t>
-            </a:r>
-          </a:p>
-        </p:txBody>
-      </p:sp>
+              <a:t>Best Finetuning Model</a:t>
+            </a:r>
+          </a:p>
+        </p:txBody>
+      </p:sp>
+      <p:graphicFrame>
+        <p:nvGraphicFramePr>
+          <p:cNvPr id="17" name="Table 16">
+            <a:extLst>
+              <a:ext uri="{FF2B5EF4-FFF2-40B4-BE49-F238E27FC236}">
+                <a16:creationId xmlns:a16="http://schemas.microsoft.com/office/drawing/2014/main" id="{9321F772-31E4-97BA-42FF-742FF281E289}"/>
+              </a:ext>
+            </a:extLst>
+          </p:cNvPr>
+          <p:cNvGraphicFramePr>
+            <a:graphicFrameLocks noGrp="1"/>
+          </p:cNvGraphicFramePr>
+          <p:nvPr>
+            <p:extLst>
+              <p:ext uri="{D42A27DB-BD31-4B8C-83A1-F6EECF244321}">
+                <p14:modId xmlns:p14="http://schemas.microsoft.com/office/powerpoint/2010/main" val="3773503700"/>
+              </p:ext>
+            </p:extLst>
+          </p:nvPr>
+        </p:nvGraphicFramePr>
+        <p:xfrm>
+          <a:off x="1061145" y="1588596"/>
+          <a:ext cx="10069710" cy="1868807"/>
+        </p:xfrm>
+        <a:graphic>
+          <a:graphicData uri="http://schemas.openxmlformats.org/drawingml/2006/table">
+            <a:tbl>
+              <a:tblPr firstRow="1" firstCol="1" bandRow="1">
+                <a:tableStyleId>{5C22544A-7EE6-4342-B048-85BDC9FD1C3A}</a:tableStyleId>
+              </a:tblPr>
+              <a:tblGrid>
+                <a:gridCol w="1223931">
+                  <a:extLst>
+                    <a:ext uri="{9D8B030D-6E8A-4147-A177-3AD203B41FA5}">
+                      <a16:colId xmlns:a16="http://schemas.microsoft.com/office/drawing/2014/main" val="4218525575"/>
+                    </a:ext>
+                  </a:extLst>
+                </a:gridCol>
+                <a:gridCol w="1223931">
+                  <a:extLst>
+                    <a:ext uri="{9D8B030D-6E8A-4147-A177-3AD203B41FA5}">
+                      <a16:colId xmlns:a16="http://schemas.microsoft.com/office/drawing/2014/main" val="58355443"/>
+                    </a:ext>
+                  </a:extLst>
+                </a:gridCol>
+                <a:gridCol w="1223931">
+                  <a:extLst>
+                    <a:ext uri="{9D8B030D-6E8A-4147-A177-3AD203B41FA5}">
+                      <a16:colId xmlns:a16="http://schemas.microsoft.com/office/drawing/2014/main" val="581652170"/>
+                    </a:ext>
+                  </a:extLst>
+                </a:gridCol>
+                <a:gridCol w="1041911">
+                  <a:extLst>
+                    <a:ext uri="{9D8B030D-6E8A-4147-A177-3AD203B41FA5}">
+                      <a16:colId xmlns:a16="http://schemas.microsoft.com/office/drawing/2014/main" val="3892957383"/>
+                    </a:ext>
+                  </a:extLst>
+                </a:gridCol>
+                <a:gridCol w="893365">
+                  <a:extLst>
+                    <a:ext uri="{9D8B030D-6E8A-4147-A177-3AD203B41FA5}">
+                      <a16:colId xmlns:a16="http://schemas.microsoft.com/office/drawing/2014/main" val="3381658872"/>
+                    </a:ext>
+                  </a:extLst>
+                </a:gridCol>
+                <a:gridCol w="893365">
+                  <a:extLst>
+                    <a:ext uri="{9D8B030D-6E8A-4147-A177-3AD203B41FA5}">
+                      <a16:colId xmlns:a16="http://schemas.microsoft.com/office/drawing/2014/main" val="4337830"/>
+                    </a:ext>
+                  </a:extLst>
+                </a:gridCol>
+                <a:gridCol w="893365">
+                  <a:extLst>
+                    <a:ext uri="{9D8B030D-6E8A-4147-A177-3AD203B41FA5}">
+                      <a16:colId xmlns:a16="http://schemas.microsoft.com/office/drawing/2014/main" val="209986830"/>
+                    </a:ext>
+                  </a:extLst>
+                </a:gridCol>
+                <a:gridCol w="893365">
+                  <a:extLst>
+                    <a:ext uri="{9D8B030D-6E8A-4147-A177-3AD203B41FA5}">
+                      <a16:colId xmlns:a16="http://schemas.microsoft.com/office/drawing/2014/main" val="2330618315"/>
+                    </a:ext>
+                  </a:extLst>
+                </a:gridCol>
+                <a:gridCol w="891273">
+                  <a:extLst>
+                    <a:ext uri="{9D8B030D-6E8A-4147-A177-3AD203B41FA5}">
+                      <a16:colId xmlns:a16="http://schemas.microsoft.com/office/drawing/2014/main" val="3185851852"/>
+                    </a:ext>
+                  </a:extLst>
+                </a:gridCol>
+                <a:gridCol w="891273">
+                  <a:extLst>
+                    <a:ext uri="{9D8B030D-6E8A-4147-A177-3AD203B41FA5}">
+                      <a16:colId xmlns:a16="http://schemas.microsoft.com/office/drawing/2014/main" val="3467853065"/>
+                    </a:ext>
+                  </a:extLst>
+                </a:gridCol>
+              </a:tblGrid>
+              <a:tr h="276125">
+                <a:tc rowSpan="2">
+                  <a:txBody>
+                    <a:bodyPr/>
+                    <a:lstStyle/>
+                    <a:p>
+                      <a:pPr marL="0" marR="0" algn="ctr">
+                        <a:lnSpc>
+                          <a:spcPct val="115000"/>
+                        </a:lnSpc>
+                        <a:spcAft>
+                          <a:spcPts val="800"/>
+                        </a:spcAft>
+                        <a:buNone/>
+                      </a:pPr>
+                      <a:endParaRPr lang="en-US" sz="2000" kern="100" dirty="0">
+                        <a:effectLst/>
+                        <a:latin typeface="Aptos" panose="020B0004020202020204" pitchFamily="34" charset="0"/>
+                        <a:ea typeface="Aptos" panose="020B0004020202020204" pitchFamily="34" charset="0"/>
+                        <a:cs typeface="Times New Roman" panose="02020603050405020304" pitchFamily="18" charset="0"/>
+                      </a:endParaRPr>
+                    </a:p>
+                  </a:txBody>
+                  <a:tcPr marL="151532" marR="151532" marT="75766" marB="75766" anchor="ctr"/>
+                </a:tc>
+                <a:tc rowSpan="2">
+                  <a:txBody>
+                    <a:bodyPr/>
+                    <a:lstStyle/>
+                    <a:p>
+                      <a:pPr marL="0" marR="0" algn="ctr">
+                        <a:lnSpc>
+                          <a:spcPct val="115000"/>
+                        </a:lnSpc>
+                        <a:spcAft>
+                          <a:spcPts val="800"/>
+                        </a:spcAft>
+                        <a:buNone/>
+                      </a:pPr>
+                      <a:r>
+                        <a:rPr lang="en-US" sz="1700" kern="100" dirty="0">
+                          <a:effectLst/>
+                        </a:rPr>
+                        <a:t>AUC</a:t>
+                      </a:r>
+                      <a:endParaRPr lang="en-US" sz="2000" kern="100" dirty="0">
+                        <a:effectLst/>
+                        <a:latin typeface="Aptos" panose="020B0004020202020204" pitchFamily="34" charset="0"/>
+                        <a:ea typeface="Aptos" panose="020B0004020202020204" pitchFamily="34" charset="0"/>
+                        <a:cs typeface="Times New Roman" panose="02020603050405020304" pitchFamily="18" charset="0"/>
+                      </a:endParaRPr>
+                    </a:p>
+                  </a:txBody>
+                  <a:tcPr marL="151532" marR="151532" marT="75766" marB="75766" anchor="ctr"/>
+                </a:tc>
+                <a:tc rowSpan="2">
+                  <a:txBody>
+                    <a:bodyPr/>
+                    <a:lstStyle/>
+                    <a:p>
+                      <a:pPr marL="0" marR="0" algn="ctr">
+                        <a:lnSpc>
+                          <a:spcPct val="115000"/>
+                        </a:lnSpc>
+                        <a:spcAft>
+                          <a:spcPts val="800"/>
+                        </a:spcAft>
+                        <a:buNone/>
+                      </a:pPr>
+                      <a:r>
+                        <a:rPr lang="en-US" sz="1700" kern="100" dirty="0">
+                          <a:effectLst/>
+                        </a:rPr>
+                        <a:t>Accuracy</a:t>
+                      </a:r>
+                      <a:endParaRPr lang="en-US" sz="2000" kern="100" dirty="0">
+                        <a:effectLst/>
+                        <a:latin typeface="Aptos" panose="020B0004020202020204" pitchFamily="34" charset="0"/>
+                        <a:ea typeface="Aptos" panose="020B0004020202020204" pitchFamily="34" charset="0"/>
+                        <a:cs typeface="Times New Roman" panose="02020603050405020304" pitchFamily="18" charset="0"/>
+                      </a:endParaRPr>
+                    </a:p>
+                  </a:txBody>
+                  <a:tcPr marL="151532" marR="151532" marT="75766" marB="75766" anchor="ctr"/>
+                </a:tc>
+                <a:tc rowSpan="2">
+                  <a:txBody>
+                    <a:bodyPr/>
+                    <a:lstStyle/>
+                    <a:p>
+                      <a:pPr marL="0" marR="0" algn="ctr">
+                        <a:lnSpc>
+                          <a:spcPct val="115000"/>
+                        </a:lnSpc>
+                        <a:spcAft>
+                          <a:spcPts val="800"/>
+                        </a:spcAft>
+                        <a:buNone/>
+                      </a:pPr>
+                      <a:r>
+                        <a:rPr lang="en-US" sz="1700" kern="100">
+                          <a:effectLst/>
+                        </a:rPr>
+                        <a:t>Macro-F1</a:t>
+                      </a:r>
+                      <a:endParaRPr lang="en-US" sz="2000" kern="100">
+                        <a:effectLst/>
+                        <a:latin typeface="Aptos" panose="020B0004020202020204" pitchFamily="34" charset="0"/>
+                        <a:ea typeface="Aptos" panose="020B0004020202020204" pitchFamily="34" charset="0"/>
+                        <a:cs typeface="Times New Roman" panose="02020603050405020304" pitchFamily="18" charset="0"/>
+                      </a:endParaRPr>
+                    </a:p>
+                  </a:txBody>
+                  <a:tcPr marL="151532" marR="151532" marT="75766" marB="75766" anchor="ctr"/>
+                </a:tc>
+                <a:tc gridSpan="2">
+                  <a:txBody>
+                    <a:bodyPr/>
+                    <a:lstStyle/>
+                    <a:p>
+                      <a:pPr marL="0" marR="0" algn="ctr">
+                        <a:lnSpc>
+                          <a:spcPct val="115000"/>
+                        </a:lnSpc>
+                        <a:spcAft>
+                          <a:spcPts val="800"/>
+                        </a:spcAft>
+                        <a:buNone/>
+                      </a:pPr>
+                      <a:r>
+                        <a:rPr lang="en-US" sz="1700" kern="100">
+                          <a:effectLst/>
+                        </a:rPr>
+                        <a:t>Precision</a:t>
+                      </a:r>
+                      <a:endParaRPr lang="en-US" sz="2000" kern="100">
+                        <a:effectLst/>
+                        <a:latin typeface="Aptos" panose="020B0004020202020204" pitchFamily="34" charset="0"/>
+                        <a:ea typeface="Aptos" panose="020B0004020202020204" pitchFamily="34" charset="0"/>
+                        <a:cs typeface="Times New Roman" panose="02020603050405020304" pitchFamily="18" charset="0"/>
+                      </a:endParaRPr>
+                    </a:p>
+                  </a:txBody>
+                  <a:tcPr marL="151532" marR="151532" marT="75766" marB="75766" anchor="ctr"/>
+                </a:tc>
+                <a:tc hMerge="1">
+                  <a:txBody>
+                    <a:bodyPr/>
+                    <a:lstStyle/>
+                    <a:p>
+                      <a:endParaRPr lang="en-US"/>
+                    </a:p>
+                  </a:txBody>
+                  <a:tcPr/>
+                </a:tc>
+                <a:tc gridSpan="2">
+                  <a:txBody>
+                    <a:bodyPr/>
+                    <a:lstStyle/>
+                    <a:p>
+                      <a:pPr marL="0" marR="0" algn="ctr">
+                        <a:lnSpc>
+                          <a:spcPct val="115000"/>
+                        </a:lnSpc>
+                        <a:spcAft>
+                          <a:spcPts val="800"/>
+                        </a:spcAft>
+                        <a:buNone/>
+                      </a:pPr>
+                      <a:r>
+                        <a:rPr lang="en-US" sz="1700" kern="100">
+                          <a:effectLst/>
+                        </a:rPr>
+                        <a:t>Recall</a:t>
+                      </a:r>
+                      <a:endParaRPr lang="en-US" sz="2000" kern="100">
+                        <a:effectLst/>
+                        <a:latin typeface="Aptos" panose="020B0004020202020204" pitchFamily="34" charset="0"/>
+                        <a:ea typeface="Aptos" panose="020B0004020202020204" pitchFamily="34" charset="0"/>
+                        <a:cs typeface="Times New Roman" panose="02020603050405020304" pitchFamily="18" charset="0"/>
+                      </a:endParaRPr>
+                    </a:p>
+                  </a:txBody>
+                  <a:tcPr marL="151532" marR="151532" marT="75766" marB="75766" anchor="ctr"/>
+                </a:tc>
+                <a:tc hMerge="1">
+                  <a:txBody>
+                    <a:bodyPr/>
+                    <a:lstStyle/>
+                    <a:p>
+                      <a:endParaRPr lang="en-US"/>
+                    </a:p>
+                  </a:txBody>
+                  <a:tcPr/>
+                </a:tc>
+                <a:tc gridSpan="2">
+                  <a:txBody>
+                    <a:bodyPr/>
+                    <a:lstStyle/>
+                    <a:p>
+                      <a:pPr marL="0" marR="0" algn="ctr">
+                        <a:lnSpc>
+                          <a:spcPct val="115000"/>
+                        </a:lnSpc>
+                        <a:spcAft>
+                          <a:spcPts val="800"/>
+                        </a:spcAft>
+                        <a:buNone/>
+                      </a:pPr>
+                      <a:r>
+                        <a:rPr lang="en-US" sz="1700" kern="100">
+                          <a:effectLst/>
+                        </a:rPr>
+                        <a:t>F1-score</a:t>
+                      </a:r>
+                      <a:endParaRPr lang="en-US" sz="2000" kern="100">
+                        <a:effectLst/>
+                        <a:latin typeface="Aptos" panose="020B0004020202020204" pitchFamily="34" charset="0"/>
+                        <a:ea typeface="Aptos" panose="020B0004020202020204" pitchFamily="34" charset="0"/>
+                        <a:cs typeface="Times New Roman" panose="02020603050405020304" pitchFamily="18" charset="0"/>
+                      </a:endParaRPr>
+                    </a:p>
+                  </a:txBody>
+                  <a:tcPr marL="151532" marR="151532" marT="75766" marB="75766" anchor="ctr"/>
+                </a:tc>
+                <a:tc hMerge="1">
+                  <a:txBody>
+                    <a:bodyPr/>
+                    <a:lstStyle/>
+                    <a:p>
+                      <a:endParaRPr lang="en-US"/>
+                    </a:p>
+                  </a:txBody>
+                  <a:tcPr/>
+                </a:tc>
+                <a:extLst>
+                  <a:ext uri="{0D108BD9-81ED-4DB2-BD59-A6C34878D82A}">
+                    <a16:rowId xmlns:a16="http://schemas.microsoft.com/office/drawing/2014/main" val="852428074"/>
+                  </a:ext>
+                </a:extLst>
+              </a:tr>
+              <a:tr h="339895">
+                <a:tc vMerge="1">
+                  <a:txBody>
+                    <a:bodyPr/>
+                    <a:lstStyle/>
+                    <a:p>
+                      <a:endParaRPr lang="en-US"/>
+                    </a:p>
+                  </a:txBody>
+                  <a:tcPr/>
+                </a:tc>
+                <a:tc vMerge="1">
+                  <a:txBody>
+                    <a:bodyPr/>
+                    <a:lstStyle/>
+                    <a:p>
+                      <a:endParaRPr lang="en-US"/>
+                    </a:p>
+                  </a:txBody>
+                  <a:tcPr/>
+                </a:tc>
+                <a:tc vMerge="1">
+                  <a:txBody>
+                    <a:bodyPr/>
+                    <a:lstStyle/>
+                    <a:p>
+                      <a:endParaRPr lang="en-US"/>
+                    </a:p>
+                  </a:txBody>
+                  <a:tcPr/>
+                </a:tc>
+                <a:tc vMerge="1">
+                  <a:txBody>
+                    <a:bodyPr/>
+                    <a:lstStyle/>
+                    <a:p>
+                      <a:endParaRPr lang="en-US"/>
+                    </a:p>
+                  </a:txBody>
+                  <a:tcPr/>
+                </a:tc>
+                <a:tc>
+                  <a:txBody>
+                    <a:bodyPr/>
+                    <a:lstStyle/>
+                    <a:p>
+                      <a:pPr marL="0" marR="0" algn="ctr">
+                        <a:lnSpc>
+                          <a:spcPct val="115000"/>
+                        </a:lnSpc>
+                        <a:spcAft>
+                          <a:spcPts val="800"/>
+                        </a:spcAft>
+                        <a:buNone/>
+                      </a:pPr>
+                      <a:r>
+                        <a:rPr lang="en-US" sz="1000" kern="100">
+                          <a:effectLst/>
+                        </a:rPr>
+                        <a:t>Knee OA</a:t>
+                      </a:r>
+                      <a:endParaRPr lang="en-US" sz="2000" kern="100">
+                        <a:effectLst/>
+                        <a:latin typeface="Aptos" panose="020B0004020202020204" pitchFamily="34" charset="0"/>
+                        <a:ea typeface="Aptos" panose="020B0004020202020204" pitchFamily="34" charset="0"/>
+                        <a:cs typeface="Times New Roman" panose="02020603050405020304" pitchFamily="18" charset="0"/>
+                      </a:endParaRPr>
+                    </a:p>
+                  </a:txBody>
+                  <a:tcPr marL="113649" marR="113649" marT="0" marB="0" anchor="ctr"/>
+                </a:tc>
+                <a:tc>
+                  <a:txBody>
+                    <a:bodyPr/>
+                    <a:lstStyle/>
+                    <a:p>
+                      <a:pPr marL="0" marR="0" algn="ctr">
+                        <a:lnSpc>
+                          <a:spcPct val="115000"/>
+                        </a:lnSpc>
+                        <a:spcAft>
+                          <a:spcPts val="800"/>
+                        </a:spcAft>
+                        <a:buNone/>
+                      </a:pPr>
+                      <a:r>
+                        <a:rPr lang="en-US" sz="1000" kern="100">
+                          <a:effectLst/>
+                        </a:rPr>
+                        <a:t>No Knee OA</a:t>
+                      </a:r>
+                      <a:endParaRPr lang="en-US" sz="2000" kern="100">
+                        <a:effectLst/>
+                        <a:latin typeface="Aptos" panose="020B0004020202020204" pitchFamily="34" charset="0"/>
+                        <a:ea typeface="Aptos" panose="020B0004020202020204" pitchFamily="34" charset="0"/>
+                        <a:cs typeface="Times New Roman" panose="02020603050405020304" pitchFamily="18" charset="0"/>
+                      </a:endParaRPr>
+                    </a:p>
+                  </a:txBody>
+                  <a:tcPr marL="113649" marR="113649" marT="0" marB="0" anchor="ctr"/>
+                </a:tc>
+                <a:tc>
+                  <a:txBody>
+                    <a:bodyPr/>
+                    <a:lstStyle/>
+                    <a:p>
+                      <a:pPr marL="0" marR="0" algn="ctr">
+                        <a:lnSpc>
+                          <a:spcPct val="115000"/>
+                        </a:lnSpc>
+                        <a:spcAft>
+                          <a:spcPts val="800"/>
+                        </a:spcAft>
+                        <a:buNone/>
+                      </a:pPr>
+                      <a:r>
+                        <a:rPr lang="en-US" sz="1000" kern="100">
+                          <a:effectLst/>
+                        </a:rPr>
+                        <a:t>Knee OA</a:t>
+                      </a:r>
+                      <a:endParaRPr lang="en-US" sz="2000" kern="100">
+                        <a:effectLst/>
+                        <a:latin typeface="Aptos" panose="020B0004020202020204" pitchFamily="34" charset="0"/>
+                        <a:ea typeface="Aptos" panose="020B0004020202020204" pitchFamily="34" charset="0"/>
+                        <a:cs typeface="Times New Roman" panose="02020603050405020304" pitchFamily="18" charset="0"/>
+                      </a:endParaRPr>
+                    </a:p>
+                  </a:txBody>
+                  <a:tcPr marL="113649" marR="113649" marT="0" marB="0" anchor="ctr"/>
+                </a:tc>
+                <a:tc>
+                  <a:txBody>
+                    <a:bodyPr/>
+                    <a:lstStyle/>
+                    <a:p>
+                      <a:pPr marL="0" marR="0" algn="ctr">
+                        <a:lnSpc>
+                          <a:spcPct val="115000"/>
+                        </a:lnSpc>
+                        <a:spcAft>
+                          <a:spcPts val="800"/>
+                        </a:spcAft>
+                        <a:buNone/>
+                      </a:pPr>
+                      <a:r>
+                        <a:rPr lang="en-US" sz="1000" kern="100">
+                          <a:effectLst/>
+                        </a:rPr>
+                        <a:t>No Knee OA</a:t>
+                      </a:r>
+                      <a:endParaRPr lang="en-US" sz="2000" kern="100">
+                        <a:effectLst/>
+                        <a:latin typeface="Aptos" panose="020B0004020202020204" pitchFamily="34" charset="0"/>
+                        <a:ea typeface="Aptos" panose="020B0004020202020204" pitchFamily="34" charset="0"/>
+                        <a:cs typeface="Times New Roman" panose="02020603050405020304" pitchFamily="18" charset="0"/>
+                      </a:endParaRPr>
+                    </a:p>
+                  </a:txBody>
+                  <a:tcPr marL="113649" marR="113649" marT="0" marB="0" anchor="ctr"/>
+                </a:tc>
+                <a:tc>
+                  <a:txBody>
+                    <a:bodyPr/>
+                    <a:lstStyle/>
+                    <a:p>
+                      <a:pPr marL="0" marR="0" algn="ctr">
+                        <a:lnSpc>
+                          <a:spcPct val="115000"/>
+                        </a:lnSpc>
+                        <a:spcAft>
+                          <a:spcPts val="800"/>
+                        </a:spcAft>
+                        <a:buNone/>
+                      </a:pPr>
+                      <a:r>
+                        <a:rPr lang="en-US" sz="1000" kern="100">
+                          <a:effectLst/>
+                        </a:rPr>
+                        <a:t>Knee OA</a:t>
+                      </a:r>
+                      <a:endParaRPr lang="en-US" sz="2000" kern="100">
+                        <a:effectLst/>
+                        <a:latin typeface="Aptos" panose="020B0004020202020204" pitchFamily="34" charset="0"/>
+                        <a:ea typeface="Aptos" panose="020B0004020202020204" pitchFamily="34" charset="0"/>
+                        <a:cs typeface="Times New Roman" panose="02020603050405020304" pitchFamily="18" charset="0"/>
+                      </a:endParaRPr>
+                    </a:p>
+                  </a:txBody>
+                  <a:tcPr marL="113649" marR="113649" marT="0" marB="0" anchor="ctr"/>
+                </a:tc>
+                <a:tc>
+                  <a:txBody>
+                    <a:bodyPr/>
+                    <a:lstStyle/>
+                    <a:p>
+                      <a:pPr marL="0" marR="0" algn="ctr">
+                        <a:lnSpc>
+                          <a:spcPct val="115000"/>
+                        </a:lnSpc>
+                        <a:spcAft>
+                          <a:spcPts val="800"/>
+                        </a:spcAft>
+                        <a:buNone/>
+                      </a:pPr>
+                      <a:r>
+                        <a:rPr lang="en-US" sz="1000" kern="100">
+                          <a:effectLst/>
+                        </a:rPr>
+                        <a:t>No Knee OA</a:t>
+                      </a:r>
+                      <a:endParaRPr lang="en-US" sz="2000" kern="100">
+                        <a:effectLst/>
+                        <a:latin typeface="Aptos" panose="020B0004020202020204" pitchFamily="34" charset="0"/>
+                        <a:ea typeface="Aptos" panose="020B0004020202020204" pitchFamily="34" charset="0"/>
+                        <a:cs typeface="Times New Roman" panose="02020603050405020304" pitchFamily="18" charset="0"/>
+                      </a:endParaRPr>
+                    </a:p>
+                  </a:txBody>
+                  <a:tcPr marL="113649" marR="113649" marT="0" marB="0" anchor="ctr"/>
+                </a:tc>
+                <a:extLst>
+                  <a:ext uri="{0D108BD9-81ED-4DB2-BD59-A6C34878D82A}">
+                    <a16:rowId xmlns:a16="http://schemas.microsoft.com/office/drawing/2014/main" val="3816933735"/>
+                  </a:ext>
+                </a:extLst>
+              </a:tr>
+              <a:tr h="276125">
+                <a:tc>
+                  <a:txBody>
+                    <a:bodyPr/>
+                    <a:lstStyle/>
+                    <a:p>
+                      <a:pPr marL="0" marR="0" algn="ctr">
+                        <a:lnSpc>
+                          <a:spcPct val="115000"/>
+                        </a:lnSpc>
+                        <a:spcAft>
+                          <a:spcPts val="800"/>
+                        </a:spcAft>
+                        <a:buNone/>
+                      </a:pPr>
+                      <a:r>
+                        <a:rPr lang="en-US" sz="1600" kern="100" dirty="0">
+                          <a:effectLst/>
+                          <a:latin typeface="Aptos" panose="020B0004020202020204" pitchFamily="34" charset="0"/>
+                          <a:ea typeface="Aptos" panose="020B0004020202020204" pitchFamily="34" charset="0"/>
+                          <a:cs typeface="Times New Roman" panose="02020603050405020304" pitchFamily="18" charset="0"/>
+                        </a:rPr>
+                        <a:t>Best Frozen</a:t>
+                      </a:r>
+                    </a:p>
+                  </a:txBody>
+                  <a:tcPr marL="113649" marR="113649" marT="0" marB="0" anchor="ctr"/>
+                </a:tc>
+                <a:tc>
+                  <a:txBody>
+                    <a:bodyPr/>
+                    <a:lstStyle/>
+                    <a:p>
+                      <a:pPr marL="0" marR="0" algn="ctr">
+                        <a:lnSpc>
+                          <a:spcPct val="115000"/>
+                        </a:lnSpc>
+                        <a:spcAft>
+                          <a:spcPts val="800"/>
+                        </a:spcAft>
+                        <a:buNone/>
+                      </a:pPr>
+                      <a:r>
+                        <a:rPr lang="en-US" sz="2000" b="1" kern="100" dirty="0">
+                          <a:effectLst/>
+                          <a:latin typeface="Arial" panose="020B0604020202020204" pitchFamily="34" charset="0"/>
+                          <a:ea typeface="Aptos" panose="020B0004020202020204" pitchFamily="34" charset="0"/>
+                          <a:cs typeface="Times New Roman" panose="02020603050405020304" pitchFamily="18" charset="0"/>
+                        </a:rPr>
+                        <a:t>0.989</a:t>
+                      </a:r>
+                      <a:endParaRPr lang="en-US" sz="2000" b="1" kern="100" dirty="0">
+                        <a:effectLst/>
+                        <a:latin typeface="Aptos" panose="020B0004020202020204" pitchFamily="34" charset="0"/>
+                        <a:ea typeface="Aptos" panose="020B0004020202020204" pitchFamily="34" charset="0"/>
+                        <a:cs typeface="Times New Roman" panose="02020603050405020304" pitchFamily="18" charset="0"/>
+                      </a:endParaRPr>
+                    </a:p>
+                  </a:txBody>
+                  <a:tcPr marL="68580" marR="68580" marT="0" marB="0" anchor="ctr"/>
+                </a:tc>
+                <a:tc>
+                  <a:txBody>
+                    <a:bodyPr/>
+                    <a:lstStyle/>
+                    <a:p>
+                      <a:pPr marL="0" marR="0" algn="ctr">
+                        <a:lnSpc>
+                          <a:spcPct val="115000"/>
+                        </a:lnSpc>
+                        <a:spcAft>
+                          <a:spcPts val="800"/>
+                        </a:spcAft>
+                        <a:buNone/>
+                      </a:pPr>
+                      <a:r>
+                        <a:rPr lang="en-US" sz="2000" b="1" kern="100" dirty="0">
+                          <a:effectLst/>
+                          <a:latin typeface="Arial" panose="020B0604020202020204" pitchFamily="34" charset="0"/>
+                          <a:ea typeface="Aptos" panose="020B0004020202020204" pitchFamily="34" charset="0"/>
+                          <a:cs typeface="Times New Roman" panose="02020603050405020304" pitchFamily="18" charset="0"/>
+                        </a:rPr>
+                        <a:t>0.99</a:t>
+                      </a:r>
+                      <a:endParaRPr lang="en-US" sz="2000" b="1" kern="100" dirty="0">
+                        <a:effectLst/>
+                        <a:latin typeface="Aptos" panose="020B0004020202020204" pitchFamily="34" charset="0"/>
+                        <a:ea typeface="Aptos" panose="020B0004020202020204" pitchFamily="34" charset="0"/>
+                        <a:cs typeface="Times New Roman" panose="02020603050405020304" pitchFamily="18" charset="0"/>
+                      </a:endParaRPr>
+                    </a:p>
+                  </a:txBody>
+                  <a:tcPr marL="68580" marR="68580" marT="0" marB="0" anchor="ctr"/>
+                </a:tc>
+                <a:tc>
+                  <a:txBody>
+                    <a:bodyPr/>
+                    <a:lstStyle/>
+                    <a:p>
+                      <a:pPr marL="0" marR="0" algn="ctr">
+                        <a:lnSpc>
+                          <a:spcPct val="115000"/>
+                        </a:lnSpc>
+                        <a:spcAft>
+                          <a:spcPts val="800"/>
+                        </a:spcAft>
+                        <a:buNone/>
+                      </a:pPr>
+                      <a:r>
+                        <a:rPr lang="en-US" sz="2000" b="1" kern="100" dirty="0">
+                          <a:effectLst/>
+                          <a:latin typeface="Arial" panose="020B0604020202020204" pitchFamily="34" charset="0"/>
+                          <a:ea typeface="Aptos" panose="020B0004020202020204" pitchFamily="34" charset="0"/>
+                          <a:cs typeface="Times New Roman" panose="02020603050405020304" pitchFamily="18" charset="0"/>
+                        </a:rPr>
+                        <a:t>0.990</a:t>
+                      </a:r>
+                      <a:endParaRPr lang="en-US" sz="2000" b="1" kern="100" dirty="0">
+                        <a:effectLst/>
+                        <a:latin typeface="Aptos" panose="020B0004020202020204" pitchFamily="34" charset="0"/>
+                        <a:ea typeface="Aptos" panose="020B0004020202020204" pitchFamily="34" charset="0"/>
+                        <a:cs typeface="Times New Roman" panose="02020603050405020304" pitchFamily="18" charset="0"/>
+                      </a:endParaRPr>
+                    </a:p>
+                  </a:txBody>
+                  <a:tcPr marL="68580" marR="68580" marT="0" marB="0" anchor="ctr"/>
+                </a:tc>
+                <a:tc>
+                  <a:txBody>
+                    <a:bodyPr/>
+                    <a:lstStyle/>
+                    <a:p>
+                      <a:pPr marL="0" marR="0" algn="ctr">
+                        <a:lnSpc>
+                          <a:spcPct val="115000"/>
+                        </a:lnSpc>
+                        <a:spcAft>
+                          <a:spcPts val="800"/>
+                        </a:spcAft>
+                        <a:buNone/>
+                      </a:pPr>
+                      <a:r>
+                        <a:rPr lang="en-US" sz="2000" b="1" kern="100" dirty="0">
+                          <a:effectLst/>
+                          <a:latin typeface="Arial" panose="020B0604020202020204" pitchFamily="34" charset="0"/>
+                          <a:ea typeface="Aptos" panose="020B0004020202020204" pitchFamily="34" charset="0"/>
+                          <a:cs typeface="Times New Roman" panose="02020603050405020304" pitchFamily="18" charset="0"/>
+                        </a:rPr>
+                        <a:t>0.99</a:t>
+                      </a:r>
+                      <a:endParaRPr lang="en-US" sz="2000" b="1" kern="100" dirty="0">
+                        <a:effectLst/>
+                        <a:latin typeface="Aptos" panose="020B0004020202020204" pitchFamily="34" charset="0"/>
+                        <a:ea typeface="Aptos" panose="020B0004020202020204" pitchFamily="34" charset="0"/>
+                        <a:cs typeface="Times New Roman" panose="02020603050405020304" pitchFamily="18" charset="0"/>
+                      </a:endParaRPr>
+                    </a:p>
+                  </a:txBody>
+                  <a:tcPr marL="68580" marR="68580" marT="0" marB="0" anchor="ctr"/>
+                </a:tc>
+                <a:tc>
+                  <a:txBody>
+                    <a:bodyPr/>
+                    <a:lstStyle/>
+                    <a:p>
+                      <a:pPr marL="0" marR="0" algn="ctr">
+                        <a:lnSpc>
+                          <a:spcPct val="115000"/>
+                        </a:lnSpc>
+                        <a:spcAft>
+                          <a:spcPts val="800"/>
+                        </a:spcAft>
+                        <a:buNone/>
+                      </a:pPr>
+                      <a:r>
+                        <a:rPr lang="en-US" sz="2000" b="1" kern="100" dirty="0">
+                          <a:effectLst/>
+                          <a:latin typeface="Arial" panose="020B0604020202020204" pitchFamily="34" charset="0"/>
+                          <a:ea typeface="Aptos" panose="020B0004020202020204" pitchFamily="34" charset="0"/>
+                          <a:cs typeface="Times New Roman" panose="02020603050405020304" pitchFamily="18" charset="0"/>
+                        </a:rPr>
+                        <a:t>0.99</a:t>
+                      </a:r>
+                      <a:endParaRPr lang="en-US" sz="2000" b="1" kern="100" dirty="0">
+                        <a:effectLst/>
+                        <a:latin typeface="Aptos" panose="020B0004020202020204" pitchFamily="34" charset="0"/>
+                        <a:ea typeface="Aptos" panose="020B0004020202020204" pitchFamily="34" charset="0"/>
+                        <a:cs typeface="Times New Roman" panose="02020603050405020304" pitchFamily="18" charset="0"/>
+                      </a:endParaRPr>
+                    </a:p>
+                  </a:txBody>
+                  <a:tcPr marL="68580" marR="68580" marT="0" marB="0" anchor="ctr"/>
+                </a:tc>
+                <a:tc>
+                  <a:txBody>
+                    <a:bodyPr/>
+                    <a:lstStyle/>
+                    <a:p>
+                      <a:pPr marL="0" marR="0" algn="ctr">
+                        <a:lnSpc>
+                          <a:spcPct val="115000"/>
+                        </a:lnSpc>
+                        <a:spcAft>
+                          <a:spcPts val="800"/>
+                        </a:spcAft>
+                        <a:buNone/>
+                      </a:pPr>
+                      <a:r>
+                        <a:rPr lang="en-US" sz="2000" b="1" kern="100" dirty="0">
+                          <a:effectLst/>
+                          <a:latin typeface="Arial" panose="020B0604020202020204" pitchFamily="34" charset="0"/>
+                          <a:ea typeface="Aptos" panose="020B0004020202020204" pitchFamily="34" charset="0"/>
+                          <a:cs typeface="Times New Roman" panose="02020603050405020304" pitchFamily="18" charset="0"/>
+                        </a:rPr>
+                        <a:t>0.98</a:t>
+                      </a:r>
+                      <a:endParaRPr lang="en-US" sz="2000" b="1" kern="100" dirty="0">
+                        <a:effectLst/>
+                        <a:latin typeface="Aptos" panose="020B0004020202020204" pitchFamily="34" charset="0"/>
+                        <a:ea typeface="Aptos" panose="020B0004020202020204" pitchFamily="34" charset="0"/>
+                        <a:cs typeface="Times New Roman" panose="02020603050405020304" pitchFamily="18" charset="0"/>
+                      </a:endParaRPr>
+                    </a:p>
+                  </a:txBody>
+                  <a:tcPr marL="68580" marR="68580" marT="0" marB="0" anchor="ctr"/>
+                </a:tc>
+                <a:tc>
+                  <a:txBody>
+                    <a:bodyPr/>
+                    <a:lstStyle/>
+                    <a:p>
+                      <a:pPr marL="0" marR="0" algn="ctr">
+                        <a:lnSpc>
+                          <a:spcPct val="115000"/>
+                        </a:lnSpc>
+                        <a:spcAft>
+                          <a:spcPts val="800"/>
+                        </a:spcAft>
+                        <a:buNone/>
+                      </a:pPr>
+                      <a:r>
+                        <a:rPr lang="en-US" sz="2000" b="1" kern="100" dirty="0">
+                          <a:effectLst/>
+                          <a:latin typeface="Arial" panose="020B0604020202020204" pitchFamily="34" charset="0"/>
+                          <a:ea typeface="Aptos" panose="020B0004020202020204" pitchFamily="34" charset="0"/>
+                          <a:cs typeface="Times New Roman" panose="02020603050405020304" pitchFamily="18" charset="0"/>
+                        </a:rPr>
+                        <a:t>1.00</a:t>
+                      </a:r>
+                      <a:endParaRPr lang="en-US" sz="2000" b="1" kern="100" dirty="0">
+                        <a:effectLst/>
+                        <a:latin typeface="Aptos" panose="020B0004020202020204" pitchFamily="34" charset="0"/>
+                        <a:ea typeface="Aptos" panose="020B0004020202020204" pitchFamily="34" charset="0"/>
+                        <a:cs typeface="Times New Roman" panose="02020603050405020304" pitchFamily="18" charset="0"/>
+                      </a:endParaRPr>
+                    </a:p>
+                  </a:txBody>
+                  <a:tcPr marL="68580" marR="68580" marT="0" marB="0" anchor="ctr"/>
+                </a:tc>
+                <a:tc>
+                  <a:txBody>
+                    <a:bodyPr/>
+                    <a:lstStyle/>
+                    <a:p>
+                      <a:pPr marL="0" marR="0" algn="ctr">
+                        <a:lnSpc>
+                          <a:spcPct val="115000"/>
+                        </a:lnSpc>
+                        <a:spcAft>
+                          <a:spcPts val="800"/>
+                        </a:spcAft>
+                        <a:buNone/>
+                      </a:pPr>
+                      <a:r>
+                        <a:rPr lang="en-US" sz="2000" b="1" kern="100" dirty="0">
+                          <a:effectLst/>
+                          <a:latin typeface="Arial" panose="020B0604020202020204" pitchFamily="34" charset="0"/>
+                          <a:ea typeface="Aptos" panose="020B0004020202020204" pitchFamily="34" charset="0"/>
+                          <a:cs typeface="Times New Roman" panose="02020603050405020304" pitchFamily="18" charset="0"/>
+                        </a:rPr>
+                        <a:t>0.99</a:t>
+                      </a:r>
+                      <a:endParaRPr lang="en-US" sz="2000" b="1" kern="100" dirty="0">
+                        <a:effectLst/>
+                        <a:latin typeface="Aptos" panose="020B0004020202020204" pitchFamily="34" charset="0"/>
+                        <a:ea typeface="Aptos" panose="020B0004020202020204" pitchFamily="34" charset="0"/>
+                        <a:cs typeface="Times New Roman" panose="02020603050405020304" pitchFamily="18" charset="0"/>
+                      </a:endParaRPr>
+                    </a:p>
+                  </a:txBody>
+                  <a:tcPr marL="68580" marR="68580" marT="0" marB="0" anchor="ctr"/>
+                </a:tc>
+                <a:tc>
+                  <a:txBody>
+                    <a:bodyPr/>
+                    <a:lstStyle/>
+                    <a:p>
+                      <a:pPr marL="0" marR="0" algn="ctr">
+                        <a:lnSpc>
+                          <a:spcPct val="115000"/>
+                        </a:lnSpc>
+                        <a:spcAft>
+                          <a:spcPts val="800"/>
+                        </a:spcAft>
+                        <a:buNone/>
+                      </a:pPr>
+                      <a:r>
+                        <a:rPr lang="en-US" sz="2000" b="1" kern="100" dirty="0">
+                          <a:effectLst/>
+                          <a:latin typeface="Arial" panose="020B0604020202020204" pitchFamily="34" charset="0"/>
+                          <a:ea typeface="Aptos" panose="020B0004020202020204" pitchFamily="34" charset="0"/>
+                          <a:cs typeface="Times New Roman" panose="02020603050405020304" pitchFamily="18" charset="0"/>
+                        </a:rPr>
+                        <a:t>0.99</a:t>
+                      </a:r>
+                      <a:endParaRPr lang="en-US" sz="2000" b="1" kern="100" dirty="0">
+                        <a:effectLst/>
+                        <a:latin typeface="Aptos" panose="020B0004020202020204" pitchFamily="34" charset="0"/>
+                        <a:ea typeface="Aptos" panose="020B0004020202020204" pitchFamily="34" charset="0"/>
+                        <a:cs typeface="Times New Roman" panose="02020603050405020304" pitchFamily="18" charset="0"/>
+                      </a:endParaRPr>
+                    </a:p>
+                  </a:txBody>
+                  <a:tcPr marL="68580" marR="68580" marT="0" marB="0" anchor="ctr"/>
+                </a:tc>
+                <a:extLst>
+                  <a:ext uri="{0D108BD9-81ED-4DB2-BD59-A6C34878D82A}">
+                    <a16:rowId xmlns:a16="http://schemas.microsoft.com/office/drawing/2014/main" val="15612415"/>
+                  </a:ext>
+                </a:extLst>
+              </a:tr>
+              <a:tr h="458806">
+                <a:tc>
+                  <a:txBody>
+                    <a:bodyPr/>
+                    <a:lstStyle/>
+                    <a:p>
+                      <a:pPr marL="0" marR="0" algn="ctr">
+                        <a:lnSpc>
+                          <a:spcPct val="115000"/>
+                        </a:lnSpc>
+                        <a:spcAft>
+                          <a:spcPts val="800"/>
+                        </a:spcAft>
+                        <a:buNone/>
+                      </a:pPr>
+                      <a:r>
+                        <a:rPr lang="en-US" sz="1600" kern="100" dirty="0">
+                          <a:effectLst/>
+                          <a:latin typeface="Aptos" panose="020B0004020202020204" pitchFamily="34" charset="0"/>
+                          <a:ea typeface="Aptos" panose="020B0004020202020204" pitchFamily="34" charset="0"/>
+                          <a:cs typeface="Times New Roman" panose="02020603050405020304" pitchFamily="18" charset="0"/>
+                        </a:rPr>
+                        <a:t>Best Finetuned</a:t>
+                      </a:r>
+                    </a:p>
+                  </a:txBody>
+                  <a:tcPr marL="113649" marR="113649" marT="0" marB="0" anchor="ctr"/>
+                </a:tc>
+                <a:tc>
+                  <a:txBody>
+                    <a:bodyPr/>
+                    <a:lstStyle/>
+                    <a:p>
+                      <a:pPr marL="0" marR="0" algn="ctr">
+                        <a:lnSpc>
+                          <a:spcPct val="115000"/>
+                        </a:lnSpc>
+                        <a:spcAft>
+                          <a:spcPts val="800"/>
+                        </a:spcAft>
+                        <a:buNone/>
+                      </a:pPr>
+                      <a:r>
+                        <a:rPr lang="en-US" sz="2000" b="0" kern="100">
+                          <a:effectLst/>
+                          <a:latin typeface="Arial" panose="020B0604020202020204" pitchFamily="34" charset="0"/>
+                          <a:ea typeface="Aptos" panose="020B0004020202020204" pitchFamily="34" charset="0"/>
+                          <a:cs typeface="Times New Roman" panose="02020603050405020304" pitchFamily="18" charset="0"/>
+                        </a:rPr>
+                        <a:t>0.985</a:t>
+                      </a:r>
+                      <a:endParaRPr lang="en-US" sz="2000" b="0" kern="100">
+                        <a:effectLst/>
+                        <a:latin typeface="Aptos" panose="020B0004020202020204" pitchFamily="34" charset="0"/>
+                        <a:ea typeface="Aptos" panose="020B0004020202020204" pitchFamily="34" charset="0"/>
+                        <a:cs typeface="Times New Roman" panose="02020603050405020304" pitchFamily="18" charset="0"/>
+                      </a:endParaRPr>
+                    </a:p>
+                  </a:txBody>
+                  <a:tcPr marL="68580" marR="68580" marT="0" marB="0" anchor="ctr"/>
+                </a:tc>
+                <a:tc>
+                  <a:txBody>
+                    <a:bodyPr/>
+                    <a:lstStyle/>
+                    <a:p>
+                      <a:pPr marL="0" marR="0" algn="ctr">
+                        <a:lnSpc>
+                          <a:spcPct val="115000"/>
+                        </a:lnSpc>
+                        <a:spcAft>
+                          <a:spcPts val="800"/>
+                        </a:spcAft>
+                        <a:buNone/>
+                      </a:pPr>
+                      <a:r>
+                        <a:rPr lang="en-US" sz="2000" b="1" kern="100" dirty="0">
+                          <a:effectLst/>
+                          <a:latin typeface="Arial" panose="020B0604020202020204" pitchFamily="34" charset="0"/>
+                          <a:ea typeface="Aptos" panose="020B0004020202020204" pitchFamily="34" charset="0"/>
+                          <a:cs typeface="Times New Roman" panose="02020603050405020304" pitchFamily="18" charset="0"/>
+                        </a:rPr>
+                        <a:t>0.99</a:t>
+                      </a:r>
+                      <a:endParaRPr lang="en-US" sz="2000" b="1" kern="100" dirty="0">
+                        <a:effectLst/>
+                        <a:latin typeface="Aptos" panose="020B0004020202020204" pitchFamily="34" charset="0"/>
+                        <a:ea typeface="Aptos" panose="020B0004020202020204" pitchFamily="34" charset="0"/>
+                        <a:cs typeface="Times New Roman" panose="02020603050405020304" pitchFamily="18" charset="0"/>
+                      </a:endParaRPr>
+                    </a:p>
+                  </a:txBody>
+                  <a:tcPr marL="68580" marR="68580" marT="0" marB="0" anchor="ctr"/>
+                </a:tc>
+                <a:tc>
+                  <a:txBody>
+                    <a:bodyPr/>
+                    <a:lstStyle/>
+                    <a:p>
+                      <a:pPr marL="0" marR="0" algn="ctr">
+                        <a:lnSpc>
+                          <a:spcPct val="115000"/>
+                        </a:lnSpc>
+                        <a:spcAft>
+                          <a:spcPts val="800"/>
+                        </a:spcAft>
+                        <a:buNone/>
+                      </a:pPr>
+                      <a:r>
+                        <a:rPr lang="en-US" sz="2000" b="0" kern="100">
+                          <a:effectLst/>
+                          <a:latin typeface="Arial" panose="020B0604020202020204" pitchFamily="34" charset="0"/>
+                          <a:ea typeface="Aptos" panose="020B0004020202020204" pitchFamily="34" charset="0"/>
+                          <a:cs typeface="Times New Roman" panose="02020603050405020304" pitchFamily="18" charset="0"/>
+                        </a:rPr>
+                        <a:t>0.985</a:t>
+                      </a:r>
+                      <a:endParaRPr lang="en-US" sz="2000" b="0" kern="100">
+                        <a:effectLst/>
+                        <a:latin typeface="Aptos" panose="020B0004020202020204" pitchFamily="34" charset="0"/>
+                        <a:ea typeface="Aptos" panose="020B0004020202020204" pitchFamily="34" charset="0"/>
+                        <a:cs typeface="Times New Roman" panose="02020603050405020304" pitchFamily="18" charset="0"/>
+                      </a:endParaRPr>
+                    </a:p>
+                  </a:txBody>
+                  <a:tcPr marL="68580" marR="68580" marT="0" marB="0" anchor="ctr"/>
+                </a:tc>
+                <a:tc>
+                  <a:txBody>
+                    <a:bodyPr/>
+                    <a:lstStyle/>
+                    <a:p>
+                      <a:pPr marL="0" marR="0" algn="ctr">
+                        <a:lnSpc>
+                          <a:spcPct val="115000"/>
+                        </a:lnSpc>
+                        <a:spcAft>
+                          <a:spcPts val="800"/>
+                        </a:spcAft>
+                        <a:buNone/>
+                      </a:pPr>
+                      <a:r>
+                        <a:rPr lang="en-US" sz="2000" b="0" kern="100">
+                          <a:effectLst/>
+                          <a:latin typeface="Arial" panose="020B0604020202020204" pitchFamily="34" charset="0"/>
+                          <a:ea typeface="Aptos" panose="020B0004020202020204" pitchFamily="34" charset="0"/>
+                          <a:cs typeface="Times New Roman" panose="02020603050405020304" pitchFamily="18" charset="0"/>
+                        </a:rPr>
+                        <a:t>0.98</a:t>
+                      </a:r>
+                      <a:endParaRPr lang="en-US" sz="2000" b="0" kern="100">
+                        <a:effectLst/>
+                        <a:latin typeface="Aptos" panose="020B0004020202020204" pitchFamily="34" charset="0"/>
+                        <a:ea typeface="Aptos" panose="020B0004020202020204" pitchFamily="34" charset="0"/>
+                        <a:cs typeface="Times New Roman" panose="02020603050405020304" pitchFamily="18" charset="0"/>
+                      </a:endParaRPr>
+                    </a:p>
+                  </a:txBody>
+                  <a:tcPr marL="68580" marR="68580" marT="0" marB="0" anchor="ctr"/>
+                </a:tc>
+                <a:tc>
+                  <a:txBody>
+                    <a:bodyPr/>
+                    <a:lstStyle/>
+                    <a:p>
+                      <a:pPr marL="0" marR="0" algn="ctr">
+                        <a:lnSpc>
+                          <a:spcPct val="115000"/>
+                        </a:lnSpc>
+                        <a:spcAft>
+                          <a:spcPts val="800"/>
+                        </a:spcAft>
+                        <a:buNone/>
+                      </a:pPr>
+                      <a:r>
+                        <a:rPr lang="en-US" sz="2000" b="1" kern="100" dirty="0">
+                          <a:effectLst/>
+                          <a:latin typeface="Arial" panose="020B0604020202020204" pitchFamily="34" charset="0"/>
+                          <a:ea typeface="Aptos" panose="020B0004020202020204" pitchFamily="34" charset="0"/>
+                          <a:cs typeface="Times New Roman" panose="02020603050405020304" pitchFamily="18" charset="0"/>
+                        </a:rPr>
+                        <a:t>0.99</a:t>
+                      </a:r>
+                      <a:endParaRPr lang="en-US" sz="2000" b="1" kern="100" dirty="0">
+                        <a:effectLst/>
+                        <a:latin typeface="Aptos" panose="020B0004020202020204" pitchFamily="34" charset="0"/>
+                        <a:ea typeface="Aptos" panose="020B0004020202020204" pitchFamily="34" charset="0"/>
+                        <a:cs typeface="Times New Roman" panose="02020603050405020304" pitchFamily="18" charset="0"/>
+                      </a:endParaRPr>
+                    </a:p>
+                  </a:txBody>
+                  <a:tcPr marL="68580" marR="68580" marT="0" marB="0" anchor="ctr"/>
+                </a:tc>
+                <a:tc>
+                  <a:txBody>
+                    <a:bodyPr/>
+                    <a:lstStyle/>
+                    <a:p>
+                      <a:pPr marL="0" marR="0" algn="ctr">
+                        <a:lnSpc>
+                          <a:spcPct val="115000"/>
+                        </a:lnSpc>
+                        <a:spcAft>
+                          <a:spcPts val="800"/>
+                        </a:spcAft>
+                        <a:buNone/>
+                      </a:pPr>
+                      <a:r>
+                        <a:rPr lang="en-US" sz="2000" b="1" kern="100" dirty="0">
+                          <a:effectLst/>
+                          <a:latin typeface="Arial" panose="020B0604020202020204" pitchFamily="34" charset="0"/>
+                          <a:ea typeface="Aptos" panose="020B0004020202020204" pitchFamily="34" charset="0"/>
+                          <a:cs typeface="Times New Roman" panose="02020603050405020304" pitchFamily="18" charset="0"/>
+                        </a:rPr>
+                        <a:t>0.98</a:t>
+                      </a:r>
+                      <a:endParaRPr lang="en-US" sz="2000" b="1" kern="100" dirty="0">
+                        <a:effectLst/>
+                        <a:latin typeface="Aptos" panose="020B0004020202020204" pitchFamily="34" charset="0"/>
+                        <a:ea typeface="Aptos" panose="020B0004020202020204" pitchFamily="34" charset="0"/>
+                        <a:cs typeface="Times New Roman" panose="02020603050405020304" pitchFamily="18" charset="0"/>
+                      </a:endParaRPr>
+                    </a:p>
+                  </a:txBody>
+                  <a:tcPr marL="68580" marR="68580" marT="0" marB="0" anchor="ctr"/>
+                </a:tc>
+                <a:tc>
+                  <a:txBody>
+                    <a:bodyPr/>
+                    <a:lstStyle/>
+                    <a:p>
+                      <a:pPr marL="0" marR="0" algn="ctr">
+                        <a:lnSpc>
+                          <a:spcPct val="115000"/>
+                        </a:lnSpc>
+                        <a:spcAft>
+                          <a:spcPts val="800"/>
+                        </a:spcAft>
+                        <a:buNone/>
+                      </a:pPr>
+                      <a:r>
+                        <a:rPr lang="en-US" sz="2000" b="0" kern="100" dirty="0">
+                          <a:effectLst/>
+                          <a:latin typeface="Arial" panose="020B0604020202020204" pitchFamily="34" charset="0"/>
+                          <a:ea typeface="Aptos" panose="020B0004020202020204" pitchFamily="34" charset="0"/>
+                          <a:cs typeface="Times New Roman" panose="02020603050405020304" pitchFamily="18" charset="0"/>
+                        </a:rPr>
+                        <a:t>0.99</a:t>
+                      </a:r>
+                      <a:endParaRPr lang="en-US" sz="2000" b="0" kern="100" dirty="0">
+                        <a:effectLst/>
+                        <a:latin typeface="Aptos" panose="020B0004020202020204" pitchFamily="34" charset="0"/>
+                        <a:ea typeface="Aptos" panose="020B0004020202020204" pitchFamily="34" charset="0"/>
+                        <a:cs typeface="Times New Roman" panose="02020603050405020304" pitchFamily="18" charset="0"/>
+                      </a:endParaRPr>
+                    </a:p>
+                  </a:txBody>
+                  <a:tcPr marL="68580" marR="68580" marT="0" marB="0" anchor="ctr"/>
+                </a:tc>
+                <a:tc>
+                  <a:txBody>
+                    <a:bodyPr/>
+                    <a:lstStyle/>
+                    <a:p>
+                      <a:pPr marL="0" marR="0" algn="ctr">
+                        <a:lnSpc>
+                          <a:spcPct val="115000"/>
+                        </a:lnSpc>
+                        <a:spcAft>
+                          <a:spcPts val="800"/>
+                        </a:spcAft>
+                        <a:buNone/>
+                      </a:pPr>
+                      <a:r>
+                        <a:rPr lang="en-US" sz="2000" b="0" kern="100" dirty="0">
+                          <a:effectLst/>
+                          <a:latin typeface="Arial" panose="020B0604020202020204" pitchFamily="34" charset="0"/>
+                          <a:ea typeface="Aptos" panose="020B0004020202020204" pitchFamily="34" charset="0"/>
+                          <a:cs typeface="Times New Roman" panose="02020603050405020304" pitchFamily="18" charset="0"/>
+                        </a:rPr>
+                        <a:t>0.98</a:t>
+                      </a:r>
+                      <a:endParaRPr lang="en-US" sz="2000" b="0" kern="100" dirty="0">
+                        <a:effectLst/>
+                        <a:latin typeface="Aptos" panose="020B0004020202020204" pitchFamily="34" charset="0"/>
+                        <a:ea typeface="Aptos" panose="020B0004020202020204" pitchFamily="34" charset="0"/>
+                        <a:cs typeface="Times New Roman" panose="02020603050405020304" pitchFamily="18" charset="0"/>
+                      </a:endParaRPr>
+                    </a:p>
+                  </a:txBody>
+                  <a:tcPr marL="68580" marR="68580" marT="0" marB="0" anchor="ctr"/>
+                </a:tc>
+                <a:tc>
+                  <a:txBody>
+                    <a:bodyPr/>
+                    <a:lstStyle/>
+                    <a:p>
+                      <a:pPr marL="0" marR="0" algn="ctr">
+                        <a:lnSpc>
+                          <a:spcPct val="115000"/>
+                        </a:lnSpc>
+                        <a:spcAft>
+                          <a:spcPts val="800"/>
+                        </a:spcAft>
+                        <a:buNone/>
+                      </a:pPr>
+                      <a:r>
+                        <a:rPr lang="en-US" sz="2000" b="1" kern="100" dirty="0">
+                          <a:effectLst/>
+                          <a:latin typeface="Arial" panose="020B0604020202020204" pitchFamily="34" charset="0"/>
+                          <a:ea typeface="Aptos" panose="020B0004020202020204" pitchFamily="34" charset="0"/>
+                          <a:cs typeface="Times New Roman" panose="02020603050405020304" pitchFamily="18" charset="0"/>
+                        </a:rPr>
+                        <a:t>0.99</a:t>
+                      </a:r>
+                      <a:endParaRPr lang="en-US" sz="2000" b="1" kern="100" dirty="0">
+                        <a:effectLst/>
+                        <a:latin typeface="Aptos" panose="020B0004020202020204" pitchFamily="34" charset="0"/>
+                        <a:ea typeface="Aptos" panose="020B0004020202020204" pitchFamily="34" charset="0"/>
+                        <a:cs typeface="Times New Roman" panose="02020603050405020304" pitchFamily="18" charset="0"/>
+                      </a:endParaRPr>
+                    </a:p>
+                  </a:txBody>
+                  <a:tcPr marL="68580" marR="68580" marT="0" marB="0" anchor="ctr"/>
+                </a:tc>
+                <a:extLst>
+                  <a:ext uri="{0D108BD9-81ED-4DB2-BD59-A6C34878D82A}">
+                    <a16:rowId xmlns:a16="http://schemas.microsoft.com/office/drawing/2014/main" val="95397816"/>
+                  </a:ext>
+                </a:extLst>
+              </a:tr>
+            </a:tbl>
+          </a:graphicData>
+        </a:graphic>
+      </p:graphicFrame>
     </p:spTree>
     <p:extLst>
       <p:ext uri="{BB962C8B-B14F-4D97-AF65-F5344CB8AC3E}">
@@ -4783,4 +7063,319 @@
     </a:ext>
   </a:extLst>
 </a:theme>
+</file>
+
+<file path=ppt/theme/theme2.xml><?xml version="1.0" encoding="utf-8"?>
+<a:theme xmlns:a="http://schemas.openxmlformats.org/drawingml/2006/main" name="Office Theme">
+  <a:themeElements>
+    <a:clrScheme name="Office">
+      <a:dk1>
+        <a:sysClr val="windowText" lastClr="000000"/>
+      </a:dk1>
+      <a:lt1>
+        <a:sysClr val="window" lastClr="FFFFFF"/>
+      </a:lt1>
+      <a:dk2>
+        <a:srgbClr val="0E2841"/>
+      </a:dk2>
+      <a:lt2>
+        <a:srgbClr val="E8E8E8"/>
+      </a:lt2>
+      <a:accent1>
+        <a:srgbClr val="156082"/>
+      </a:accent1>
+      <a:accent2>
+        <a:srgbClr val="E97132"/>
+      </a:accent2>
+      <a:accent3>
+        <a:srgbClr val="196B24"/>
+      </a:accent3>
+      <a:accent4>
+        <a:srgbClr val="0F9ED5"/>
+      </a:accent4>
+      <a:accent5>
+        <a:srgbClr val="A02B93"/>
+      </a:accent5>
+      <a:accent6>
+        <a:srgbClr val="4EA72E"/>
+      </a:accent6>
+      <a:hlink>
+        <a:srgbClr val="467886"/>
+      </a:hlink>
+      <a:folHlink>
+        <a:srgbClr val="96607D"/>
+      </a:folHlink>
+    </a:clrScheme>
+    <a:fontScheme name="Office">
+      <a:majorFont>
+        <a:latin typeface="Aptos Display" panose="02110004020202020204"/>
+        <a:ea typeface=""/>
+        <a:cs typeface=""/>
+        <a:font script="Jpan" typeface="游ゴシック Light"/>
+        <a:font script="Hang" typeface="맑은 고딕"/>
+        <a:font script="Hans" typeface="等线 Light"/>
+        <a:font script="Hant" typeface="新細明體"/>
+        <a:font script="Arab" typeface="Times New Roman"/>
+        <a:font script="Hebr" typeface="Times New Roman"/>
+        <a:font script="Thai" typeface="Angsana New"/>
+        <a:font script="Ethi" typeface="Nyala"/>
+        <a:font script="Beng" typeface="Vrinda"/>
+        <a:font script="Gujr" typeface="Shruti"/>
+        <a:font script="Khmr" typeface="MoolBoran"/>
+        <a:font script="Knda" typeface="Tunga"/>
+        <a:font script="Guru" typeface="Raavi"/>
+        <a:font script="Cans" typeface="Euphemia"/>
+        <a:font script="Cher" typeface="Plantagenet Cherokee"/>
+        <a:font script="Yiii" typeface="Microsoft Yi Baiti"/>
+        <a:font script="Tibt" typeface="Microsoft Himalaya"/>
+        <a:font script="Thaa" typeface="MV Boli"/>
+        <a:font script="Deva" typeface="Mangal"/>
+        <a:font script="Telu" typeface="Gautami"/>
+        <a:font script="Taml" typeface="Latha"/>
+        <a:font script="Syrc" typeface="Estrangelo Edessa"/>
+        <a:font script="Orya" typeface="Kalinga"/>
+        <a:font script="Mlym" typeface="Kartika"/>
+        <a:font script="Laoo" typeface="DokChampa"/>
+        <a:font script="Sinh" typeface="Iskoola Pota"/>
+        <a:font script="Mong" typeface="Mongolian Baiti"/>
+        <a:font script="Viet" typeface="Times New Roman"/>
+        <a:font script="Uigh" typeface="Microsoft Uighur"/>
+        <a:font script="Geor" typeface="Sylfaen"/>
+        <a:font script="Armn" typeface="Arial"/>
+        <a:font script="Bugi" typeface="Leelawadee UI"/>
+        <a:font script="Bopo" typeface="Microsoft JhengHei"/>
+        <a:font script="Java" typeface="Javanese Text"/>
+        <a:font script="Lisu" typeface="Segoe UI"/>
+        <a:font script="Mymr" typeface="Myanmar Text"/>
+        <a:font script="Nkoo" typeface="Ebrima"/>
+        <a:font script="Olck" typeface="Nirmala UI"/>
+        <a:font script="Osma" typeface="Ebrima"/>
+        <a:font script="Phag" typeface="Phagspa"/>
+        <a:font script="Syrn" typeface="Estrangelo Edessa"/>
+        <a:font script="Syrj" typeface="Estrangelo Edessa"/>
+        <a:font script="Syre" typeface="Estrangelo Edessa"/>
+        <a:font script="Sora" typeface="Nirmala UI"/>
+        <a:font script="Tale" typeface="Microsoft Tai Le"/>
+        <a:font script="Talu" typeface="Microsoft New Tai Lue"/>
+        <a:font script="Tfng" typeface="Ebrima"/>
+      </a:majorFont>
+      <a:minorFont>
+        <a:latin typeface="Aptos" panose="02110004020202020204"/>
+        <a:ea typeface=""/>
+        <a:cs typeface=""/>
+        <a:font script="Jpan" typeface="游ゴシック"/>
+        <a:font script="Hang" typeface="맑은 고딕"/>
+        <a:font script="Hans" typeface="等线"/>
+        <a:font script="Hant" typeface="新細明體"/>
+        <a:font script="Arab" typeface="Arial"/>
+        <a:font script="Hebr" typeface="Arial"/>
+        <a:font script="Thai" typeface="Cordia New"/>
+        <a:font script="Ethi" typeface="Nyala"/>
+        <a:font script="Beng" typeface="Vrinda"/>
+        <a:font script="Gujr" typeface="Shruti"/>
+        <a:font script="Khmr" typeface="DaunPenh"/>
+        <a:font script="Knda" typeface="Tunga"/>
+        <a:font script="Guru" typeface="Raavi"/>
+        <a:font script="Cans" typeface="Euphemia"/>
+        <a:font script="Cher" typeface="Plantagenet Cherokee"/>
+        <a:font script="Yiii" typeface="Microsoft Yi Baiti"/>
+        <a:font script="Tibt" typeface="Microsoft Himalaya"/>
+        <a:font script="Thaa" typeface="MV Boli"/>
+        <a:font script="Deva" typeface="Mangal"/>
+        <a:font script="Telu" typeface="Gautami"/>
+        <a:font script="Taml" typeface="Latha"/>
+        <a:font script="Syrc" typeface="Estrangelo Edessa"/>
+        <a:font script="Orya" typeface="Kalinga"/>
+        <a:font script="Mlym" typeface="Kartika"/>
+        <a:font script="Laoo" typeface="DokChampa"/>
+        <a:font script="Sinh" typeface="Iskoola Pota"/>
+        <a:font script="Mong" typeface="Mongolian Baiti"/>
+        <a:font script="Viet" typeface="Arial"/>
+        <a:font script="Uigh" typeface="Microsoft Uighur"/>
+        <a:font script="Geor" typeface="Sylfaen"/>
+        <a:font script="Armn" typeface="Arial"/>
+        <a:font script="Bugi" typeface="Leelawadee UI"/>
+        <a:font script="Bopo" typeface="Microsoft JhengHei"/>
+        <a:font script="Java" typeface="Javanese Text"/>
+        <a:font script="Lisu" typeface="Segoe UI"/>
+        <a:font script="Mymr" typeface="Myanmar Text"/>
+        <a:font script="Nkoo" typeface="Ebrima"/>
+        <a:font script="Olck" typeface="Nirmala UI"/>
+        <a:font script="Osma" typeface="Ebrima"/>
+        <a:font script="Phag" typeface="Phagspa"/>
+        <a:font script="Syrn" typeface="Estrangelo Edessa"/>
+        <a:font script="Syrj" typeface="Estrangelo Edessa"/>
+        <a:font script="Syre" typeface="Estrangelo Edessa"/>
+        <a:font script="Sora" typeface="Nirmala UI"/>
+        <a:font script="Tale" typeface="Microsoft Tai Le"/>
+        <a:font script="Talu" typeface="Microsoft New Tai Lue"/>
+        <a:font script="Tfng" typeface="Ebrima"/>
+      </a:minorFont>
+    </a:fontScheme>
+    <a:fmtScheme name="Office">
+      <a:fillStyleLst>
+        <a:solidFill>
+          <a:schemeClr val="phClr"/>
+        </a:solidFill>
+        <a:gradFill rotWithShape="1">
+          <a:gsLst>
+            <a:gs pos="0">
+              <a:schemeClr val="phClr">
+                <a:lumMod val="110000"/>
+                <a:satMod val="105000"/>
+                <a:tint val="67000"/>
+              </a:schemeClr>
+            </a:gs>
+            <a:gs pos="50000">
+              <a:schemeClr val="phClr">
+                <a:lumMod val="105000"/>
+                <a:satMod val="103000"/>
+                <a:tint val="73000"/>
+              </a:schemeClr>
+            </a:gs>
+            <a:gs pos="100000">
+              <a:schemeClr val="phClr">
+                <a:lumMod val="105000"/>
+                <a:satMod val="109000"/>
+                <a:tint val="81000"/>
+              </a:schemeClr>
+            </a:gs>
+          </a:gsLst>
+          <a:lin ang="5400000" scaled="0"/>
+        </a:gradFill>
+        <a:gradFill rotWithShape="1">
+          <a:gsLst>
+            <a:gs pos="0">
+              <a:schemeClr val="phClr">
+                <a:satMod val="103000"/>
+                <a:lumMod val="102000"/>
+                <a:tint val="94000"/>
+              </a:schemeClr>
+            </a:gs>
+            <a:gs pos="50000">
+              <a:schemeClr val="phClr">
+                <a:satMod val="110000"/>
+                <a:lumMod val="100000"/>
+                <a:shade val="100000"/>
+              </a:schemeClr>
+            </a:gs>
+            <a:gs pos="100000">
+              <a:schemeClr val="phClr">
+                <a:lumMod val="99000"/>
+                <a:satMod val="120000"/>
+                <a:shade val="78000"/>
+              </a:schemeClr>
+            </a:gs>
+          </a:gsLst>
+          <a:lin ang="5400000" scaled="0"/>
+        </a:gradFill>
+      </a:fillStyleLst>
+      <a:lnStyleLst>
+        <a:ln w="12700" cap="flat" cmpd="sng" algn="ctr">
+          <a:solidFill>
+            <a:schemeClr val="phClr"/>
+          </a:solidFill>
+          <a:prstDash val="solid"/>
+          <a:miter lim="800000"/>
+        </a:ln>
+        <a:ln w="19050" cap="flat" cmpd="sng" algn="ctr">
+          <a:solidFill>
+            <a:schemeClr val="phClr"/>
+          </a:solidFill>
+          <a:prstDash val="solid"/>
+          <a:miter lim="800000"/>
+        </a:ln>
+        <a:ln w="25400" cap="flat" cmpd="sng" algn="ctr">
+          <a:solidFill>
+            <a:schemeClr val="phClr"/>
+          </a:solidFill>
+          <a:prstDash val="solid"/>
+          <a:miter lim="800000"/>
+        </a:ln>
+      </a:lnStyleLst>
+      <a:effectStyleLst>
+        <a:effectStyle>
+          <a:effectLst/>
+        </a:effectStyle>
+        <a:effectStyle>
+          <a:effectLst/>
+        </a:effectStyle>
+        <a:effectStyle>
+          <a:effectLst>
+            <a:outerShdw blurRad="57150" dist="19050" dir="5400000" algn="ctr" rotWithShape="0">
+              <a:srgbClr val="000000">
+                <a:alpha val="63000"/>
+              </a:srgbClr>
+            </a:outerShdw>
+          </a:effectLst>
+        </a:effectStyle>
+      </a:effectStyleLst>
+      <a:bgFillStyleLst>
+        <a:solidFill>
+          <a:schemeClr val="phClr"/>
+        </a:solidFill>
+        <a:solidFill>
+          <a:schemeClr val="phClr">
+            <a:tint val="95000"/>
+            <a:satMod val="170000"/>
+          </a:schemeClr>
+        </a:solidFill>
+        <a:gradFill rotWithShape="1">
+          <a:gsLst>
+            <a:gs pos="0">
+              <a:schemeClr val="phClr">
+                <a:tint val="93000"/>
+                <a:satMod val="150000"/>
+                <a:shade val="98000"/>
+                <a:lumMod val="102000"/>
+              </a:schemeClr>
+            </a:gs>
+            <a:gs pos="50000">
+              <a:schemeClr val="phClr">
+                <a:tint val="98000"/>
+                <a:satMod val="130000"/>
+                <a:shade val="90000"/>
+                <a:lumMod val="103000"/>
+              </a:schemeClr>
+            </a:gs>
+            <a:gs pos="100000">
+              <a:schemeClr val="phClr">
+                <a:shade val="63000"/>
+                <a:satMod val="120000"/>
+              </a:schemeClr>
+            </a:gs>
+          </a:gsLst>
+          <a:lin ang="5400000" scaled="0"/>
+        </a:gradFill>
+      </a:bgFillStyleLst>
+    </a:fmtScheme>
+  </a:themeElements>
+  <a:objectDefaults>
+    <a:lnDef>
+      <a:spPr/>
+      <a:bodyPr/>
+      <a:lstStyle/>
+      <a:style>
+        <a:lnRef idx="2">
+          <a:schemeClr val="accent1"/>
+        </a:lnRef>
+        <a:fillRef idx="0">
+          <a:schemeClr val="accent1"/>
+        </a:fillRef>
+        <a:effectRef idx="1">
+          <a:schemeClr val="accent1"/>
+        </a:effectRef>
+        <a:fontRef idx="minor">
+          <a:schemeClr val="tx1"/>
+        </a:fontRef>
+      </a:style>
+    </a:lnDef>
+  </a:objectDefaults>
+  <a:extraClrSchemeLst/>
+  <a:extLst>
+    <a:ext uri="{05A4C25C-085E-4340-85A3-A5531E510DB2}">
+      <thm15:themeFamily xmlns:thm15="http://schemas.microsoft.com/office/thememl/2012/main" name="Office Theme" id="{2E142A2C-CD16-42D6-873A-C26D2A0506FA}" vid="{1BDDFF52-6CD6-40A5-AB3C-68EB2F1E4D0A}"/>
+    </a:ext>
+  </a:extLst>
+</a:theme>
 </file>